--- a/img/image_design.pptx
+++ b/img/image_design.pptx
@@ -4,8 +4,15 @@
   <p:sldMasterIdLst>
     <p:sldMasterId id="2147483648" r:id="rId1"/>
   </p:sldMasterIdLst>
+  <p:notesMasterIdLst>
+    <p:notesMasterId r:id="rId7"/>
+  </p:notesMasterIdLst>
   <p:sldIdLst>
-    <p:sldId id="256" r:id="rId2"/>
+    <p:sldId id="293" r:id="rId2"/>
+    <p:sldId id="291" r:id="rId3"/>
+    <p:sldId id="294" r:id="rId4"/>
+    <p:sldId id="295" r:id="rId5"/>
+    <p:sldId id="290" r:id="rId6"/>
   </p:sldIdLst>
   <p:sldSz cx="12192000" cy="6858000"/>
   <p:notesSz cx="6858000" cy="9144000"/>
@@ -115,7 +122,7 @@
 <file path=ppt/revisionInfo.xml><?xml version="1.0" encoding="utf-8"?>
 <p1510:revInfo xmlns:a="http://schemas.openxmlformats.org/drawingml/2006/main" xmlns:r="http://schemas.openxmlformats.org/officeDocument/2006/relationships" xmlns:p1510="http://schemas.microsoft.com/office/powerpoint/2015/10/main">
   <p1510:revLst>
-    <p1510:client id="{606B29CB-C2E0-4B03-925C-C347D9C2C9E9}" v="4" dt="2025-07-14T12:17:33.401"/>
+    <p1510:client id="{81FDC7CA-1F18-4133-AE79-B0A4B3BEE4B5}" v="25" dt="2026-09-24T08:57:50.408"/>
   </p1510:revLst>
 </p1510:revInfo>
 </file>
@@ -123,36 +130,60 @@
 <file path=ppt/changesInfos/changesInfo1.xml><?xml version="1.0" encoding="utf-8"?>
 <pc:chgInfo xmlns:a="http://schemas.openxmlformats.org/drawingml/2006/main" xmlns:r="http://schemas.openxmlformats.org/officeDocument/2006/relationships" xmlns:ac="http://schemas.microsoft.com/office/drawing/2013/main/command" xmlns:pc="http://schemas.microsoft.com/office/powerpoint/2013/main/command">
   <pc:docChgLst>
-    <pc:chgData name="Nina Dombrowski" userId="1f2bfacd-2a29-43dd-9bcd-fba75591e3fa" providerId="ADAL" clId="{606B29CB-C2E0-4B03-925C-C347D9C2C9E9}"/>
-    <pc:docChg chg="undo custSel modSld">
-      <pc:chgData name="Nina Dombrowski" userId="1f2bfacd-2a29-43dd-9bcd-fba75591e3fa" providerId="ADAL" clId="{606B29CB-C2E0-4B03-925C-C347D9C2C9E9}" dt="2025-07-14T12:17:33.401" v="31" actId="164"/>
+    <pc:chgData name="Nina Dombrowski" userId="1f2bfacd-2a29-43dd-9bcd-fba75591e3fa" providerId="ADAL" clId="{A1E0730E-2E14-4CD5-AA17-1C7BD8AC580B}"/>
+    <pc:docChg chg="undo custSel addSld delSld modSld">
+      <pc:chgData name="Nina Dombrowski" userId="1f2bfacd-2a29-43dd-9bcd-fba75591e3fa" providerId="ADAL" clId="{A1E0730E-2E14-4CD5-AA17-1C7BD8AC580B}" dt="2026-09-24T08:57:50.400" v="1691" actId="164"/>
       <pc:docMkLst>
         <pc:docMk/>
       </pc:docMkLst>
-      <pc:sldChg chg="addSp delSp modSp mod">
-        <pc:chgData name="Nina Dombrowski" userId="1f2bfacd-2a29-43dd-9bcd-fba75591e3fa" providerId="ADAL" clId="{606B29CB-C2E0-4B03-925C-C347D9C2C9E9}" dt="2025-07-14T12:17:33.401" v="31" actId="164"/>
+      <pc:sldChg chg="addSp delSp modSp del mod">
+        <pc:chgData name="Nina Dombrowski" userId="1f2bfacd-2a29-43dd-9bcd-fba75591e3fa" providerId="ADAL" clId="{A1E0730E-2E14-4CD5-AA17-1C7BD8AC580B}" dt="2026-09-24T08:06:05.563" v="163" actId="47"/>
         <pc:sldMkLst>
           <pc:docMk/>
           <pc:sldMk cId="3960934056" sldId="256"/>
         </pc:sldMkLst>
         <pc:spChg chg="mod topLvl">
-          <ac:chgData name="Nina Dombrowski" userId="1f2bfacd-2a29-43dd-9bcd-fba75591e3fa" providerId="ADAL" clId="{606B29CB-C2E0-4B03-925C-C347D9C2C9E9}" dt="2025-07-14T12:17:33.401" v="31" actId="164"/>
+          <ac:chgData name="Nina Dombrowski" userId="1f2bfacd-2a29-43dd-9bcd-fba75591e3fa" providerId="ADAL" clId="{A1E0730E-2E14-4CD5-AA17-1C7BD8AC580B}" dt="2026-09-24T07:12:55.778" v="37" actId="1037"/>
           <ac:spMkLst>
             <pc:docMk/>
             <pc:sldMk cId="3960934056" sldId="256"/>
             <ac:spMk id="4" creationId="{D045D440-78C1-4C0D-5F4F-BC42E79077A2}"/>
           </ac:spMkLst>
         </pc:spChg>
+        <pc:spChg chg="add del mod">
+          <ac:chgData name="Nina Dombrowski" userId="1f2bfacd-2a29-43dd-9bcd-fba75591e3fa" providerId="ADAL" clId="{A1E0730E-2E14-4CD5-AA17-1C7BD8AC580B}" dt="2026-09-24T07:12:58.653" v="40" actId="21"/>
+          <ac:spMkLst>
+            <pc:docMk/>
+            <pc:sldMk cId="3960934056" sldId="256"/>
+            <ac:spMk id="5" creationId="{C057DE56-0615-2F14-6C4F-9B9845C94AAF}"/>
+          </ac:spMkLst>
+        </pc:spChg>
+        <pc:spChg chg="add mod">
+          <ac:chgData name="Nina Dombrowski" userId="1f2bfacd-2a29-43dd-9bcd-fba75591e3fa" providerId="ADAL" clId="{A1E0730E-2E14-4CD5-AA17-1C7BD8AC580B}" dt="2026-09-24T07:18:54.582" v="152" actId="1076"/>
+          <ac:spMkLst>
+            <pc:docMk/>
+            <pc:sldMk cId="3960934056" sldId="256"/>
+            <ac:spMk id="5" creationId="{C9047F15-CBCF-F886-8197-519D813D5204}"/>
+          </ac:spMkLst>
+        </pc:spChg>
         <pc:spChg chg="mod topLvl">
-          <ac:chgData name="Nina Dombrowski" userId="1f2bfacd-2a29-43dd-9bcd-fba75591e3fa" providerId="ADAL" clId="{606B29CB-C2E0-4B03-925C-C347D9C2C9E9}" dt="2025-07-14T12:17:33.401" v="31" actId="164"/>
+          <ac:chgData name="Nina Dombrowski" userId="1f2bfacd-2a29-43dd-9bcd-fba75591e3fa" providerId="ADAL" clId="{A1E0730E-2E14-4CD5-AA17-1C7BD8AC580B}" dt="2026-09-24T06:50:06.879" v="0" actId="165"/>
           <ac:spMkLst>
             <pc:docMk/>
             <pc:sldMk cId="3960934056" sldId="256"/>
             <ac:spMk id="7" creationId="{2B05F203-F766-9E72-9F9B-EFF0720AE500}"/>
           </ac:spMkLst>
         </pc:spChg>
-        <pc:spChg chg="mod topLvl">
-          <ac:chgData name="Nina Dombrowski" userId="1f2bfacd-2a29-43dd-9bcd-fba75591e3fa" providerId="ADAL" clId="{606B29CB-C2E0-4B03-925C-C347D9C2C9E9}" dt="2025-07-14T12:17:33.401" v="31" actId="164"/>
+        <pc:spChg chg="mod">
+          <ac:chgData name="Nina Dombrowski" userId="1f2bfacd-2a29-43dd-9bcd-fba75591e3fa" providerId="ADAL" clId="{A1E0730E-2E14-4CD5-AA17-1C7BD8AC580B}" dt="2026-09-24T07:46:07.434" v="162" actId="164"/>
+          <ac:spMkLst>
+            <pc:docMk/>
+            <pc:sldMk cId="3960934056" sldId="256"/>
+            <ac:spMk id="8" creationId="{F1A1917C-FF36-898A-402E-85CB4E7CC561}"/>
+          </ac:spMkLst>
+        </pc:spChg>
+        <pc:spChg chg="mod">
+          <ac:chgData name="Nina Dombrowski" userId="1f2bfacd-2a29-43dd-9bcd-fba75591e3fa" providerId="ADAL" clId="{A1E0730E-2E14-4CD5-AA17-1C7BD8AC580B}" dt="2026-09-24T07:46:07.434" v="162" actId="164"/>
           <ac:spMkLst>
             <pc:docMk/>
             <pc:sldMk cId="3960934056" sldId="256"/>
@@ -160,7 +191,7 @@
           </ac:spMkLst>
         </pc:spChg>
         <pc:spChg chg="mod topLvl">
-          <ac:chgData name="Nina Dombrowski" userId="1f2bfacd-2a29-43dd-9bcd-fba75591e3fa" providerId="ADAL" clId="{606B29CB-C2E0-4B03-925C-C347D9C2C9E9}" dt="2025-07-14T12:17:33.401" v="31" actId="164"/>
+          <ac:chgData name="Nina Dombrowski" userId="1f2bfacd-2a29-43dd-9bcd-fba75591e3fa" providerId="ADAL" clId="{A1E0730E-2E14-4CD5-AA17-1C7BD8AC580B}" dt="2026-09-24T07:11:35.769" v="5" actId="6549"/>
           <ac:spMkLst>
             <pc:docMk/>
             <pc:sldMk cId="3960934056" sldId="256"/>
@@ -168,39 +199,79 @@
           </ac:spMkLst>
         </pc:spChg>
         <pc:spChg chg="mod topLvl">
-          <ac:chgData name="Nina Dombrowski" userId="1f2bfacd-2a29-43dd-9bcd-fba75591e3fa" providerId="ADAL" clId="{606B29CB-C2E0-4B03-925C-C347D9C2C9E9}" dt="2025-07-14T12:17:33.401" v="31" actId="164"/>
+          <ac:chgData name="Nina Dombrowski" userId="1f2bfacd-2a29-43dd-9bcd-fba75591e3fa" providerId="ADAL" clId="{A1E0730E-2E14-4CD5-AA17-1C7BD8AC580B}" dt="2026-09-24T07:46:07.434" v="162" actId="164"/>
+          <ac:spMkLst>
+            <pc:docMk/>
+            <pc:sldMk cId="3960934056" sldId="256"/>
+            <ac:spMk id="11" creationId="{679532BE-FAB5-8268-5E71-4B94DDB32B28}"/>
+          </ac:spMkLst>
+        </pc:spChg>
+        <pc:spChg chg="mod">
+          <ac:chgData name="Nina Dombrowski" userId="1f2bfacd-2a29-43dd-9bcd-fba75591e3fa" providerId="ADAL" clId="{A1E0730E-2E14-4CD5-AA17-1C7BD8AC580B}" dt="2026-09-24T07:30:14.259" v="155" actId="113"/>
           <ac:spMkLst>
             <pc:docMk/>
             <pc:sldMk cId="3960934056" sldId="256"/>
             <ac:spMk id="13" creationId="{7962918C-0814-56FD-CC01-874B6DB80D87}"/>
           </ac:spMkLst>
         </pc:spChg>
-        <pc:spChg chg="mod topLvl">
-          <ac:chgData name="Nina Dombrowski" userId="1f2bfacd-2a29-43dd-9bcd-fba75591e3fa" providerId="ADAL" clId="{606B29CB-C2E0-4B03-925C-C347D9C2C9E9}" dt="2025-07-14T12:17:33.401" v="31" actId="164"/>
+        <pc:spChg chg="mod">
+          <ac:chgData name="Nina Dombrowski" userId="1f2bfacd-2a29-43dd-9bcd-fba75591e3fa" providerId="ADAL" clId="{A1E0730E-2E14-4CD5-AA17-1C7BD8AC580B}" dt="2026-09-24T07:46:07.434" v="162" actId="164"/>
           <ac:spMkLst>
             <pc:docMk/>
             <pc:sldMk cId="3960934056" sldId="256"/>
             <ac:spMk id="14" creationId="{F320FF99-C067-1BCA-AEEF-A33AF3D09B70}"/>
           </ac:spMkLst>
         </pc:spChg>
-        <pc:spChg chg="mod">
-          <ac:chgData name="Nina Dombrowski" userId="1f2bfacd-2a29-43dd-9bcd-fba75591e3fa" providerId="ADAL" clId="{606B29CB-C2E0-4B03-925C-C347D9C2C9E9}" dt="2025-07-14T08:59:36.453" v="1" actId="12789"/>
+        <pc:spChg chg="mod topLvl">
+          <ac:chgData name="Nina Dombrowski" userId="1f2bfacd-2a29-43dd-9bcd-fba75591e3fa" providerId="ADAL" clId="{A1E0730E-2E14-4CD5-AA17-1C7BD8AC580B}" dt="2026-09-24T07:46:07.434" v="162" actId="164"/>
           <ac:spMkLst>
             <pc:docMk/>
             <pc:sldMk cId="3960934056" sldId="256"/>
             <ac:spMk id="15" creationId="{5764C468-27E7-D485-4D03-16652C75A0B3}"/>
           </ac:spMkLst>
         </pc:spChg>
+        <pc:spChg chg="add del mod">
+          <ac:chgData name="Nina Dombrowski" userId="1f2bfacd-2a29-43dd-9bcd-fba75591e3fa" providerId="ADAL" clId="{A1E0730E-2E14-4CD5-AA17-1C7BD8AC580B}" dt="2026-09-24T07:12:58.653" v="40" actId="21"/>
+          <ac:spMkLst>
+            <pc:docMk/>
+            <pc:sldMk cId="3960934056" sldId="256"/>
+            <ac:spMk id="16" creationId="{B3D1DCEC-DA7B-B6B9-9E7F-B3CE38B44972}"/>
+          </ac:spMkLst>
+        </pc:spChg>
+        <pc:spChg chg="add del mod">
+          <ac:chgData name="Nina Dombrowski" userId="1f2bfacd-2a29-43dd-9bcd-fba75591e3fa" providerId="ADAL" clId="{A1E0730E-2E14-4CD5-AA17-1C7BD8AC580B}" dt="2026-09-24T07:12:58.653" v="40" actId="21"/>
+          <ac:spMkLst>
+            <pc:docMk/>
+            <pc:sldMk cId="3960934056" sldId="256"/>
+            <ac:spMk id="19" creationId="{41825A4B-B6D9-4E18-156D-9801ED26BC9F}"/>
+          </ac:spMkLst>
+        </pc:spChg>
+        <pc:spChg chg="add mod">
+          <ac:chgData name="Nina Dombrowski" userId="1f2bfacd-2a29-43dd-9bcd-fba75591e3fa" providerId="ADAL" clId="{A1E0730E-2E14-4CD5-AA17-1C7BD8AC580B}" dt="2026-09-24T07:46:07.434" v="162" actId="164"/>
+          <ac:spMkLst>
+            <pc:docMk/>
+            <pc:sldMk cId="3960934056" sldId="256"/>
+            <ac:spMk id="21" creationId="{86342743-6A1D-5F5D-C87E-60E111D59DE8}"/>
+          </ac:spMkLst>
+        </pc:spChg>
+        <pc:spChg chg="add mod">
+          <ac:chgData name="Nina Dombrowski" userId="1f2bfacd-2a29-43dd-9bcd-fba75591e3fa" providerId="ADAL" clId="{A1E0730E-2E14-4CD5-AA17-1C7BD8AC580B}" dt="2026-09-24T07:15:23.371" v="137" actId="1037"/>
+          <ac:spMkLst>
+            <pc:docMk/>
+            <pc:sldMk cId="3960934056" sldId="256"/>
+            <ac:spMk id="23" creationId="{F411C7DA-B95C-211B-97E4-3B2F299C1042}"/>
+          </ac:spMkLst>
+        </pc:spChg>
         <pc:spChg chg="mod">
-          <ac:chgData name="Nina Dombrowski" userId="1f2bfacd-2a29-43dd-9bcd-fba75591e3fa" providerId="ADAL" clId="{606B29CB-C2E0-4B03-925C-C347D9C2C9E9}" dt="2025-07-14T12:17:06.369" v="27" actId="1036"/>
+          <ac:chgData name="Nina Dombrowski" userId="1f2bfacd-2a29-43dd-9bcd-fba75591e3fa" providerId="ADAL" clId="{A1E0730E-2E14-4CD5-AA17-1C7BD8AC580B}" dt="2026-09-24T07:46:07.434" v="162" actId="164"/>
           <ac:spMkLst>
             <pc:docMk/>
             <pc:sldMk cId="3960934056" sldId="256"/>
             <ac:spMk id="24" creationId="{45744D7A-E8EE-87E0-318A-DFFB235FD6A9}"/>
           </ac:spMkLst>
         </pc:spChg>
-        <pc:spChg chg="mod topLvl">
-          <ac:chgData name="Nina Dombrowski" userId="1f2bfacd-2a29-43dd-9bcd-fba75591e3fa" providerId="ADAL" clId="{606B29CB-C2E0-4B03-925C-C347D9C2C9E9}" dt="2025-07-14T12:17:33.401" v="31" actId="164"/>
+        <pc:spChg chg="add del mod">
+          <ac:chgData name="Nina Dombrowski" userId="1f2bfacd-2a29-43dd-9bcd-fba75591e3fa" providerId="ADAL" clId="{A1E0730E-2E14-4CD5-AA17-1C7BD8AC580B}" dt="2026-09-24T07:13:09.940" v="59" actId="1037"/>
           <ac:spMkLst>
             <pc:docMk/>
             <pc:sldMk cId="3960934056" sldId="256"/>
@@ -208,7 +279,7 @@
           </ac:spMkLst>
         </pc:spChg>
         <pc:spChg chg="mod">
-          <ac:chgData name="Nina Dombrowski" userId="1f2bfacd-2a29-43dd-9bcd-fba75591e3fa" providerId="ADAL" clId="{606B29CB-C2E0-4B03-925C-C347D9C2C9E9}" dt="2025-07-14T12:17:06.369" v="27" actId="1036"/>
+          <ac:chgData name="Nina Dombrowski" userId="1f2bfacd-2a29-43dd-9bcd-fba75591e3fa" providerId="ADAL" clId="{A1E0730E-2E14-4CD5-AA17-1C7BD8AC580B}" dt="2026-09-24T07:12:55.778" v="37" actId="1037"/>
           <ac:spMkLst>
             <pc:docMk/>
             <pc:sldMk cId="3960934056" sldId="256"/>
@@ -216,31 +287,39 @@
           </ac:spMkLst>
         </pc:spChg>
         <pc:spChg chg="mod topLvl">
-          <ac:chgData name="Nina Dombrowski" userId="1f2bfacd-2a29-43dd-9bcd-fba75591e3fa" providerId="ADAL" clId="{606B29CB-C2E0-4B03-925C-C347D9C2C9E9}" dt="2025-07-14T12:17:33.401" v="31" actId="164"/>
+          <ac:chgData name="Nina Dombrowski" userId="1f2bfacd-2a29-43dd-9bcd-fba75591e3fa" providerId="ADAL" clId="{A1E0730E-2E14-4CD5-AA17-1C7BD8AC580B}" dt="2026-09-24T07:30:16.579" v="156" actId="113"/>
           <ac:spMkLst>
             <pc:docMk/>
             <pc:sldMk cId="3960934056" sldId="256"/>
             <ac:spMk id="27" creationId="{D5BBD72A-355B-A80A-FF79-5B3268DC475D}"/>
           </ac:spMkLst>
         </pc:spChg>
-        <pc:spChg chg="mod">
-          <ac:chgData name="Nina Dombrowski" userId="1f2bfacd-2a29-43dd-9bcd-fba75591e3fa" providerId="ADAL" clId="{606B29CB-C2E0-4B03-925C-C347D9C2C9E9}" dt="2025-07-14T12:17:22.357" v="30" actId="20577"/>
+        <pc:spChg chg="mod topLvl">
+          <ac:chgData name="Nina Dombrowski" userId="1f2bfacd-2a29-43dd-9bcd-fba75591e3fa" providerId="ADAL" clId="{A1E0730E-2E14-4CD5-AA17-1C7BD8AC580B}" dt="2026-09-24T07:18:33.505" v="148" actId="20577"/>
           <ac:spMkLst>
             <pc:docMk/>
             <pc:sldMk cId="3960934056" sldId="256"/>
             <ac:spMk id="28" creationId="{7512CD16-20EC-993D-789F-7640DA2090AC}"/>
           </ac:spMkLst>
         </pc:spChg>
+        <pc:spChg chg="mod topLvl">
+          <ac:chgData name="Nina Dombrowski" userId="1f2bfacd-2a29-43dd-9bcd-fba75591e3fa" providerId="ADAL" clId="{A1E0730E-2E14-4CD5-AA17-1C7BD8AC580B}" dt="2026-09-24T07:46:03.260" v="161" actId="164"/>
+          <ac:spMkLst>
+            <pc:docMk/>
+            <pc:sldMk cId="3960934056" sldId="256"/>
+            <ac:spMk id="32" creationId="{8A5DBBCE-44ED-0D81-DD63-AF79DD164729}"/>
+          </ac:spMkLst>
+        </pc:spChg>
         <pc:spChg chg="mod">
-          <ac:chgData name="Nina Dombrowski" userId="1f2bfacd-2a29-43dd-9bcd-fba75591e3fa" providerId="ADAL" clId="{606B29CB-C2E0-4B03-925C-C347D9C2C9E9}" dt="2025-07-14T12:17:06.369" v="27" actId="1036"/>
+          <ac:chgData name="Nina Dombrowski" userId="1f2bfacd-2a29-43dd-9bcd-fba75591e3fa" providerId="ADAL" clId="{A1E0730E-2E14-4CD5-AA17-1C7BD8AC580B}" dt="2026-09-24T07:11:53.386" v="10" actId="6549"/>
           <ac:spMkLst>
             <pc:docMk/>
             <pc:sldMk cId="3960934056" sldId="256"/>
             <ac:spMk id="33" creationId="{A9DB57F1-8B77-5912-DBFA-0D5D4A6EF311}"/>
           </ac:spMkLst>
         </pc:spChg>
-        <pc:spChg chg="mod topLvl">
-          <ac:chgData name="Nina Dombrowski" userId="1f2bfacd-2a29-43dd-9bcd-fba75591e3fa" providerId="ADAL" clId="{606B29CB-C2E0-4B03-925C-C347D9C2C9E9}" dt="2025-07-14T12:17:33.401" v="31" actId="164"/>
+        <pc:spChg chg="mod">
+          <ac:chgData name="Nina Dombrowski" userId="1f2bfacd-2a29-43dd-9bcd-fba75591e3fa" providerId="ADAL" clId="{A1E0730E-2E14-4CD5-AA17-1C7BD8AC580B}" dt="2026-09-24T07:30:18.829" v="157" actId="113"/>
           <ac:spMkLst>
             <pc:docMk/>
             <pc:sldMk cId="3960934056" sldId="256"/>
@@ -248,7 +327,7 @@
           </ac:spMkLst>
         </pc:spChg>
         <pc:spChg chg="mod">
-          <ac:chgData name="Nina Dombrowski" userId="1f2bfacd-2a29-43dd-9bcd-fba75591e3fa" providerId="ADAL" clId="{606B29CB-C2E0-4B03-925C-C347D9C2C9E9}" dt="2025-07-14T12:17:06.369" v="27" actId="1036"/>
+          <ac:chgData name="Nina Dombrowski" userId="1f2bfacd-2a29-43dd-9bcd-fba75591e3fa" providerId="ADAL" clId="{A1E0730E-2E14-4CD5-AA17-1C7BD8AC580B}" dt="2026-09-24T07:46:07.434" v="162" actId="164"/>
           <ac:spMkLst>
             <pc:docMk/>
             <pc:sldMk cId="3960934056" sldId="256"/>
@@ -256,7 +335,7 @@
           </ac:spMkLst>
         </pc:spChg>
         <pc:spChg chg="mod">
-          <ac:chgData name="Nina Dombrowski" userId="1f2bfacd-2a29-43dd-9bcd-fba75591e3fa" providerId="ADAL" clId="{606B29CB-C2E0-4B03-925C-C347D9C2C9E9}" dt="2025-07-14T09:00:27.546" v="3" actId="164"/>
+          <ac:chgData name="Nina Dombrowski" userId="1f2bfacd-2a29-43dd-9bcd-fba75591e3fa" providerId="ADAL" clId="{A1E0730E-2E14-4CD5-AA17-1C7BD8AC580B}" dt="2026-09-24T07:46:07.434" v="162" actId="164"/>
           <ac:spMkLst>
             <pc:docMk/>
             <pc:sldMk cId="3960934056" sldId="256"/>
@@ -264,15 +343,23 @@
           </ac:spMkLst>
         </pc:spChg>
         <pc:spChg chg="mod topLvl">
-          <ac:chgData name="Nina Dombrowski" userId="1f2bfacd-2a29-43dd-9bcd-fba75591e3fa" providerId="ADAL" clId="{606B29CB-C2E0-4B03-925C-C347D9C2C9E9}" dt="2025-07-14T12:17:33.401" v="31" actId="164"/>
+          <ac:chgData name="Nina Dombrowski" userId="1f2bfacd-2a29-43dd-9bcd-fba75591e3fa" providerId="ADAL" clId="{A1E0730E-2E14-4CD5-AA17-1C7BD8AC580B}" dt="2026-09-24T07:13:09.940" v="59" actId="1037"/>
           <ac:spMkLst>
             <pc:docMk/>
             <pc:sldMk cId="3960934056" sldId="256"/>
             <ac:spMk id="38" creationId="{D66C399C-22A7-7A82-F481-CD39EFCB40C5}"/>
           </ac:spMkLst>
         </pc:spChg>
+        <pc:spChg chg="mod topLvl">
+          <ac:chgData name="Nina Dombrowski" userId="1f2bfacd-2a29-43dd-9bcd-fba75591e3fa" providerId="ADAL" clId="{A1E0730E-2E14-4CD5-AA17-1C7BD8AC580B}" dt="2026-09-24T06:50:06.879" v="0" actId="165"/>
+          <ac:spMkLst>
+            <pc:docMk/>
+            <pc:sldMk cId="3960934056" sldId="256"/>
+            <ac:spMk id="39" creationId="{DB66D24E-A68C-C674-F25E-52E597743723}"/>
+          </ac:spMkLst>
+        </pc:spChg>
         <pc:spChg chg="mod">
-          <ac:chgData name="Nina Dombrowski" userId="1f2bfacd-2a29-43dd-9bcd-fba75591e3fa" providerId="ADAL" clId="{606B29CB-C2E0-4B03-925C-C347D9C2C9E9}" dt="2025-07-14T12:17:06.369" v="27" actId="1036"/>
+          <ac:chgData name="Nina Dombrowski" userId="1f2bfacd-2a29-43dd-9bcd-fba75591e3fa" providerId="ADAL" clId="{A1E0730E-2E14-4CD5-AA17-1C7BD8AC580B}" dt="2026-09-24T07:15:15.636" v="132" actId="113"/>
           <ac:spMkLst>
             <pc:docMk/>
             <pc:sldMk cId="3960934056" sldId="256"/>
@@ -280,15 +367,23 @@
           </ac:spMkLst>
         </pc:spChg>
         <pc:spChg chg="mod">
-          <ac:chgData name="Nina Dombrowski" userId="1f2bfacd-2a29-43dd-9bcd-fba75591e3fa" providerId="ADAL" clId="{606B29CB-C2E0-4B03-925C-C347D9C2C9E9}" dt="2025-07-14T12:17:06.369" v="27" actId="1036"/>
+          <ac:chgData name="Nina Dombrowski" userId="1f2bfacd-2a29-43dd-9bcd-fba75591e3fa" providerId="ADAL" clId="{A1E0730E-2E14-4CD5-AA17-1C7BD8AC580B}" dt="2026-09-24T07:46:07.434" v="162" actId="164"/>
           <ac:spMkLst>
             <pc:docMk/>
             <pc:sldMk cId="3960934056" sldId="256"/>
             <ac:spMk id="42" creationId="{982B4967-A453-7413-C50F-070AA579BB4D}"/>
           </ac:spMkLst>
         </pc:spChg>
-        <pc:cxnChg chg="add mod">
-          <ac:chgData name="Nina Dombrowski" userId="1f2bfacd-2a29-43dd-9bcd-fba75591e3fa" providerId="ADAL" clId="{606B29CB-C2E0-4B03-925C-C347D9C2C9E9}" dt="2025-07-14T12:17:16.173" v="29" actId="1076"/>
+        <pc:spChg chg="add mod">
+          <ac:chgData name="Nina Dombrowski" userId="1f2bfacd-2a29-43dd-9bcd-fba75591e3fa" providerId="ADAL" clId="{A1E0730E-2E14-4CD5-AA17-1C7BD8AC580B}" dt="2026-09-24T07:15:23.371" v="137" actId="1037"/>
+          <ac:spMkLst>
+            <pc:docMk/>
+            <pc:sldMk cId="3960934056" sldId="256"/>
+            <ac:spMk id="43" creationId="{D761B2EE-25A5-31A7-92BC-F77FF2F6690C}"/>
+          </ac:spMkLst>
+        </pc:spChg>
+        <pc:cxnChg chg="mod">
+          <ac:chgData name="Nina Dombrowski" userId="1f2bfacd-2a29-43dd-9bcd-fba75591e3fa" providerId="ADAL" clId="{A1E0730E-2E14-4CD5-AA17-1C7BD8AC580B}" dt="2026-09-24T07:29:34.538" v="154" actId="693"/>
           <ac:cxnSpMkLst>
             <pc:docMk/>
             <pc:sldMk cId="3960934056" sldId="256"/>
@@ -296,17 +391,1664 @@
           </ac:cxnSpMkLst>
         </pc:cxnChg>
         <pc:cxnChg chg="mod">
-          <ac:chgData name="Nina Dombrowski" userId="1f2bfacd-2a29-43dd-9bcd-fba75591e3fa" providerId="ADAL" clId="{606B29CB-C2E0-4B03-925C-C347D9C2C9E9}" dt="2025-07-14T08:59:36.453" v="1" actId="12789"/>
+          <ac:chgData name="Nina Dombrowski" userId="1f2bfacd-2a29-43dd-9bcd-fba75591e3fa" providerId="ADAL" clId="{A1E0730E-2E14-4CD5-AA17-1C7BD8AC580B}" dt="2026-09-24T07:11:45.723" v="9" actId="478"/>
           <ac:cxnSpMkLst>
             <pc:docMk/>
             <pc:sldMk cId="3960934056" sldId="256"/>
-            <ac:cxnSpMk id="17" creationId="{DDF0E57E-BB09-0054-E60F-95AD78D5BE13}"/>
+            <ac:cxnSpMk id="29" creationId="{1B02B072-0ADE-6B66-9025-C9530F2C6AEC}"/>
+          </ac:cxnSpMkLst>
+        </pc:cxnChg>
+        <pc:cxnChg chg="mod">
+          <ac:chgData name="Nina Dombrowski" userId="1f2bfacd-2a29-43dd-9bcd-fba75591e3fa" providerId="ADAL" clId="{A1E0730E-2E14-4CD5-AA17-1C7BD8AC580B}" dt="2026-09-24T07:29:28.453" v="153" actId="693"/>
+          <ac:cxnSpMkLst>
+            <pc:docMk/>
+            <pc:sldMk cId="3960934056" sldId="256"/>
+            <ac:cxnSpMk id="30" creationId="{A954DE12-E116-E8AC-6EEA-1A9B99DF6993}"/>
+          </ac:cxnSpMkLst>
+        </pc:cxnChg>
+      </pc:sldChg>
+      <pc:sldChg chg="addSp modSp new del">
+        <pc:chgData name="Nina Dombrowski" userId="1f2bfacd-2a29-43dd-9bcd-fba75591e3fa" providerId="ADAL" clId="{A1E0730E-2E14-4CD5-AA17-1C7BD8AC580B}" dt="2026-09-24T08:06:05.563" v="163" actId="47"/>
+        <pc:sldMkLst>
+          <pc:docMk/>
+          <pc:sldMk cId="2917515363" sldId="257"/>
+        </pc:sldMkLst>
+        <pc:spChg chg="mod">
+          <ac:chgData name="Nina Dombrowski" userId="1f2bfacd-2a29-43dd-9bcd-fba75591e3fa" providerId="ADAL" clId="{A1E0730E-2E14-4CD5-AA17-1C7BD8AC580B}" dt="2026-09-24T07:45:24.323" v="159" actId="164"/>
+          <ac:spMkLst>
+            <pc:docMk/>
+            <pc:sldMk cId="2917515363" sldId="257"/>
+            <ac:spMk id="4" creationId="{50BEF102-D906-6E58-C118-246B7CC739AC}"/>
+          </ac:spMkLst>
+        </pc:spChg>
+        <pc:spChg chg="add mod">
+          <ac:chgData name="Nina Dombrowski" userId="1f2bfacd-2a29-43dd-9bcd-fba75591e3fa" providerId="ADAL" clId="{A1E0730E-2E14-4CD5-AA17-1C7BD8AC580B}" dt="2026-09-24T07:45:24.323" v="159" actId="164"/>
+          <ac:spMkLst>
+            <pc:docMk/>
+            <pc:sldMk cId="2917515363" sldId="257"/>
+            <ac:spMk id="5" creationId="{90346708-632E-8A87-53BE-DA98C958B410}"/>
+          </ac:spMkLst>
+        </pc:spChg>
+        <pc:spChg chg="add mod">
+          <ac:chgData name="Nina Dombrowski" userId="1f2bfacd-2a29-43dd-9bcd-fba75591e3fa" providerId="ADAL" clId="{A1E0730E-2E14-4CD5-AA17-1C7BD8AC580B}" dt="2026-09-24T06:52:55.075" v="2"/>
+          <ac:spMkLst>
+            <pc:docMk/>
+            <pc:sldMk cId="2917515363" sldId="257"/>
+            <ac:spMk id="6" creationId="{F118C34B-5256-EC13-B1B8-74F03F4E0E10}"/>
+          </ac:spMkLst>
+        </pc:spChg>
+        <pc:spChg chg="add mod">
+          <ac:chgData name="Nina Dombrowski" userId="1f2bfacd-2a29-43dd-9bcd-fba75591e3fa" providerId="ADAL" clId="{A1E0730E-2E14-4CD5-AA17-1C7BD8AC580B}" dt="2026-09-24T07:45:24.323" v="159" actId="164"/>
+          <ac:spMkLst>
+            <pc:docMk/>
+            <pc:sldMk cId="2917515363" sldId="257"/>
+            <ac:spMk id="7" creationId="{84965896-43D3-12D3-58BF-2070325ACB41}"/>
+          </ac:spMkLst>
+        </pc:spChg>
+        <pc:spChg chg="mod">
+          <ac:chgData name="Nina Dombrowski" userId="1f2bfacd-2a29-43dd-9bcd-fba75591e3fa" providerId="ADAL" clId="{A1E0730E-2E14-4CD5-AA17-1C7BD8AC580B}" dt="2026-09-24T07:45:24.323" v="159" actId="164"/>
+          <ac:spMkLst>
+            <pc:docMk/>
+            <pc:sldMk cId="2917515363" sldId="257"/>
+            <ac:spMk id="8" creationId="{61F57066-82A9-61D3-CA06-E542E3E4F5C2}"/>
+          </ac:spMkLst>
+        </pc:spChg>
+        <pc:spChg chg="mod">
+          <ac:chgData name="Nina Dombrowski" userId="1f2bfacd-2a29-43dd-9bcd-fba75591e3fa" providerId="ADAL" clId="{A1E0730E-2E14-4CD5-AA17-1C7BD8AC580B}" dt="2026-09-24T07:45:24.323" v="159" actId="164"/>
+          <ac:spMkLst>
+            <pc:docMk/>
+            <pc:sldMk cId="2917515363" sldId="257"/>
+            <ac:spMk id="9" creationId="{40BE0F06-1853-9D71-D39B-65AF8C308983}"/>
+          </ac:spMkLst>
+        </pc:spChg>
+        <pc:spChg chg="add mod">
+          <ac:chgData name="Nina Dombrowski" userId="1f2bfacd-2a29-43dd-9bcd-fba75591e3fa" providerId="ADAL" clId="{A1E0730E-2E14-4CD5-AA17-1C7BD8AC580B}" dt="2026-09-24T07:45:24.323" v="159" actId="164"/>
+          <ac:spMkLst>
+            <pc:docMk/>
+            <pc:sldMk cId="2917515363" sldId="257"/>
+            <ac:spMk id="11" creationId="{73011997-A163-BD10-F49C-A44C6C209D86}"/>
+          </ac:spMkLst>
+        </pc:spChg>
+        <pc:spChg chg="add mod">
+          <ac:chgData name="Nina Dombrowski" userId="1f2bfacd-2a29-43dd-9bcd-fba75591e3fa" providerId="ADAL" clId="{A1E0730E-2E14-4CD5-AA17-1C7BD8AC580B}" dt="2026-09-24T06:52:55.075" v="2"/>
+          <ac:spMkLst>
+            <pc:docMk/>
+            <pc:sldMk cId="2917515363" sldId="257"/>
+            <ac:spMk id="13" creationId="{D08669AC-DDA1-A2A9-6F67-D792AE9A4412}"/>
+          </ac:spMkLst>
+        </pc:spChg>
+        <pc:spChg chg="add mod">
+          <ac:chgData name="Nina Dombrowski" userId="1f2bfacd-2a29-43dd-9bcd-fba75591e3fa" providerId="ADAL" clId="{A1E0730E-2E14-4CD5-AA17-1C7BD8AC580B}" dt="2026-09-24T06:52:55.075" v="2"/>
+          <ac:spMkLst>
+            <pc:docMk/>
+            <pc:sldMk cId="2917515363" sldId="257"/>
+            <ac:spMk id="14" creationId="{7D5192B1-CA26-7CA7-1065-E101637263A1}"/>
+          </ac:spMkLst>
+        </pc:spChg>
+        <pc:spChg chg="add mod">
+          <ac:chgData name="Nina Dombrowski" userId="1f2bfacd-2a29-43dd-9bcd-fba75591e3fa" providerId="ADAL" clId="{A1E0730E-2E14-4CD5-AA17-1C7BD8AC580B}" dt="2026-09-24T06:52:55.075" v="2"/>
+          <ac:spMkLst>
+            <pc:docMk/>
+            <pc:sldMk cId="2917515363" sldId="257"/>
+            <ac:spMk id="17" creationId="{FAEC5ACA-12A5-802F-4352-E9FA01207196}"/>
+          </ac:spMkLst>
+        </pc:spChg>
+        <pc:spChg chg="mod">
+          <ac:chgData name="Nina Dombrowski" userId="1f2bfacd-2a29-43dd-9bcd-fba75591e3fa" providerId="ADAL" clId="{A1E0730E-2E14-4CD5-AA17-1C7BD8AC580B}" dt="2026-09-24T07:45:24.323" v="159" actId="164"/>
+          <ac:spMkLst>
+            <pc:docMk/>
+            <pc:sldMk cId="2917515363" sldId="257"/>
+            <ac:spMk id="18" creationId="{D7D1C37E-5A8A-CC2F-107A-B120D2C1D4CE}"/>
+          </ac:spMkLst>
+        </pc:spChg>
+        <pc:spChg chg="add mod">
+          <ac:chgData name="Nina Dombrowski" userId="1f2bfacd-2a29-43dd-9bcd-fba75591e3fa" providerId="ADAL" clId="{A1E0730E-2E14-4CD5-AA17-1C7BD8AC580B}" dt="2026-09-24T07:45:24.323" v="159" actId="164"/>
+          <ac:spMkLst>
+            <pc:docMk/>
+            <pc:sldMk cId="2917515363" sldId="257"/>
+            <ac:spMk id="20" creationId="{8ED87D32-6561-8DE4-1D32-E73367CF1859}"/>
+          </ac:spMkLst>
+        </pc:spChg>
+        <pc:spChg chg="add mod">
+          <ac:chgData name="Nina Dombrowski" userId="1f2bfacd-2a29-43dd-9bcd-fba75591e3fa" providerId="ADAL" clId="{A1E0730E-2E14-4CD5-AA17-1C7BD8AC580B}" dt="2026-09-24T06:52:55.075" v="2"/>
+          <ac:spMkLst>
+            <pc:docMk/>
+            <pc:sldMk cId="2917515363" sldId="257"/>
+            <ac:spMk id="21" creationId="{C081A9F1-9EB2-9515-9871-3A198191957C}"/>
+          </ac:spMkLst>
+        </pc:spChg>
+        <pc:spChg chg="add mod">
+          <ac:chgData name="Nina Dombrowski" userId="1f2bfacd-2a29-43dd-9bcd-fba75591e3fa" providerId="ADAL" clId="{A1E0730E-2E14-4CD5-AA17-1C7BD8AC580B}" dt="2026-09-24T06:52:55.075" v="2"/>
+          <ac:spMkLst>
+            <pc:docMk/>
+            <pc:sldMk cId="2917515363" sldId="257"/>
+            <ac:spMk id="22" creationId="{2C1D509D-B66C-5602-A295-713EC227766B}"/>
+          </ac:spMkLst>
+        </pc:spChg>
+        <pc:spChg chg="mod">
+          <ac:chgData name="Nina Dombrowski" userId="1f2bfacd-2a29-43dd-9bcd-fba75591e3fa" providerId="ADAL" clId="{A1E0730E-2E14-4CD5-AA17-1C7BD8AC580B}" dt="2026-09-24T07:45:24.323" v="159" actId="164"/>
+          <ac:spMkLst>
+            <pc:docMk/>
+            <pc:sldMk cId="2917515363" sldId="257"/>
+            <ac:spMk id="23" creationId="{C431CE82-C0BB-3B98-F07B-C32163EE5B19}"/>
+          </ac:spMkLst>
+        </pc:spChg>
+        <pc:spChg chg="mod">
+          <ac:chgData name="Nina Dombrowski" userId="1f2bfacd-2a29-43dd-9bcd-fba75591e3fa" providerId="ADAL" clId="{A1E0730E-2E14-4CD5-AA17-1C7BD8AC580B}" dt="2026-09-24T07:45:24.323" v="159" actId="164"/>
+          <ac:spMkLst>
+            <pc:docMk/>
+            <pc:sldMk cId="2917515363" sldId="257"/>
+            <ac:spMk id="27" creationId="{EBE37B63-C5DC-4D27-C97C-D047536CD594}"/>
+          </ac:spMkLst>
+        </pc:spChg>
+      </pc:sldChg>
+      <pc:sldChg chg="addSp new del mod">
+        <pc:chgData name="Nina Dombrowski" userId="1f2bfacd-2a29-43dd-9bcd-fba75591e3fa" providerId="ADAL" clId="{A1E0730E-2E14-4CD5-AA17-1C7BD8AC580B}" dt="2026-09-24T08:06:05.563" v="163" actId="47"/>
+        <pc:sldMkLst>
+          <pc:docMk/>
+          <pc:sldMk cId="259797054" sldId="258"/>
+        </pc:sldMkLst>
+        <pc:picChg chg="add">
+          <ac:chgData name="Nina Dombrowski" userId="1f2bfacd-2a29-43dd-9bcd-fba75591e3fa" providerId="ADAL" clId="{A1E0730E-2E14-4CD5-AA17-1C7BD8AC580B}" dt="2026-09-24T06:53:04.216" v="4" actId="22"/>
+          <ac:picMkLst>
+            <pc:docMk/>
+            <pc:sldMk cId="259797054" sldId="258"/>
+            <ac:picMk id="3" creationId="{ADFD4D49-0A76-4ABA-7013-CF50D9BC471B}"/>
+          </ac:picMkLst>
+        </pc:picChg>
+      </pc:sldChg>
+      <pc:sldChg chg="addSp delSp modSp add mod">
+        <pc:chgData name="Nina Dombrowski" userId="1f2bfacd-2a29-43dd-9bcd-fba75591e3fa" providerId="ADAL" clId="{A1E0730E-2E14-4CD5-AA17-1C7BD8AC580B}" dt="2026-09-24T08:50:42.811" v="1690" actId="14100"/>
+        <pc:sldMkLst>
+          <pc:docMk/>
+          <pc:sldMk cId="196827406" sldId="290"/>
+        </pc:sldMkLst>
+        <pc:spChg chg="del">
+          <ac:chgData name="Nina Dombrowski" userId="1f2bfacd-2a29-43dd-9bcd-fba75591e3fa" providerId="ADAL" clId="{A1E0730E-2E14-4CD5-AA17-1C7BD8AC580B}" dt="2026-09-24T08:06:22.414" v="169" actId="478"/>
+          <ac:spMkLst>
+            <pc:docMk/>
+            <pc:sldMk cId="196827406" sldId="290"/>
+            <ac:spMk id="2" creationId="{4FBD4FA6-A428-0C55-27C8-E03F90E4EA3F}"/>
+          </ac:spMkLst>
+        </pc:spChg>
+        <pc:spChg chg="add mod">
+          <ac:chgData name="Nina Dombrowski" userId="1f2bfacd-2a29-43dd-9bcd-fba75591e3fa" providerId="ADAL" clId="{A1E0730E-2E14-4CD5-AA17-1C7BD8AC580B}" dt="2026-09-24T08:46:25.058" v="1571"/>
+          <ac:spMkLst>
+            <pc:docMk/>
+            <pc:sldMk cId="196827406" sldId="290"/>
+            <ac:spMk id="3" creationId="{2C569B5B-6541-2F9D-C941-BC93A5423051}"/>
+          </ac:spMkLst>
+        </pc:spChg>
+        <pc:spChg chg="add del">
+          <ac:chgData name="Nina Dombrowski" userId="1f2bfacd-2a29-43dd-9bcd-fba75591e3fa" providerId="ADAL" clId="{A1E0730E-2E14-4CD5-AA17-1C7BD8AC580B}" dt="2026-09-24T08:39:40.053" v="1450" actId="478"/>
+          <ac:spMkLst>
+            <pc:docMk/>
+            <pc:sldMk cId="196827406" sldId="290"/>
+            <ac:spMk id="3" creationId="{525DE89B-C2C2-567A-F57B-687AEFF081D4}"/>
+          </ac:spMkLst>
+        </pc:spChg>
+        <pc:spChg chg="del mod">
+          <ac:chgData name="Nina Dombrowski" userId="1f2bfacd-2a29-43dd-9bcd-fba75591e3fa" providerId="ADAL" clId="{A1E0730E-2E14-4CD5-AA17-1C7BD8AC580B}" dt="2026-09-24T08:38:33.604" v="1421" actId="478"/>
+          <ac:spMkLst>
+            <pc:docMk/>
+            <pc:sldMk cId="196827406" sldId="290"/>
+            <ac:spMk id="4" creationId="{42B827C2-662C-FE02-EBBA-E976A41157E9}"/>
+          </ac:spMkLst>
+        </pc:spChg>
+        <pc:spChg chg="add del mod">
+          <ac:chgData name="Nina Dombrowski" userId="1f2bfacd-2a29-43dd-9bcd-fba75591e3fa" providerId="ADAL" clId="{A1E0730E-2E14-4CD5-AA17-1C7BD8AC580B}" dt="2026-09-24T08:06:23.360" v="170" actId="478"/>
+          <ac:spMkLst>
+            <pc:docMk/>
+            <pc:sldMk cId="196827406" sldId="290"/>
+            <ac:spMk id="6" creationId="{EB439055-9177-7D33-4F54-5AB03B46B591}"/>
+          </ac:spMkLst>
+        </pc:spChg>
+        <pc:spChg chg="add del mod">
+          <ac:chgData name="Nina Dombrowski" userId="1f2bfacd-2a29-43dd-9bcd-fba75591e3fa" providerId="ADAL" clId="{A1E0730E-2E14-4CD5-AA17-1C7BD8AC580B}" dt="2026-09-24T08:43:35.301" v="1561" actId="478"/>
+          <ac:spMkLst>
+            <pc:docMk/>
+            <pc:sldMk cId="196827406" sldId="290"/>
+            <ac:spMk id="10" creationId="{DABF7620-5C50-BF59-BA4A-BDBE3214BF4F}"/>
+          </ac:spMkLst>
+        </pc:spChg>
+        <pc:spChg chg="add del">
+          <ac:chgData name="Nina Dombrowski" userId="1f2bfacd-2a29-43dd-9bcd-fba75591e3fa" providerId="ADAL" clId="{A1E0730E-2E14-4CD5-AA17-1C7BD8AC580B}" dt="2026-09-24T08:39:42.821" v="1452" actId="478"/>
+          <ac:spMkLst>
+            <pc:docMk/>
+            <pc:sldMk cId="196827406" sldId="290"/>
+            <ac:spMk id="12" creationId="{F79ED932-2697-F41C-CB44-3C8BFD982DE6}"/>
+          </ac:spMkLst>
+        </pc:spChg>
+        <pc:spChg chg="mod">
+          <ac:chgData name="Nina Dombrowski" userId="1f2bfacd-2a29-43dd-9bcd-fba75591e3fa" providerId="ADAL" clId="{A1E0730E-2E14-4CD5-AA17-1C7BD8AC580B}" dt="2026-09-24T08:37:36.914" v="1419" actId="1076"/>
+          <ac:spMkLst>
+            <pc:docMk/>
+            <pc:sldMk cId="196827406" sldId="290"/>
+            <ac:spMk id="17" creationId="{1EEF017C-8B9C-F9B8-0601-F85CA7D5E4DB}"/>
+          </ac:spMkLst>
+        </pc:spChg>
+        <pc:cxnChg chg="mod">
+          <ac:chgData name="Nina Dombrowski" userId="1f2bfacd-2a29-43dd-9bcd-fba75591e3fa" providerId="ADAL" clId="{A1E0730E-2E14-4CD5-AA17-1C7BD8AC580B}" dt="2026-09-24T08:50:30.595" v="1686" actId="14100"/>
+          <ac:cxnSpMkLst>
+            <pc:docMk/>
+            <pc:sldMk cId="196827406" sldId="290"/>
+            <ac:cxnSpMk id="9" creationId="{F23075D4-713B-BEDF-395B-F336B237E0CB}"/>
+          </ac:cxnSpMkLst>
+        </pc:cxnChg>
+        <pc:cxnChg chg="mod">
+          <ac:chgData name="Nina Dombrowski" userId="1f2bfacd-2a29-43dd-9bcd-fba75591e3fa" providerId="ADAL" clId="{A1E0730E-2E14-4CD5-AA17-1C7BD8AC580B}" dt="2026-09-24T08:50:42.811" v="1690" actId="14100"/>
+          <ac:cxnSpMkLst>
+            <pc:docMk/>
+            <pc:sldMk cId="196827406" sldId="290"/>
+            <ac:cxnSpMk id="13" creationId="{E255D351-81C2-699B-E54C-79BC1FA2D78E}"/>
+          </ac:cxnSpMkLst>
+        </pc:cxnChg>
+      </pc:sldChg>
+      <pc:sldChg chg="addSp delSp modSp add mod">
+        <pc:chgData name="Nina Dombrowski" userId="1f2bfacd-2a29-43dd-9bcd-fba75591e3fa" providerId="ADAL" clId="{A1E0730E-2E14-4CD5-AA17-1C7BD8AC580B}" dt="2026-09-24T08:57:50.400" v="1691" actId="164"/>
+        <pc:sldMkLst>
+          <pc:docMk/>
+          <pc:sldMk cId="1811978892" sldId="291"/>
+        </pc:sldMkLst>
+        <pc:spChg chg="del">
+          <ac:chgData name="Nina Dombrowski" userId="1f2bfacd-2a29-43dd-9bcd-fba75591e3fa" providerId="ADAL" clId="{A1E0730E-2E14-4CD5-AA17-1C7BD8AC580B}" dt="2026-09-24T08:06:18.522" v="167" actId="478"/>
+          <ac:spMkLst>
+            <pc:docMk/>
+            <pc:sldMk cId="1811978892" sldId="291"/>
+            <ac:spMk id="2" creationId="{0F29C9A1-9130-5934-BF57-CBCC903C8DC8}"/>
+          </ac:spMkLst>
+        </pc:spChg>
+        <pc:spChg chg="add del mod">
+          <ac:chgData name="Nina Dombrowski" userId="1f2bfacd-2a29-43dd-9bcd-fba75591e3fa" providerId="ADAL" clId="{A1E0730E-2E14-4CD5-AA17-1C7BD8AC580B}" dt="2026-09-24T08:06:20.144" v="168" actId="478"/>
+          <ac:spMkLst>
+            <pc:docMk/>
+            <pc:sldMk cId="1811978892" sldId="291"/>
+            <ac:spMk id="5" creationId="{B6FC8737-81A6-E549-2DB3-13DCCE0DB33A}"/>
+          </ac:spMkLst>
+        </pc:spChg>
+        <pc:spChg chg="mod topLvl">
+          <ac:chgData name="Nina Dombrowski" userId="1f2bfacd-2a29-43dd-9bcd-fba75591e3fa" providerId="ADAL" clId="{A1E0730E-2E14-4CD5-AA17-1C7BD8AC580B}" dt="2026-09-24T08:06:39.879" v="172" actId="165"/>
+          <ac:spMkLst>
+            <pc:docMk/>
+            <pc:sldMk cId="1811978892" sldId="291"/>
+            <ac:spMk id="43" creationId="{FBA55C95-7E0D-ABF6-BB90-86E46CD9934E}"/>
+          </ac:spMkLst>
+        </pc:spChg>
+        <pc:spChg chg="mod">
+          <ac:chgData name="Nina Dombrowski" userId="1f2bfacd-2a29-43dd-9bcd-fba75591e3fa" providerId="ADAL" clId="{A1E0730E-2E14-4CD5-AA17-1C7BD8AC580B}" dt="2026-09-24T08:57:50.400" v="1691" actId="164"/>
+          <ac:spMkLst>
+            <pc:docMk/>
+            <pc:sldMk cId="1811978892" sldId="291"/>
+            <ac:spMk id="46" creationId="{1BB9F8F0-57DB-0789-FD70-19ED6E6CDF5A}"/>
+          </ac:spMkLst>
+        </pc:spChg>
+        <pc:spChg chg="mod topLvl">
+          <ac:chgData name="Nina Dombrowski" userId="1f2bfacd-2a29-43dd-9bcd-fba75591e3fa" providerId="ADAL" clId="{A1E0730E-2E14-4CD5-AA17-1C7BD8AC580B}" dt="2026-09-24T08:57:50.400" v="1691" actId="164"/>
+          <ac:spMkLst>
+            <pc:docMk/>
+            <pc:sldMk cId="1811978892" sldId="291"/>
+            <ac:spMk id="47" creationId="{A946DD81-5022-CE51-AC84-DACD9A62DA47}"/>
+          </ac:spMkLst>
+        </pc:spChg>
+        <pc:spChg chg="mod">
+          <ac:chgData name="Nina Dombrowski" userId="1f2bfacd-2a29-43dd-9bcd-fba75591e3fa" providerId="ADAL" clId="{A1E0730E-2E14-4CD5-AA17-1C7BD8AC580B}" dt="2026-09-24T08:57:50.400" v="1691" actId="164"/>
+          <ac:spMkLst>
+            <pc:docMk/>
+            <pc:sldMk cId="1811978892" sldId="291"/>
+            <ac:spMk id="48" creationId="{6F566721-E960-E7E5-535C-03A2D09E06A5}"/>
+          </ac:spMkLst>
+        </pc:spChg>
+        <pc:spChg chg="mod">
+          <ac:chgData name="Nina Dombrowski" userId="1f2bfacd-2a29-43dd-9bcd-fba75591e3fa" providerId="ADAL" clId="{A1E0730E-2E14-4CD5-AA17-1C7BD8AC580B}" dt="2026-09-24T08:57:50.400" v="1691" actId="164"/>
+          <ac:spMkLst>
+            <pc:docMk/>
+            <pc:sldMk cId="1811978892" sldId="291"/>
+            <ac:spMk id="49" creationId="{1426E45C-8667-CDF8-A91A-755DC24A3889}"/>
+          </ac:spMkLst>
+        </pc:spChg>
+        <pc:spChg chg="mod">
+          <ac:chgData name="Nina Dombrowski" userId="1f2bfacd-2a29-43dd-9bcd-fba75591e3fa" providerId="ADAL" clId="{A1E0730E-2E14-4CD5-AA17-1C7BD8AC580B}" dt="2026-09-24T08:57:50.400" v="1691" actId="164"/>
+          <ac:spMkLst>
+            <pc:docMk/>
+            <pc:sldMk cId="1811978892" sldId="291"/>
+            <ac:spMk id="51" creationId="{9B3FB1A1-C9D3-4F43-035C-72851642B855}"/>
+          </ac:spMkLst>
+        </pc:spChg>
+        <pc:spChg chg="mod topLvl">
+          <ac:chgData name="Nina Dombrowski" userId="1f2bfacd-2a29-43dd-9bcd-fba75591e3fa" providerId="ADAL" clId="{A1E0730E-2E14-4CD5-AA17-1C7BD8AC580B}" dt="2026-09-24T08:06:39.879" v="172" actId="165"/>
+          <ac:spMkLst>
+            <pc:docMk/>
+            <pc:sldMk cId="1811978892" sldId="291"/>
+            <ac:spMk id="54" creationId="{6B181ED0-3725-D9BA-E7EB-CB2D48A16271}"/>
+          </ac:spMkLst>
+        </pc:spChg>
+        <pc:spChg chg="mod topLvl">
+          <ac:chgData name="Nina Dombrowski" userId="1f2bfacd-2a29-43dd-9bcd-fba75591e3fa" providerId="ADAL" clId="{A1E0730E-2E14-4CD5-AA17-1C7BD8AC580B}" dt="2026-09-24T08:06:39.879" v="172" actId="165"/>
+          <ac:spMkLst>
+            <pc:docMk/>
+            <pc:sldMk cId="1811978892" sldId="291"/>
+            <ac:spMk id="55" creationId="{86E02EA5-A008-D6CA-0116-377AFCCE3579}"/>
+          </ac:spMkLst>
+        </pc:spChg>
+        <pc:spChg chg="mod">
+          <ac:chgData name="Nina Dombrowski" userId="1f2bfacd-2a29-43dd-9bcd-fba75591e3fa" providerId="ADAL" clId="{A1E0730E-2E14-4CD5-AA17-1C7BD8AC580B}" dt="2026-09-24T08:07:00.835" v="174" actId="114"/>
+          <ac:spMkLst>
+            <pc:docMk/>
+            <pc:sldMk cId="1811978892" sldId="291"/>
+            <ac:spMk id="56" creationId="{4FA680A6-2B2B-8934-C3DD-C137C2BBEAB4}"/>
+          </ac:spMkLst>
+        </pc:spChg>
+        <pc:spChg chg="mod topLvl">
+          <ac:chgData name="Nina Dombrowski" userId="1f2bfacd-2a29-43dd-9bcd-fba75591e3fa" providerId="ADAL" clId="{A1E0730E-2E14-4CD5-AA17-1C7BD8AC580B}" dt="2026-09-24T08:06:39.879" v="172" actId="165"/>
+          <ac:spMkLst>
+            <pc:docMk/>
+            <pc:sldMk cId="1811978892" sldId="291"/>
+            <ac:spMk id="57" creationId="{B78C4960-3EFA-151A-E21B-A4A55974AB7A}"/>
+          </ac:spMkLst>
+        </pc:spChg>
+        <pc:spChg chg="mod topLvl">
+          <ac:chgData name="Nina Dombrowski" userId="1f2bfacd-2a29-43dd-9bcd-fba75591e3fa" providerId="ADAL" clId="{A1E0730E-2E14-4CD5-AA17-1C7BD8AC580B}" dt="2026-09-24T08:57:50.400" v="1691" actId="164"/>
+          <ac:spMkLst>
+            <pc:docMk/>
+            <pc:sldMk cId="1811978892" sldId="291"/>
+            <ac:spMk id="58" creationId="{810EA87A-DEE2-5715-80C1-4D73BAE27CD9}"/>
+          </ac:spMkLst>
+        </pc:spChg>
+        <pc:spChg chg="mod">
+          <ac:chgData name="Nina Dombrowski" userId="1f2bfacd-2a29-43dd-9bcd-fba75591e3fa" providerId="ADAL" clId="{A1E0730E-2E14-4CD5-AA17-1C7BD8AC580B}" dt="2026-09-24T08:57:50.400" v="1691" actId="164"/>
+          <ac:spMkLst>
+            <pc:docMk/>
+            <pc:sldMk cId="1811978892" sldId="291"/>
+            <ac:spMk id="61" creationId="{515EEF95-CA54-D823-103F-24DBEF355593}"/>
+          </ac:spMkLst>
+        </pc:spChg>
+        <pc:spChg chg="mod topLvl">
+          <ac:chgData name="Nina Dombrowski" userId="1f2bfacd-2a29-43dd-9bcd-fba75591e3fa" providerId="ADAL" clId="{A1E0730E-2E14-4CD5-AA17-1C7BD8AC580B}" dt="2026-09-24T08:06:39.879" v="172" actId="165"/>
+          <ac:spMkLst>
+            <pc:docMk/>
+            <pc:sldMk cId="1811978892" sldId="291"/>
+            <ac:spMk id="62" creationId="{23AC8FAB-96F8-0D0C-3364-0E9A1CF98E1E}"/>
+          </ac:spMkLst>
+        </pc:spChg>
+        <pc:spChg chg="mod topLvl">
+          <ac:chgData name="Nina Dombrowski" userId="1f2bfacd-2a29-43dd-9bcd-fba75591e3fa" providerId="ADAL" clId="{A1E0730E-2E14-4CD5-AA17-1C7BD8AC580B}" dt="2026-09-24T08:57:50.400" v="1691" actId="164"/>
+          <ac:spMkLst>
+            <pc:docMk/>
+            <pc:sldMk cId="1811978892" sldId="291"/>
+            <ac:spMk id="63" creationId="{C8AF78F3-5894-F1C9-8481-1A0685385A62}"/>
+          </ac:spMkLst>
+        </pc:spChg>
+        <pc:spChg chg="mod">
+          <ac:chgData name="Nina Dombrowski" userId="1f2bfacd-2a29-43dd-9bcd-fba75591e3fa" providerId="ADAL" clId="{A1E0730E-2E14-4CD5-AA17-1C7BD8AC580B}" dt="2026-09-24T08:57:50.400" v="1691" actId="164"/>
+          <ac:spMkLst>
+            <pc:docMk/>
+            <pc:sldMk cId="1811978892" sldId="291"/>
+            <ac:spMk id="64" creationId="{BCE93E3B-B329-E8D5-31FF-3583F2216D3B}"/>
+          </ac:spMkLst>
+        </pc:spChg>
+        <pc:spChg chg="mod topLvl">
+          <ac:chgData name="Nina Dombrowski" userId="1f2bfacd-2a29-43dd-9bcd-fba75591e3fa" providerId="ADAL" clId="{A1E0730E-2E14-4CD5-AA17-1C7BD8AC580B}" dt="2026-09-24T08:06:39.879" v="172" actId="165"/>
+          <ac:spMkLst>
+            <pc:docMk/>
+            <pc:sldMk cId="1811978892" sldId="291"/>
+            <ac:spMk id="66" creationId="{9ABE67E5-71FC-1F99-1C24-3BA2C749D4CA}"/>
+          </ac:spMkLst>
+        </pc:spChg>
+        <pc:spChg chg="mod topLvl">
+          <ac:chgData name="Nina Dombrowski" userId="1f2bfacd-2a29-43dd-9bcd-fba75591e3fa" providerId="ADAL" clId="{A1E0730E-2E14-4CD5-AA17-1C7BD8AC580B}" dt="2026-09-24T08:57:50.400" v="1691" actId="164"/>
+          <ac:spMkLst>
+            <pc:docMk/>
+            <pc:sldMk cId="1811978892" sldId="291"/>
+            <ac:spMk id="68" creationId="{81A34C3E-9265-2CFB-5C91-55A06796257C}"/>
+          </ac:spMkLst>
+        </pc:spChg>
+      </pc:sldChg>
+      <pc:sldChg chg="addSp delSp modSp add mod">
+        <pc:chgData name="Nina Dombrowski" userId="1f2bfacd-2a29-43dd-9bcd-fba75591e3fa" providerId="ADAL" clId="{A1E0730E-2E14-4CD5-AA17-1C7BD8AC580B}" dt="2026-09-24T08:48:15.783" v="1678" actId="1076"/>
+        <pc:sldMkLst>
+          <pc:docMk/>
+          <pc:sldMk cId="2013311443" sldId="293"/>
+        </pc:sldMkLst>
+        <pc:spChg chg="del">
+          <ac:chgData name="Nina Dombrowski" userId="1f2bfacd-2a29-43dd-9bcd-fba75591e3fa" providerId="ADAL" clId="{A1E0730E-2E14-4CD5-AA17-1C7BD8AC580B}" dt="2026-09-24T08:06:13.105" v="165" actId="478"/>
+          <ac:spMkLst>
+            <pc:docMk/>
+            <pc:sldMk cId="2013311443" sldId="293"/>
+            <ac:spMk id="2" creationId="{243604B5-EE6E-647F-8475-C941F24E25A5}"/>
+          </ac:spMkLst>
+        </pc:spChg>
+        <pc:spChg chg="add del mod">
+          <ac:chgData name="Nina Dombrowski" userId="1f2bfacd-2a29-43dd-9bcd-fba75591e3fa" providerId="ADAL" clId="{A1E0730E-2E14-4CD5-AA17-1C7BD8AC580B}" dt="2026-09-24T08:06:16.021" v="166" actId="478"/>
+          <ac:spMkLst>
+            <pc:docMk/>
+            <pc:sldMk cId="2013311443" sldId="293"/>
+            <ac:spMk id="5" creationId="{5602F217-31E1-B61C-C018-9B036A9E0A52}"/>
+          </ac:spMkLst>
+        </pc:spChg>
+        <pc:spChg chg="mod topLvl">
+          <ac:chgData name="Nina Dombrowski" userId="1f2bfacd-2a29-43dd-9bcd-fba75591e3fa" providerId="ADAL" clId="{A1E0730E-2E14-4CD5-AA17-1C7BD8AC580B}" dt="2026-09-24T08:06:32.784" v="171" actId="165"/>
+          <ac:spMkLst>
+            <pc:docMk/>
+            <pc:sldMk cId="2013311443" sldId="293"/>
+            <ac:spMk id="44" creationId="{3CBFE0F4-A439-4895-5B90-E8636A88ECDC}"/>
+          </ac:spMkLst>
+        </pc:spChg>
+        <pc:spChg chg="mod topLvl">
+          <ac:chgData name="Nina Dombrowski" userId="1f2bfacd-2a29-43dd-9bcd-fba75591e3fa" providerId="ADAL" clId="{A1E0730E-2E14-4CD5-AA17-1C7BD8AC580B}" dt="2026-09-24T08:06:32.784" v="171" actId="165"/>
+          <ac:spMkLst>
+            <pc:docMk/>
+            <pc:sldMk cId="2013311443" sldId="293"/>
+            <ac:spMk id="45" creationId="{3B784E65-70E3-C6E6-4DD4-F4E662E854B1}"/>
+          </ac:spMkLst>
+        </pc:spChg>
+        <pc:spChg chg="mod topLvl">
+          <ac:chgData name="Nina Dombrowski" userId="1f2bfacd-2a29-43dd-9bcd-fba75591e3fa" providerId="ADAL" clId="{A1E0730E-2E14-4CD5-AA17-1C7BD8AC580B}" dt="2026-09-24T08:06:32.784" v="171" actId="165"/>
+          <ac:spMkLst>
+            <pc:docMk/>
+            <pc:sldMk cId="2013311443" sldId="293"/>
+            <ac:spMk id="47" creationId="{8B5A1FB4-CF43-E592-0794-71B53042746F}"/>
+          </ac:spMkLst>
+        </pc:spChg>
+        <pc:spChg chg="mod topLvl">
+          <ac:chgData name="Nina Dombrowski" userId="1f2bfacd-2a29-43dd-9bcd-fba75591e3fa" providerId="ADAL" clId="{A1E0730E-2E14-4CD5-AA17-1C7BD8AC580B}" dt="2026-09-24T08:06:32.784" v="171" actId="165"/>
+          <ac:spMkLst>
+            <pc:docMk/>
+            <pc:sldMk cId="2013311443" sldId="293"/>
+            <ac:spMk id="48" creationId="{3DAF0CD5-1906-8F51-BD4B-8047A97C97DC}"/>
+          </ac:spMkLst>
+        </pc:spChg>
+        <pc:spChg chg="mod topLvl">
+          <ac:chgData name="Nina Dombrowski" userId="1f2bfacd-2a29-43dd-9bcd-fba75591e3fa" providerId="ADAL" clId="{A1E0730E-2E14-4CD5-AA17-1C7BD8AC580B}" dt="2026-09-24T08:06:32.784" v="171" actId="165"/>
+          <ac:spMkLst>
+            <pc:docMk/>
+            <pc:sldMk cId="2013311443" sldId="293"/>
+            <ac:spMk id="50" creationId="{AB5A9BD6-10BF-59BA-13AE-71EADEF867C0}"/>
+          </ac:spMkLst>
+        </pc:spChg>
+        <pc:spChg chg="mod topLvl">
+          <ac:chgData name="Nina Dombrowski" userId="1f2bfacd-2a29-43dd-9bcd-fba75591e3fa" providerId="ADAL" clId="{A1E0730E-2E14-4CD5-AA17-1C7BD8AC580B}" dt="2026-09-24T08:06:32.784" v="171" actId="165"/>
+          <ac:spMkLst>
+            <pc:docMk/>
+            <pc:sldMk cId="2013311443" sldId="293"/>
+            <ac:spMk id="52" creationId="{A218484F-7842-C779-1E30-EEB63A7F268E}"/>
+          </ac:spMkLst>
+        </pc:spChg>
+        <pc:spChg chg="mod topLvl">
+          <ac:chgData name="Nina Dombrowski" userId="1f2bfacd-2a29-43dd-9bcd-fba75591e3fa" providerId="ADAL" clId="{A1E0730E-2E14-4CD5-AA17-1C7BD8AC580B}" dt="2026-09-24T08:06:32.784" v="171" actId="165"/>
+          <ac:spMkLst>
+            <pc:docMk/>
+            <pc:sldMk cId="2013311443" sldId="293"/>
+            <ac:spMk id="56" creationId="{4771C872-8362-0799-FA90-2285256D35A4}"/>
+          </ac:spMkLst>
+        </pc:spChg>
+        <pc:spChg chg="mod topLvl">
+          <ac:chgData name="Nina Dombrowski" userId="1f2bfacd-2a29-43dd-9bcd-fba75591e3fa" providerId="ADAL" clId="{A1E0730E-2E14-4CD5-AA17-1C7BD8AC580B}" dt="2026-09-24T08:06:32.784" v="171" actId="165"/>
+          <ac:spMkLst>
+            <pc:docMk/>
+            <pc:sldMk cId="2013311443" sldId="293"/>
+            <ac:spMk id="59" creationId="{7E51C19A-C13A-A336-D9DC-1D74F7FC9CD9}"/>
+          </ac:spMkLst>
+        </pc:spChg>
+        <pc:spChg chg="mod topLvl">
+          <ac:chgData name="Nina Dombrowski" userId="1f2bfacd-2a29-43dd-9bcd-fba75591e3fa" providerId="ADAL" clId="{A1E0730E-2E14-4CD5-AA17-1C7BD8AC580B}" dt="2026-09-24T08:06:32.784" v="171" actId="165"/>
+          <ac:spMkLst>
+            <pc:docMk/>
+            <pc:sldMk cId="2013311443" sldId="293"/>
+            <ac:spMk id="61" creationId="{EADC69EF-F346-06ED-AF73-614644892CD7}"/>
+          </ac:spMkLst>
+        </pc:spChg>
+        <pc:spChg chg="mod topLvl">
+          <ac:chgData name="Nina Dombrowski" userId="1f2bfacd-2a29-43dd-9bcd-fba75591e3fa" providerId="ADAL" clId="{A1E0730E-2E14-4CD5-AA17-1C7BD8AC580B}" dt="2026-09-24T08:06:32.784" v="171" actId="165"/>
+          <ac:spMkLst>
+            <pc:docMk/>
+            <pc:sldMk cId="2013311443" sldId="293"/>
+            <ac:spMk id="66" creationId="{E2D2E61B-247C-39B3-B54D-75AC30D28415}"/>
+          </ac:spMkLst>
+        </pc:spChg>
+        <pc:cxnChg chg="mod">
+          <ac:chgData name="Nina Dombrowski" userId="1f2bfacd-2a29-43dd-9bcd-fba75591e3fa" providerId="ADAL" clId="{A1E0730E-2E14-4CD5-AA17-1C7BD8AC580B}" dt="2026-09-24T08:48:15.783" v="1678" actId="1076"/>
+          <ac:cxnSpMkLst>
+            <pc:docMk/>
+            <pc:sldMk cId="2013311443" sldId="293"/>
+            <ac:cxnSpMk id="63" creationId="{40A66F33-C001-3E0F-9E83-003D2FDC8170}"/>
+          </ac:cxnSpMkLst>
+        </pc:cxnChg>
+      </pc:sldChg>
+      <pc:sldChg chg="addSp delSp modSp add mod">
+        <pc:chgData name="Nina Dombrowski" userId="1f2bfacd-2a29-43dd-9bcd-fba75591e3fa" providerId="ADAL" clId="{A1E0730E-2E14-4CD5-AA17-1C7BD8AC580B}" dt="2026-09-24T08:46:55.537" v="1588"/>
+        <pc:sldMkLst>
+          <pc:docMk/>
+          <pc:sldMk cId="3033509731" sldId="294"/>
+        </pc:sldMkLst>
+        <pc:spChg chg="add mod">
+          <ac:chgData name="Nina Dombrowski" userId="1f2bfacd-2a29-43dd-9bcd-fba75591e3fa" providerId="ADAL" clId="{A1E0730E-2E14-4CD5-AA17-1C7BD8AC580B}" dt="2026-09-24T08:46:06.127" v="1569" actId="20577"/>
+          <ac:spMkLst>
+            <pc:docMk/>
+            <pc:sldMk cId="3033509731" sldId="294"/>
+            <ac:spMk id="3" creationId="{175B56A8-2C65-53B8-7192-0F9D875DF03E}"/>
+          </ac:spMkLst>
+        </pc:spChg>
+        <pc:spChg chg="add del mod">
+          <ac:chgData name="Nina Dombrowski" userId="1f2bfacd-2a29-43dd-9bcd-fba75591e3fa" providerId="ADAL" clId="{A1E0730E-2E14-4CD5-AA17-1C7BD8AC580B}" dt="2026-09-24T08:13:30.674" v="456" actId="478"/>
+          <ac:spMkLst>
+            <pc:docMk/>
+            <pc:sldMk cId="3033509731" sldId="294"/>
+            <ac:spMk id="3" creationId="{88037562-9864-DE2E-2397-1089552F8282}"/>
+          </ac:spMkLst>
+        </pc:spChg>
+        <pc:spChg chg="del mod">
+          <ac:chgData name="Nina Dombrowski" userId="1f2bfacd-2a29-43dd-9bcd-fba75591e3fa" providerId="ADAL" clId="{A1E0730E-2E14-4CD5-AA17-1C7BD8AC580B}" dt="2026-09-24T08:43:31.721" v="1559" actId="478"/>
+          <ac:spMkLst>
+            <pc:docMk/>
+            <pc:sldMk cId="3033509731" sldId="294"/>
+            <ac:spMk id="4" creationId="{506EA709-C4D4-8ED5-8AD7-B8450E46C63A}"/>
+          </ac:spMkLst>
+        </pc:spChg>
+        <pc:spChg chg="add del">
+          <ac:chgData name="Nina Dombrowski" userId="1f2bfacd-2a29-43dd-9bcd-fba75591e3fa" providerId="ADAL" clId="{A1E0730E-2E14-4CD5-AA17-1C7BD8AC580B}" dt="2026-09-24T08:25:26.091" v="1322" actId="478"/>
+          <ac:spMkLst>
+            <pc:docMk/>
+            <pc:sldMk cId="3033509731" sldId="294"/>
+            <ac:spMk id="10" creationId="{652AE09C-7487-1D1C-FE35-03D4C47212CE}"/>
+          </ac:spMkLst>
+        </pc:spChg>
+        <pc:spChg chg="add mod">
+          <ac:chgData name="Nina Dombrowski" userId="1f2bfacd-2a29-43dd-9bcd-fba75591e3fa" providerId="ADAL" clId="{A1E0730E-2E14-4CD5-AA17-1C7BD8AC580B}" dt="2026-09-24T08:46:55.537" v="1588"/>
+          <ac:spMkLst>
+            <pc:docMk/>
+            <pc:sldMk cId="3033509731" sldId="294"/>
+            <ac:spMk id="12" creationId="{8C5D5527-6747-5411-766F-6E8840283C40}"/>
+          </ac:spMkLst>
+        </pc:spChg>
+        <pc:spChg chg="del">
+          <ac:chgData name="Nina Dombrowski" userId="1f2bfacd-2a29-43dd-9bcd-fba75591e3fa" providerId="ADAL" clId="{A1E0730E-2E14-4CD5-AA17-1C7BD8AC580B}" dt="2026-09-24T08:08:12.312" v="180" actId="478"/>
+          <ac:spMkLst>
+            <pc:docMk/>
+            <pc:sldMk cId="3033509731" sldId="294"/>
+            <ac:spMk id="17" creationId="{2272C204-EA09-E68D-84ED-56AEDB7ECBBB}"/>
+          </ac:spMkLst>
+        </pc:spChg>
+        <pc:spChg chg="del">
+          <ac:chgData name="Nina Dombrowski" userId="1f2bfacd-2a29-43dd-9bcd-fba75591e3fa" providerId="ADAL" clId="{A1E0730E-2E14-4CD5-AA17-1C7BD8AC580B}" dt="2026-09-24T08:08:14.804" v="181" actId="478"/>
+          <ac:spMkLst>
+            <pc:docMk/>
+            <pc:sldMk cId="3033509731" sldId="294"/>
+            <ac:spMk id="21" creationId="{16A31CF0-5461-3226-7016-9AD507BBF56B}"/>
+          </ac:spMkLst>
+        </pc:spChg>
+        <pc:picChg chg="mod modCrop">
+          <ac:chgData name="Nina Dombrowski" userId="1f2bfacd-2a29-43dd-9bcd-fba75591e3fa" providerId="ADAL" clId="{A1E0730E-2E14-4CD5-AA17-1C7BD8AC580B}" dt="2026-09-24T08:08:08.046" v="179" actId="732"/>
+          <ac:picMkLst>
+            <pc:docMk/>
+            <pc:sldMk cId="3033509731" sldId="294"/>
+            <ac:picMk id="5" creationId="{F1295D50-B8F8-63E0-69FC-AD3EF28C8275}"/>
+          </ac:picMkLst>
+        </pc:picChg>
+        <pc:cxnChg chg="del">
+          <ac:chgData name="Nina Dombrowski" userId="1f2bfacd-2a29-43dd-9bcd-fba75591e3fa" providerId="ADAL" clId="{A1E0730E-2E14-4CD5-AA17-1C7BD8AC580B}" dt="2026-09-24T08:08:12.312" v="180" actId="478"/>
+          <ac:cxnSpMkLst>
+            <pc:docMk/>
+            <pc:sldMk cId="3033509731" sldId="294"/>
+            <ac:cxnSpMk id="9" creationId="{BD9D4161-806A-558A-71E6-A71A97745D36}"/>
+          </ac:cxnSpMkLst>
+        </pc:cxnChg>
+        <pc:cxnChg chg="del">
+          <ac:chgData name="Nina Dombrowski" userId="1f2bfacd-2a29-43dd-9bcd-fba75591e3fa" providerId="ADAL" clId="{A1E0730E-2E14-4CD5-AA17-1C7BD8AC580B}" dt="2026-09-24T08:08:12.312" v="180" actId="478"/>
+          <ac:cxnSpMkLst>
+            <pc:docMk/>
+            <pc:sldMk cId="3033509731" sldId="294"/>
+            <ac:cxnSpMk id="13" creationId="{52840C73-F823-3AEF-1510-EEC67AE5ED4C}"/>
+          </ac:cxnSpMkLst>
+        </pc:cxnChg>
+      </pc:sldChg>
+      <pc:sldChg chg="addSp delSp modSp add mod">
+        <pc:chgData name="Nina Dombrowski" userId="1f2bfacd-2a29-43dd-9bcd-fba75591e3fa" providerId="ADAL" clId="{A1E0730E-2E14-4CD5-AA17-1C7BD8AC580B}" dt="2026-09-24T08:48:35.176" v="1685" actId="20577"/>
+        <pc:sldMkLst>
+          <pc:docMk/>
+          <pc:sldMk cId="2676072630" sldId="295"/>
+        </pc:sldMkLst>
+        <pc:spChg chg="add mod">
+          <ac:chgData name="Nina Dombrowski" userId="1f2bfacd-2a29-43dd-9bcd-fba75591e3fa" providerId="ADAL" clId="{A1E0730E-2E14-4CD5-AA17-1C7BD8AC580B}" dt="2026-09-24T08:48:35.176" v="1685" actId="20577"/>
+          <ac:spMkLst>
+            <pc:docMk/>
+            <pc:sldMk cId="2676072630" sldId="295"/>
+            <ac:spMk id="3" creationId="{50F805DA-D78E-1AE5-18B5-F1B55223517A}"/>
+          </ac:spMkLst>
+        </pc:spChg>
+        <pc:spChg chg="add del mod">
+          <ac:chgData name="Nina Dombrowski" userId="1f2bfacd-2a29-43dd-9bcd-fba75591e3fa" providerId="ADAL" clId="{A1E0730E-2E14-4CD5-AA17-1C7BD8AC580B}" dt="2026-09-24T08:36:05.979" v="1410" actId="478"/>
+          <ac:spMkLst>
+            <pc:docMk/>
+            <pc:sldMk cId="2676072630" sldId="295"/>
+            <ac:spMk id="3" creationId="{C3B0A146-68C2-E82D-E919-1E8EAC58ED86}"/>
+          </ac:spMkLst>
+        </pc:spChg>
+        <pc:spChg chg="del mod">
+          <ac:chgData name="Nina Dombrowski" userId="1f2bfacd-2a29-43dd-9bcd-fba75591e3fa" providerId="ADAL" clId="{A1E0730E-2E14-4CD5-AA17-1C7BD8AC580B}" dt="2026-09-24T08:36:05.979" v="1410" actId="478"/>
+          <ac:spMkLst>
+            <pc:docMk/>
+            <pc:sldMk cId="2676072630" sldId="295"/>
+            <ac:spMk id="4" creationId="{1FD68C80-55A6-0136-CC3D-68F18806AA31}"/>
+          </ac:spMkLst>
+        </pc:spChg>
+        <pc:spChg chg="add del">
+          <ac:chgData name="Nina Dombrowski" userId="1f2bfacd-2a29-43dd-9bcd-fba75591e3fa" providerId="ADAL" clId="{A1E0730E-2E14-4CD5-AA17-1C7BD8AC580B}" dt="2026-09-24T08:39:33.216" v="1448" actId="478"/>
+          <ac:spMkLst>
+            <pc:docMk/>
+            <pc:sldMk cId="2676072630" sldId="295"/>
+            <ac:spMk id="6" creationId="{AFAEA99D-E79C-0914-F652-F809A5D2FE41}"/>
+          </ac:spMkLst>
+        </pc:spChg>
+        <pc:spChg chg="mod">
+          <ac:chgData name="Nina Dombrowski" userId="1f2bfacd-2a29-43dd-9bcd-fba75591e3fa" providerId="ADAL" clId="{A1E0730E-2E14-4CD5-AA17-1C7BD8AC580B}" dt="2026-09-24T08:18:46.684" v="735" actId="1037"/>
+          <ac:spMkLst>
+            <pc:docMk/>
+            <pc:sldMk cId="2676072630" sldId="295"/>
+            <ac:spMk id="7" creationId="{7F684EF0-9B7B-F0AE-A878-D2CFAD35DA35}"/>
+          </ac:spMkLst>
+        </pc:spChg>
+        <pc:spChg chg="add del mod">
+          <ac:chgData name="Nina Dombrowski" userId="1f2bfacd-2a29-43dd-9bcd-fba75591e3fa" providerId="ADAL" clId="{A1E0730E-2E14-4CD5-AA17-1C7BD8AC580B}" dt="2026-09-24T08:12:00.203" v="373" actId="478"/>
+          <ac:spMkLst>
+            <pc:docMk/>
+            <pc:sldMk cId="2676072630" sldId="295"/>
+            <ac:spMk id="10" creationId="{31C40DAF-55B1-9A2A-EF28-390B3648CA41}"/>
+          </ac:spMkLst>
+        </pc:spChg>
+        <pc:spChg chg="add del mod">
+          <ac:chgData name="Nina Dombrowski" userId="1f2bfacd-2a29-43dd-9bcd-fba75591e3fa" providerId="ADAL" clId="{A1E0730E-2E14-4CD5-AA17-1C7BD8AC580B}" dt="2026-09-24T08:39:33.216" v="1448" actId="478"/>
+          <ac:spMkLst>
+            <pc:docMk/>
+            <pc:sldMk cId="2676072630" sldId="295"/>
+            <ac:spMk id="10" creationId="{DE7A02E9-5DD9-F6B1-67A6-1990FF165D6A}"/>
+          </ac:spMkLst>
+        </pc:spChg>
+        <pc:spChg chg="add mod">
+          <ac:chgData name="Nina Dombrowski" userId="1f2bfacd-2a29-43dd-9bcd-fba75591e3fa" providerId="ADAL" clId="{A1E0730E-2E14-4CD5-AA17-1C7BD8AC580B}" dt="2026-09-24T08:47:30.260" v="1671" actId="20577"/>
+          <ac:spMkLst>
+            <pc:docMk/>
+            <pc:sldMk cId="2676072630" sldId="295"/>
+            <ac:spMk id="12" creationId="{D0089872-91F0-A25C-37C5-9A365735DC47}"/>
+          </ac:spMkLst>
+        </pc:spChg>
+        <pc:spChg chg="add mod">
+          <ac:chgData name="Nina Dombrowski" userId="1f2bfacd-2a29-43dd-9bcd-fba75591e3fa" providerId="ADAL" clId="{A1E0730E-2E14-4CD5-AA17-1C7BD8AC580B}" dt="2026-09-24T08:46:23.102" v="1570"/>
+          <ac:spMkLst>
+            <pc:docMk/>
+            <pc:sldMk cId="2676072630" sldId="295"/>
+            <ac:spMk id="13" creationId="{405AB234-16CE-9483-9F0E-4924C7CF1479}"/>
+          </ac:spMkLst>
+        </pc:spChg>
+        <pc:spChg chg="add mod">
+          <ac:chgData name="Nina Dombrowski" userId="1f2bfacd-2a29-43dd-9bcd-fba75591e3fa" providerId="ADAL" clId="{A1E0730E-2E14-4CD5-AA17-1C7BD8AC580B}" dt="2026-09-24T08:46:50.772" v="1587" actId="20577"/>
+          <ac:spMkLst>
+            <pc:docMk/>
+            <pc:sldMk cId="2676072630" sldId="295"/>
+            <ac:spMk id="15" creationId="{74C1E42E-EA78-5931-926B-7B6E69A15961}"/>
+          </ac:spMkLst>
+        </pc:spChg>
+        <pc:spChg chg="del">
+          <ac:chgData name="Nina Dombrowski" userId="1f2bfacd-2a29-43dd-9bcd-fba75591e3fa" providerId="ADAL" clId="{A1E0730E-2E14-4CD5-AA17-1C7BD8AC580B}" dt="2026-09-24T08:11:27.666" v="356" actId="478"/>
+          <ac:spMkLst>
+            <pc:docMk/>
+            <pc:sldMk cId="2676072630" sldId="295"/>
+            <ac:spMk id="17" creationId="{84F28C27-BD4F-420B-A62C-D7EC1E88F104}"/>
+          </ac:spMkLst>
+        </pc:spChg>
+        <pc:spChg chg="mod">
+          <ac:chgData name="Nina Dombrowski" userId="1f2bfacd-2a29-43dd-9bcd-fba75591e3fa" providerId="ADAL" clId="{A1E0730E-2E14-4CD5-AA17-1C7BD8AC580B}" dt="2026-09-24T08:18:46.684" v="735" actId="1037"/>
+          <ac:spMkLst>
+            <pc:docMk/>
+            <pc:sldMk cId="2676072630" sldId="295"/>
+            <ac:spMk id="19" creationId="{A40611D1-7644-90C5-B964-19002E8E9D22}"/>
+          </ac:spMkLst>
+        </pc:spChg>
+        <pc:spChg chg="mod">
+          <ac:chgData name="Nina Dombrowski" userId="1f2bfacd-2a29-43dd-9bcd-fba75591e3fa" providerId="ADAL" clId="{A1E0730E-2E14-4CD5-AA17-1C7BD8AC580B}" dt="2026-09-24T08:18:46.684" v="735" actId="1037"/>
+          <ac:spMkLst>
+            <pc:docMk/>
+            <pc:sldMk cId="2676072630" sldId="295"/>
+            <ac:spMk id="21" creationId="{06ADFD29-3D2C-66EC-1E93-906BA5EB6F6B}"/>
+          </ac:spMkLst>
+        </pc:spChg>
+        <pc:picChg chg="mod">
+          <ac:chgData name="Nina Dombrowski" userId="1f2bfacd-2a29-43dd-9bcd-fba75591e3fa" providerId="ADAL" clId="{A1E0730E-2E14-4CD5-AA17-1C7BD8AC580B}" dt="2026-09-24T08:19:25.903" v="753" actId="1076"/>
+          <ac:picMkLst>
+            <pc:docMk/>
+            <pc:sldMk cId="2676072630" sldId="295"/>
+            <ac:picMk id="5" creationId="{F5343BF3-884F-C84C-A115-3540CE69A0E1}"/>
+          </ac:picMkLst>
+        </pc:picChg>
+        <pc:cxnChg chg="add mod">
+          <ac:chgData name="Nina Dombrowski" userId="1f2bfacd-2a29-43dd-9bcd-fba75591e3fa" providerId="ADAL" clId="{A1E0730E-2E14-4CD5-AA17-1C7BD8AC580B}" dt="2026-09-24T08:48:24.353" v="1682" actId="14100"/>
+          <ac:cxnSpMkLst>
+            <pc:docMk/>
+            <pc:sldMk cId="2676072630" sldId="295"/>
+            <ac:cxnSpMk id="4" creationId="{3F828ADD-5514-B775-EC21-D853277FB29A}"/>
+          </ac:cxnSpMkLst>
+        </pc:cxnChg>
+        <pc:cxnChg chg="del">
+          <ac:chgData name="Nina Dombrowski" userId="1f2bfacd-2a29-43dd-9bcd-fba75591e3fa" providerId="ADAL" clId="{A1E0730E-2E14-4CD5-AA17-1C7BD8AC580B}" dt="2026-09-24T08:11:27.666" v="356" actId="478"/>
+          <ac:cxnSpMkLst>
+            <pc:docMk/>
+            <pc:sldMk cId="2676072630" sldId="295"/>
+            <ac:cxnSpMk id="9" creationId="{D31389EB-CE8C-407F-F9CB-9BA15F54F80B}"/>
+          </ac:cxnSpMkLst>
+        </pc:cxnChg>
+        <pc:cxnChg chg="del">
+          <ac:chgData name="Nina Dombrowski" userId="1f2bfacd-2a29-43dd-9bcd-fba75591e3fa" providerId="ADAL" clId="{A1E0730E-2E14-4CD5-AA17-1C7BD8AC580B}" dt="2026-09-24T08:11:27.666" v="356" actId="478"/>
+          <ac:cxnSpMkLst>
+            <pc:docMk/>
+            <pc:sldMk cId="2676072630" sldId="295"/>
+            <ac:cxnSpMk id="13" creationId="{4871D0FF-FCF7-6CA6-11F4-64C27E7989B8}"/>
           </ac:cxnSpMkLst>
         </pc:cxnChg>
       </pc:sldChg>
     </pc:docChg>
   </pc:docChgLst>
 </pc:chgInfo>
+</file>
+
+<file path=ppt/notesMasters/notesMaster1.xml><?xml version="1.0" encoding="utf-8"?>
+<p:notesMaster xmlns:a="http://schemas.openxmlformats.org/drawingml/2006/main" xmlns:r="http://schemas.openxmlformats.org/officeDocument/2006/relationships" xmlns:p="http://schemas.openxmlformats.org/presentationml/2006/main">
+  <p:cSld>
+    <p:bg>
+      <p:bgRef idx="1001">
+        <a:schemeClr val="bg1"/>
+      </p:bgRef>
+    </p:bg>
+    <p:spTree>
+      <p:nvGrpSpPr>
+        <p:cNvPr id="1" name=""/>
+        <p:cNvGrpSpPr/>
+        <p:nvPr/>
+      </p:nvGrpSpPr>
+      <p:grpSpPr>
+        <a:xfrm>
+          <a:off x="0" y="0"/>
+          <a:ext cx="0" cy="0"/>
+          <a:chOff x="0" y="0"/>
+          <a:chExt cx="0" cy="0"/>
+        </a:xfrm>
+      </p:grpSpPr>
+      <p:sp>
+        <p:nvSpPr>
+          <p:cNvPr id="2" name="Header Placeholder 1"/>
+          <p:cNvSpPr>
+            <a:spLocks noGrp="1"/>
+          </p:cNvSpPr>
+          <p:nvPr>
+            <p:ph type="hdr" sz="quarter"/>
+          </p:nvPr>
+        </p:nvSpPr>
+        <p:spPr>
+          <a:xfrm>
+            <a:off x="0" y="0"/>
+            <a:ext cx="2971800" cy="458788"/>
+          </a:xfrm>
+          <a:prstGeom prst="rect">
+            <a:avLst/>
+          </a:prstGeom>
+        </p:spPr>
+        <p:txBody>
+          <a:bodyPr vert="horz" lIns="91440" tIns="45720" rIns="91440" bIns="45720" rtlCol="0"/>
+          <a:lstStyle>
+            <a:lvl1pPr algn="l">
+              <a:defRPr sz="1200"/>
+            </a:lvl1pPr>
+          </a:lstStyle>
+          <a:p>
+            <a:endParaRPr lang="en-NL"/>
+          </a:p>
+        </p:txBody>
+      </p:sp>
+      <p:sp>
+        <p:nvSpPr>
+          <p:cNvPr id="3" name="Date Placeholder 2"/>
+          <p:cNvSpPr>
+            <a:spLocks noGrp="1"/>
+          </p:cNvSpPr>
+          <p:nvPr>
+            <p:ph type="dt" idx="1"/>
+          </p:nvPr>
+        </p:nvSpPr>
+        <p:spPr>
+          <a:xfrm>
+            <a:off x="3884613" y="0"/>
+            <a:ext cx="2971800" cy="458788"/>
+          </a:xfrm>
+          <a:prstGeom prst="rect">
+            <a:avLst/>
+          </a:prstGeom>
+        </p:spPr>
+        <p:txBody>
+          <a:bodyPr vert="horz" lIns="91440" tIns="45720" rIns="91440" bIns="45720" rtlCol="0"/>
+          <a:lstStyle>
+            <a:lvl1pPr algn="r">
+              <a:defRPr sz="1200"/>
+            </a:lvl1pPr>
+          </a:lstStyle>
+          <a:p>
+            <a:fld id="{B2EA7F55-9507-45A8-BE8A-2473FBFAFF77}" type="datetimeFigureOut">
+              <a:rPr lang="en-NL" smtClean="0"/>
+              <a:t>24/09/2026</a:t>
+            </a:fld>
+            <a:endParaRPr lang="en-NL"/>
+          </a:p>
+        </p:txBody>
+      </p:sp>
+      <p:sp>
+        <p:nvSpPr>
+          <p:cNvPr id="4" name="Slide Image Placeholder 3"/>
+          <p:cNvSpPr>
+            <a:spLocks noGrp="1" noRot="1" noChangeAspect="1"/>
+          </p:cNvSpPr>
+          <p:nvPr>
+            <p:ph type="sldImg" idx="2"/>
+          </p:nvPr>
+        </p:nvSpPr>
+        <p:spPr>
+          <a:xfrm>
+            <a:off x="685800" y="1143000"/>
+            <a:ext cx="5486400" cy="3086100"/>
+          </a:xfrm>
+          <a:prstGeom prst="rect">
+            <a:avLst/>
+          </a:prstGeom>
+          <a:noFill/>
+          <a:ln w="12700">
+            <a:solidFill>
+              <a:prstClr val="black"/>
+            </a:solidFill>
+          </a:ln>
+        </p:spPr>
+        <p:txBody>
+          <a:bodyPr vert="horz" lIns="91440" tIns="45720" rIns="91440" bIns="45720" rtlCol="0" anchor="ctr"/>
+          <a:lstStyle/>
+          <a:p>
+            <a:endParaRPr lang="en-NL"/>
+          </a:p>
+        </p:txBody>
+      </p:sp>
+      <p:sp>
+        <p:nvSpPr>
+          <p:cNvPr id="5" name="Notes Placeholder 4"/>
+          <p:cNvSpPr>
+            <a:spLocks noGrp="1"/>
+          </p:cNvSpPr>
+          <p:nvPr>
+            <p:ph type="body" sz="quarter" idx="3"/>
+          </p:nvPr>
+        </p:nvSpPr>
+        <p:spPr>
+          <a:xfrm>
+            <a:off x="685800" y="4400550"/>
+            <a:ext cx="5486400" cy="3600450"/>
+          </a:xfrm>
+          <a:prstGeom prst="rect">
+            <a:avLst/>
+          </a:prstGeom>
+        </p:spPr>
+        <p:txBody>
+          <a:bodyPr vert="horz" lIns="91440" tIns="45720" rIns="91440" bIns="45720" rtlCol="0"/>
+          <a:lstStyle/>
+          <a:p>
+            <a:pPr lvl="0"/>
+            <a:r>
+              <a:rPr lang="en-US"/>
+              <a:t>Click to edit Master text styles</a:t>
+            </a:r>
+          </a:p>
+          <a:p>
+            <a:pPr lvl="1"/>
+            <a:r>
+              <a:rPr lang="en-US"/>
+              <a:t>Second level</a:t>
+            </a:r>
+          </a:p>
+          <a:p>
+            <a:pPr lvl="2"/>
+            <a:r>
+              <a:rPr lang="en-US"/>
+              <a:t>Third level</a:t>
+            </a:r>
+          </a:p>
+          <a:p>
+            <a:pPr lvl="3"/>
+            <a:r>
+              <a:rPr lang="en-US"/>
+              <a:t>Fourth level</a:t>
+            </a:r>
+          </a:p>
+          <a:p>
+            <a:pPr lvl="4"/>
+            <a:r>
+              <a:rPr lang="en-US"/>
+              <a:t>Fifth level</a:t>
+            </a:r>
+            <a:endParaRPr lang="en-NL"/>
+          </a:p>
+        </p:txBody>
+      </p:sp>
+      <p:sp>
+        <p:nvSpPr>
+          <p:cNvPr id="6" name="Footer Placeholder 5"/>
+          <p:cNvSpPr>
+            <a:spLocks noGrp="1"/>
+          </p:cNvSpPr>
+          <p:nvPr>
+            <p:ph type="ftr" sz="quarter" idx="4"/>
+          </p:nvPr>
+        </p:nvSpPr>
+        <p:spPr>
+          <a:xfrm>
+            <a:off x="0" y="8685213"/>
+            <a:ext cx="2971800" cy="458787"/>
+          </a:xfrm>
+          <a:prstGeom prst="rect">
+            <a:avLst/>
+          </a:prstGeom>
+        </p:spPr>
+        <p:txBody>
+          <a:bodyPr vert="horz" lIns="91440" tIns="45720" rIns="91440" bIns="45720" rtlCol="0" anchor="b"/>
+          <a:lstStyle>
+            <a:lvl1pPr algn="l">
+              <a:defRPr sz="1200"/>
+            </a:lvl1pPr>
+          </a:lstStyle>
+          <a:p>
+            <a:endParaRPr lang="en-NL"/>
+          </a:p>
+        </p:txBody>
+      </p:sp>
+      <p:sp>
+        <p:nvSpPr>
+          <p:cNvPr id="7" name="Slide Number Placeholder 6"/>
+          <p:cNvSpPr>
+            <a:spLocks noGrp="1"/>
+          </p:cNvSpPr>
+          <p:nvPr>
+            <p:ph type="sldNum" sz="quarter" idx="5"/>
+          </p:nvPr>
+        </p:nvSpPr>
+        <p:spPr>
+          <a:xfrm>
+            <a:off x="3884613" y="8685213"/>
+            <a:ext cx="2971800" cy="458787"/>
+          </a:xfrm>
+          <a:prstGeom prst="rect">
+            <a:avLst/>
+          </a:prstGeom>
+        </p:spPr>
+        <p:txBody>
+          <a:bodyPr vert="horz" lIns="91440" tIns="45720" rIns="91440" bIns="45720" rtlCol="0" anchor="b"/>
+          <a:lstStyle>
+            <a:lvl1pPr algn="r">
+              <a:defRPr sz="1200"/>
+            </a:lvl1pPr>
+          </a:lstStyle>
+          <a:p>
+            <a:fld id="{2C487F77-0D14-4642-9A9A-94555F36A77A}" type="slidenum">
+              <a:rPr lang="en-NL" smtClean="0"/>
+              <a:t>‹#›</a:t>
+            </a:fld>
+            <a:endParaRPr lang="en-NL"/>
+          </a:p>
+        </p:txBody>
+      </p:sp>
+    </p:spTree>
+    <p:extLst>
+      <p:ext uri="{BB962C8B-B14F-4D97-AF65-F5344CB8AC3E}">
+        <p14:creationId xmlns:p14="http://schemas.microsoft.com/office/powerpoint/2010/main" val="3839258800"/>
+      </p:ext>
+    </p:extLst>
+  </p:cSld>
+  <p:clrMap bg1="lt1" tx1="dk1" bg2="lt2" tx2="dk2" accent1="accent1" accent2="accent2" accent3="accent3" accent4="accent4" accent5="accent5" accent6="accent6" hlink="hlink" folHlink="folHlink"/>
+  <p:notesStyle>
+    <a:lvl1pPr marL="0" algn="l" defTabSz="914400" rtl="0" eaLnBrk="1" latinLnBrk="0" hangingPunct="1">
+      <a:defRPr sz="1200" kern="1200">
+        <a:solidFill>
+          <a:schemeClr val="tx1"/>
+        </a:solidFill>
+        <a:latin typeface="+mn-lt"/>
+        <a:ea typeface="+mn-ea"/>
+        <a:cs typeface="+mn-cs"/>
+      </a:defRPr>
+    </a:lvl1pPr>
+    <a:lvl2pPr marL="457200" algn="l" defTabSz="914400" rtl="0" eaLnBrk="1" latinLnBrk="0" hangingPunct="1">
+      <a:defRPr sz="1200" kern="1200">
+        <a:solidFill>
+          <a:schemeClr val="tx1"/>
+        </a:solidFill>
+        <a:latin typeface="+mn-lt"/>
+        <a:ea typeface="+mn-ea"/>
+        <a:cs typeface="+mn-cs"/>
+      </a:defRPr>
+    </a:lvl2pPr>
+    <a:lvl3pPr marL="914400" algn="l" defTabSz="914400" rtl="0" eaLnBrk="1" latinLnBrk="0" hangingPunct="1">
+      <a:defRPr sz="1200" kern="1200">
+        <a:solidFill>
+          <a:schemeClr val="tx1"/>
+        </a:solidFill>
+        <a:latin typeface="+mn-lt"/>
+        <a:ea typeface="+mn-ea"/>
+        <a:cs typeface="+mn-cs"/>
+      </a:defRPr>
+    </a:lvl3pPr>
+    <a:lvl4pPr marL="1371600" algn="l" defTabSz="914400" rtl="0" eaLnBrk="1" latinLnBrk="0" hangingPunct="1">
+      <a:defRPr sz="1200" kern="1200">
+        <a:solidFill>
+          <a:schemeClr val="tx1"/>
+        </a:solidFill>
+        <a:latin typeface="+mn-lt"/>
+        <a:ea typeface="+mn-ea"/>
+        <a:cs typeface="+mn-cs"/>
+      </a:defRPr>
+    </a:lvl4pPr>
+    <a:lvl5pPr marL="1828800" algn="l" defTabSz="914400" rtl="0" eaLnBrk="1" latinLnBrk="0" hangingPunct="1">
+      <a:defRPr sz="1200" kern="1200">
+        <a:solidFill>
+          <a:schemeClr val="tx1"/>
+        </a:solidFill>
+        <a:latin typeface="+mn-lt"/>
+        <a:ea typeface="+mn-ea"/>
+        <a:cs typeface="+mn-cs"/>
+      </a:defRPr>
+    </a:lvl5pPr>
+    <a:lvl6pPr marL="2286000" algn="l" defTabSz="914400" rtl="0" eaLnBrk="1" latinLnBrk="0" hangingPunct="1">
+      <a:defRPr sz="1200" kern="1200">
+        <a:solidFill>
+          <a:schemeClr val="tx1"/>
+        </a:solidFill>
+        <a:latin typeface="+mn-lt"/>
+        <a:ea typeface="+mn-ea"/>
+        <a:cs typeface="+mn-cs"/>
+      </a:defRPr>
+    </a:lvl6pPr>
+    <a:lvl7pPr marL="2743200" algn="l" defTabSz="914400" rtl="0" eaLnBrk="1" latinLnBrk="0" hangingPunct="1">
+      <a:defRPr sz="1200" kern="1200">
+        <a:solidFill>
+          <a:schemeClr val="tx1"/>
+        </a:solidFill>
+        <a:latin typeface="+mn-lt"/>
+        <a:ea typeface="+mn-ea"/>
+        <a:cs typeface="+mn-cs"/>
+      </a:defRPr>
+    </a:lvl7pPr>
+    <a:lvl8pPr marL="3200400" algn="l" defTabSz="914400" rtl="0" eaLnBrk="1" latinLnBrk="0" hangingPunct="1">
+      <a:defRPr sz="1200" kern="1200">
+        <a:solidFill>
+          <a:schemeClr val="tx1"/>
+        </a:solidFill>
+        <a:latin typeface="+mn-lt"/>
+        <a:ea typeface="+mn-ea"/>
+        <a:cs typeface="+mn-cs"/>
+      </a:defRPr>
+    </a:lvl8pPr>
+    <a:lvl9pPr marL="3657600" algn="l" defTabSz="914400" rtl="0" eaLnBrk="1" latinLnBrk="0" hangingPunct="1">
+      <a:defRPr sz="1200" kern="1200">
+        <a:solidFill>
+          <a:schemeClr val="tx1"/>
+        </a:solidFill>
+        <a:latin typeface="+mn-lt"/>
+        <a:ea typeface="+mn-ea"/>
+        <a:cs typeface="+mn-cs"/>
+      </a:defRPr>
+    </a:lvl9pPr>
+  </p:notesStyle>
+</p:notesMaster>
+</file>
+
+<file path=ppt/notesSlides/notesSlide1.xml><?xml version="1.0" encoding="utf-8"?>
+<p:notes xmlns:a="http://schemas.openxmlformats.org/drawingml/2006/main" xmlns:r="http://schemas.openxmlformats.org/officeDocument/2006/relationships" xmlns:p="http://schemas.openxmlformats.org/presentationml/2006/main">
+  <p:cSld>
+    <p:spTree>
+      <p:nvGrpSpPr>
+        <p:cNvPr id="1" name="">
+          <a:extLst>
+            <a:ext uri="{FF2B5EF4-FFF2-40B4-BE49-F238E27FC236}">
+              <a16:creationId xmlns:a16="http://schemas.microsoft.com/office/drawing/2014/main" id="{D1E78F27-02BA-0629-27BA-E6291C74B3E5}"/>
+            </a:ext>
+          </a:extLst>
+        </p:cNvPr>
+        <p:cNvGrpSpPr/>
+        <p:nvPr/>
+      </p:nvGrpSpPr>
+      <p:grpSpPr>
+        <a:xfrm>
+          <a:off x="0" y="0"/>
+          <a:ext cx="0" cy="0"/>
+          <a:chOff x="0" y="0"/>
+          <a:chExt cx="0" cy="0"/>
+        </a:xfrm>
+      </p:grpSpPr>
+      <p:sp>
+        <p:nvSpPr>
+          <p:cNvPr id="2" name="Slide Image Placeholder 1">
+            <a:extLst>
+              <a:ext uri="{FF2B5EF4-FFF2-40B4-BE49-F238E27FC236}">
+                <a16:creationId xmlns:a16="http://schemas.microsoft.com/office/drawing/2014/main" id="{E1D39693-6A80-DE7C-A28E-5F712D2456C7}"/>
+              </a:ext>
+            </a:extLst>
+          </p:cNvPr>
+          <p:cNvSpPr>
+            <a:spLocks noGrp="1" noRot="1" noChangeAspect="1"/>
+          </p:cNvSpPr>
+          <p:nvPr>
+            <p:ph type="sldImg"/>
+          </p:nvPr>
+        </p:nvSpPr>
+        <p:spPr/>
+      </p:sp>
+      <p:sp>
+        <p:nvSpPr>
+          <p:cNvPr id="3" name="Notes Placeholder 2">
+            <a:extLst>
+              <a:ext uri="{FF2B5EF4-FFF2-40B4-BE49-F238E27FC236}">
+                <a16:creationId xmlns:a16="http://schemas.microsoft.com/office/drawing/2014/main" id="{D0EBCBF1-29BC-AC99-96D3-928655639F15}"/>
+              </a:ext>
+            </a:extLst>
+          </p:cNvPr>
+          <p:cNvSpPr>
+            <a:spLocks noGrp="1"/>
+          </p:cNvSpPr>
+          <p:nvPr>
+            <p:ph type="body" idx="1"/>
+          </p:nvPr>
+        </p:nvSpPr>
+        <p:spPr/>
+        <p:txBody>
+          <a:bodyPr/>
+          <a:lstStyle/>
+          <a:p>
+            <a:endParaRPr lang="en-NL" dirty="0"/>
+          </a:p>
+        </p:txBody>
+      </p:sp>
+      <p:sp>
+        <p:nvSpPr>
+          <p:cNvPr id="4" name="Slide Number Placeholder 3">
+            <a:extLst>
+              <a:ext uri="{FF2B5EF4-FFF2-40B4-BE49-F238E27FC236}">
+                <a16:creationId xmlns:a16="http://schemas.microsoft.com/office/drawing/2014/main" id="{0F54C32E-560D-EDDD-D667-0EE8392B087F}"/>
+              </a:ext>
+            </a:extLst>
+          </p:cNvPr>
+          <p:cNvSpPr>
+            <a:spLocks noGrp="1"/>
+          </p:cNvSpPr>
+          <p:nvPr>
+            <p:ph type="sldNum" sz="quarter" idx="5"/>
+          </p:nvPr>
+        </p:nvSpPr>
+        <p:spPr/>
+        <p:txBody>
+          <a:bodyPr/>
+          <a:lstStyle/>
+          <a:p>
+            <a:fld id="{A42A9708-3660-4964-8400-F9F86E56367F}" type="slidenum">
+              <a:rPr lang="en-NL" smtClean="0"/>
+              <a:t>1</a:t>
+            </a:fld>
+            <a:endParaRPr lang="en-NL"/>
+          </a:p>
+        </p:txBody>
+      </p:sp>
+    </p:spTree>
+    <p:extLst>
+      <p:ext uri="{BB962C8B-B14F-4D97-AF65-F5344CB8AC3E}">
+        <p14:creationId xmlns:p14="http://schemas.microsoft.com/office/powerpoint/2010/main" val="1942274530"/>
+      </p:ext>
+    </p:extLst>
+  </p:cSld>
+  <p:clrMapOvr>
+    <a:masterClrMapping/>
+  </p:clrMapOvr>
+</p:notes>
+</file>
+
+<file path=ppt/notesSlides/notesSlide2.xml><?xml version="1.0" encoding="utf-8"?>
+<p:notes xmlns:a="http://schemas.openxmlformats.org/drawingml/2006/main" xmlns:r="http://schemas.openxmlformats.org/officeDocument/2006/relationships" xmlns:p="http://schemas.openxmlformats.org/presentationml/2006/main">
+  <p:cSld>
+    <p:spTree>
+      <p:nvGrpSpPr>
+        <p:cNvPr id="1" name="">
+          <a:extLst>
+            <a:ext uri="{FF2B5EF4-FFF2-40B4-BE49-F238E27FC236}">
+              <a16:creationId xmlns:a16="http://schemas.microsoft.com/office/drawing/2014/main" id="{0D49E2DE-84EB-48AF-5EF9-B3666C98EBEE}"/>
+            </a:ext>
+          </a:extLst>
+        </p:cNvPr>
+        <p:cNvGrpSpPr/>
+        <p:nvPr/>
+      </p:nvGrpSpPr>
+      <p:grpSpPr>
+        <a:xfrm>
+          <a:off x="0" y="0"/>
+          <a:ext cx="0" cy="0"/>
+          <a:chOff x="0" y="0"/>
+          <a:chExt cx="0" cy="0"/>
+        </a:xfrm>
+      </p:grpSpPr>
+      <p:sp>
+        <p:nvSpPr>
+          <p:cNvPr id="2" name="Slide Image Placeholder 1">
+            <a:extLst>
+              <a:ext uri="{FF2B5EF4-FFF2-40B4-BE49-F238E27FC236}">
+                <a16:creationId xmlns:a16="http://schemas.microsoft.com/office/drawing/2014/main" id="{92C66D82-1778-6C19-0F15-7D16331F3F28}"/>
+              </a:ext>
+            </a:extLst>
+          </p:cNvPr>
+          <p:cNvSpPr>
+            <a:spLocks noGrp="1" noRot="1" noChangeAspect="1"/>
+          </p:cNvSpPr>
+          <p:nvPr>
+            <p:ph type="sldImg"/>
+          </p:nvPr>
+        </p:nvSpPr>
+        <p:spPr/>
+      </p:sp>
+      <p:sp>
+        <p:nvSpPr>
+          <p:cNvPr id="3" name="Notes Placeholder 2">
+            <a:extLst>
+              <a:ext uri="{FF2B5EF4-FFF2-40B4-BE49-F238E27FC236}">
+                <a16:creationId xmlns:a16="http://schemas.microsoft.com/office/drawing/2014/main" id="{39286D41-F7CE-0175-5302-D9BD46AEE454}"/>
+              </a:ext>
+            </a:extLst>
+          </p:cNvPr>
+          <p:cNvSpPr>
+            <a:spLocks noGrp="1"/>
+          </p:cNvSpPr>
+          <p:nvPr>
+            <p:ph type="body" idx="1"/>
+          </p:nvPr>
+        </p:nvSpPr>
+        <p:spPr/>
+        <p:txBody>
+          <a:bodyPr/>
+          <a:lstStyle/>
+          <a:p>
+            <a:endParaRPr lang="en-NL" dirty="0"/>
+          </a:p>
+        </p:txBody>
+      </p:sp>
+      <p:sp>
+        <p:nvSpPr>
+          <p:cNvPr id="4" name="Slide Number Placeholder 3">
+            <a:extLst>
+              <a:ext uri="{FF2B5EF4-FFF2-40B4-BE49-F238E27FC236}">
+                <a16:creationId xmlns:a16="http://schemas.microsoft.com/office/drawing/2014/main" id="{5E7FBB4A-9FAD-184C-57DB-76E45D3F3BF5}"/>
+              </a:ext>
+            </a:extLst>
+          </p:cNvPr>
+          <p:cNvSpPr>
+            <a:spLocks noGrp="1"/>
+          </p:cNvSpPr>
+          <p:nvPr>
+            <p:ph type="sldNum" sz="quarter" idx="5"/>
+          </p:nvPr>
+        </p:nvSpPr>
+        <p:spPr/>
+        <p:txBody>
+          <a:bodyPr/>
+          <a:lstStyle/>
+          <a:p>
+            <a:fld id="{A42A9708-3660-4964-8400-F9F86E56367F}" type="slidenum">
+              <a:rPr lang="en-NL" smtClean="0"/>
+              <a:t>2</a:t>
+            </a:fld>
+            <a:endParaRPr lang="en-NL"/>
+          </a:p>
+        </p:txBody>
+      </p:sp>
+    </p:spTree>
+    <p:extLst>
+      <p:ext uri="{BB962C8B-B14F-4D97-AF65-F5344CB8AC3E}">
+        <p14:creationId xmlns:p14="http://schemas.microsoft.com/office/powerpoint/2010/main" val="1508335417"/>
+      </p:ext>
+    </p:extLst>
+  </p:cSld>
+  <p:clrMapOvr>
+    <a:masterClrMapping/>
+  </p:clrMapOvr>
+</p:notes>
+</file>
+
+<file path=ppt/notesSlides/notesSlide3.xml><?xml version="1.0" encoding="utf-8"?>
+<p:notes xmlns:a="http://schemas.openxmlformats.org/drawingml/2006/main" xmlns:r="http://schemas.openxmlformats.org/officeDocument/2006/relationships" xmlns:p="http://schemas.openxmlformats.org/presentationml/2006/main">
+  <p:cSld>
+    <p:spTree>
+      <p:nvGrpSpPr>
+        <p:cNvPr id="1" name="">
+          <a:extLst>
+            <a:ext uri="{FF2B5EF4-FFF2-40B4-BE49-F238E27FC236}">
+              <a16:creationId xmlns:a16="http://schemas.microsoft.com/office/drawing/2014/main" id="{A9EF292C-1DA7-AEEC-875A-7D79818048A0}"/>
+            </a:ext>
+          </a:extLst>
+        </p:cNvPr>
+        <p:cNvGrpSpPr/>
+        <p:nvPr/>
+      </p:nvGrpSpPr>
+      <p:grpSpPr>
+        <a:xfrm>
+          <a:off x="0" y="0"/>
+          <a:ext cx="0" cy="0"/>
+          <a:chOff x="0" y="0"/>
+          <a:chExt cx="0" cy="0"/>
+        </a:xfrm>
+      </p:grpSpPr>
+      <p:sp>
+        <p:nvSpPr>
+          <p:cNvPr id="2" name="Slide Image Placeholder 1">
+            <a:extLst>
+              <a:ext uri="{FF2B5EF4-FFF2-40B4-BE49-F238E27FC236}">
+                <a16:creationId xmlns:a16="http://schemas.microsoft.com/office/drawing/2014/main" id="{7FD65F59-7D84-26F7-85B8-45A581796AF8}"/>
+              </a:ext>
+            </a:extLst>
+          </p:cNvPr>
+          <p:cNvSpPr>
+            <a:spLocks noGrp="1" noRot="1" noChangeAspect="1"/>
+          </p:cNvSpPr>
+          <p:nvPr>
+            <p:ph type="sldImg"/>
+          </p:nvPr>
+        </p:nvSpPr>
+        <p:spPr/>
+      </p:sp>
+      <p:sp>
+        <p:nvSpPr>
+          <p:cNvPr id="3" name="Notes Placeholder 2">
+            <a:extLst>
+              <a:ext uri="{FF2B5EF4-FFF2-40B4-BE49-F238E27FC236}">
+                <a16:creationId xmlns:a16="http://schemas.microsoft.com/office/drawing/2014/main" id="{FCDE7F74-CD43-D83D-5E7B-9590F86F6CF4}"/>
+              </a:ext>
+            </a:extLst>
+          </p:cNvPr>
+          <p:cNvSpPr>
+            <a:spLocks noGrp="1"/>
+          </p:cNvSpPr>
+          <p:nvPr>
+            <p:ph type="body" idx="1"/>
+          </p:nvPr>
+        </p:nvSpPr>
+        <p:spPr/>
+        <p:txBody>
+          <a:bodyPr/>
+          <a:lstStyle/>
+          <a:p>
+            <a:r>
+              <a:rPr lang="en-GB" dirty="0"/>
+              <a:t>Brown = Sits on the reverse strand. Its coding strand is the reverse strand on the reference, and its template strand is the forward strand</a:t>
+            </a:r>
+            <a:endParaRPr lang="en-NL" dirty="0"/>
+          </a:p>
+        </p:txBody>
+      </p:sp>
+      <p:sp>
+        <p:nvSpPr>
+          <p:cNvPr id="4" name="Slide Number Placeholder 3">
+            <a:extLst>
+              <a:ext uri="{FF2B5EF4-FFF2-40B4-BE49-F238E27FC236}">
+                <a16:creationId xmlns:a16="http://schemas.microsoft.com/office/drawing/2014/main" id="{6EC8A98F-3ACB-8906-C156-4FB09DEB966B}"/>
+              </a:ext>
+            </a:extLst>
+          </p:cNvPr>
+          <p:cNvSpPr>
+            <a:spLocks noGrp="1"/>
+          </p:cNvSpPr>
+          <p:nvPr>
+            <p:ph type="sldNum" sz="quarter" idx="5"/>
+          </p:nvPr>
+        </p:nvSpPr>
+        <p:spPr/>
+        <p:txBody>
+          <a:bodyPr/>
+          <a:lstStyle/>
+          <a:p>
+            <a:fld id="{A42A9708-3660-4964-8400-F9F86E56367F}" type="slidenum">
+              <a:rPr lang="en-NL" smtClean="0"/>
+              <a:t>3</a:t>
+            </a:fld>
+            <a:endParaRPr lang="en-NL"/>
+          </a:p>
+        </p:txBody>
+      </p:sp>
+    </p:spTree>
+    <p:extLst>
+      <p:ext uri="{BB962C8B-B14F-4D97-AF65-F5344CB8AC3E}">
+        <p14:creationId xmlns:p14="http://schemas.microsoft.com/office/powerpoint/2010/main" val="3558840016"/>
+      </p:ext>
+    </p:extLst>
+  </p:cSld>
+  <p:clrMapOvr>
+    <a:masterClrMapping/>
+  </p:clrMapOvr>
+</p:notes>
+</file>
+
+<file path=ppt/notesSlides/notesSlide4.xml><?xml version="1.0" encoding="utf-8"?>
+<p:notes xmlns:a="http://schemas.openxmlformats.org/drawingml/2006/main" xmlns:r="http://schemas.openxmlformats.org/officeDocument/2006/relationships" xmlns:p="http://schemas.openxmlformats.org/presentationml/2006/main">
+  <p:cSld>
+    <p:spTree>
+      <p:nvGrpSpPr>
+        <p:cNvPr id="1" name="">
+          <a:extLst>
+            <a:ext uri="{FF2B5EF4-FFF2-40B4-BE49-F238E27FC236}">
+              <a16:creationId xmlns:a16="http://schemas.microsoft.com/office/drawing/2014/main" id="{808B643A-0E8C-1F98-3816-5FA2D054F126}"/>
+            </a:ext>
+          </a:extLst>
+        </p:cNvPr>
+        <p:cNvGrpSpPr/>
+        <p:nvPr/>
+      </p:nvGrpSpPr>
+      <p:grpSpPr>
+        <a:xfrm>
+          <a:off x="0" y="0"/>
+          <a:ext cx="0" cy="0"/>
+          <a:chOff x="0" y="0"/>
+          <a:chExt cx="0" cy="0"/>
+        </a:xfrm>
+      </p:grpSpPr>
+      <p:sp>
+        <p:nvSpPr>
+          <p:cNvPr id="2" name="Slide Image Placeholder 1">
+            <a:extLst>
+              <a:ext uri="{FF2B5EF4-FFF2-40B4-BE49-F238E27FC236}">
+                <a16:creationId xmlns:a16="http://schemas.microsoft.com/office/drawing/2014/main" id="{4143790B-267C-E0A6-1860-F12838AD5ED1}"/>
+              </a:ext>
+            </a:extLst>
+          </p:cNvPr>
+          <p:cNvSpPr>
+            <a:spLocks noGrp="1" noRot="1" noChangeAspect="1"/>
+          </p:cNvSpPr>
+          <p:nvPr>
+            <p:ph type="sldImg"/>
+          </p:nvPr>
+        </p:nvSpPr>
+        <p:spPr/>
+      </p:sp>
+      <p:sp>
+        <p:nvSpPr>
+          <p:cNvPr id="3" name="Notes Placeholder 2">
+            <a:extLst>
+              <a:ext uri="{FF2B5EF4-FFF2-40B4-BE49-F238E27FC236}">
+                <a16:creationId xmlns:a16="http://schemas.microsoft.com/office/drawing/2014/main" id="{B8A79B2E-D265-3C6F-3113-4D8EDBD76BEF}"/>
+              </a:ext>
+            </a:extLst>
+          </p:cNvPr>
+          <p:cNvSpPr>
+            <a:spLocks noGrp="1"/>
+          </p:cNvSpPr>
+          <p:nvPr>
+            <p:ph type="body" idx="1"/>
+          </p:nvPr>
+        </p:nvSpPr>
+        <p:spPr/>
+        <p:txBody>
+          <a:bodyPr/>
+          <a:lstStyle/>
+          <a:p>
+            <a:r>
+              <a:rPr lang="en-GB" dirty="0"/>
+              <a:t>Brown = Sits on the reverse strand. Its coding strand is the reverse strand on the reference, and its template strand is the forward strand</a:t>
+            </a:r>
+            <a:endParaRPr lang="en-NL" dirty="0"/>
+          </a:p>
+        </p:txBody>
+      </p:sp>
+      <p:sp>
+        <p:nvSpPr>
+          <p:cNvPr id="4" name="Slide Number Placeholder 3">
+            <a:extLst>
+              <a:ext uri="{FF2B5EF4-FFF2-40B4-BE49-F238E27FC236}">
+                <a16:creationId xmlns:a16="http://schemas.microsoft.com/office/drawing/2014/main" id="{6D7AC17A-6A1B-0068-FBB2-0878A8E033F9}"/>
+              </a:ext>
+            </a:extLst>
+          </p:cNvPr>
+          <p:cNvSpPr>
+            <a:spLocks noGrp="1"/>
+          </p:cNvSpPr>
+          <p:nvPr>
+            <p:ph type="sldNum" sz="quarter" idx="5"/>
+          </p:nvPr>
+        </p:nvSpPr>
+        <p:spPr/>
+        <p:txBody>
+          <a:bodyPr/>
+          <a:lstStyle/>
+          <a:p>
+            <a:fld id="{A42A9708-3660-4964-8400-F9F86E56367F}" type="slidenum">
+              <a:rPr lang="en-NL" smtClean="0"/>
+              <a:t>4</a:t>
+            </a:fld>
+            <a:endParaRPr lang="en-NL"/>
+          </a:p>
+        </p:txBody>
+      </p:sp>
+    </p:spTree>
+    <p:extLst>
+      <p:ext uri="{BB962C8B-B14F-4D97-AF65-F5344CB8AC3E}">
+        <p14:creationId xmlns:p14="http://schemas.microsoft.com/office/powerpoint/2010/main" val="3341503156"/>
+      </p:ext>
+    </p:extLst>
+  </p:cSld>
+  <p:clrMapOvr>
+    <a:masterClrMapping/>
+  </p:clrMapOvr>
+</p:notes>
+</file>
+
+<file path=ppt/notesSlides/notesSlide5.xml><?xml version="1.0" encoding="utf-8"?>
+<p:notes xmlns:a="http://schemas.openxmlformats.org/drawingml/2006/main" xmlns:r="http://schemas.openxmlformats.org/officeDocument/2006/relationships" xmlns:p="http://schemas.openxmlformats.org/presentationml/2006/main">
+  <p:cSld>
+    <p:spTree>
+      <p:nvGrpSpPr>
+        <p:cNvPr id="1" name="">
+          <a:extLst>
+            <a:ext uri="{FF2B5EF4-FFF2-40B4-BE49-F238E27FC236}">
+              <a16:creationId xmlns:a16="http://schemas.microsoft.com/office/drawing/2014/main" id="{F7B23124-FAEC-4F89-6BE2-E33791BB5E12}"/>
+            </a:ext>
+          </a:extLst>
+        </p:cNvPr>
+        <p:cNvGrpSpPr/>
+        <p:nvPr/>
+      </p:nvGrpSpPr>
+      <p:grpSpPr>
+        <a:xfrm>
+          <a:off x="0" y="0"/>
+          <a:ext cx="0" cy="0"/>
+          <a:chOff x="0" y="0"/>
+          <a:chExt cx="0" cy="0"/>
+        </a:xfrm>
+      </p:grpSpPr>
+      <p:sp>
+        <p:nvSpPr>
+          <p:cNvPr id="2" name="Slide Image Placeholder 1">
+            <a:extLst>
+              <a:ext uri="{FF2B5EF4-FFF2-40B4-BE49-F238E27FC236}">
+                <a16:creationId xmlns:a16="http://schemas.microsoft.com/office/drawing/2014/main" id="{C232DE8C-351B-50FE-F0A1-87E576ADA9A8}"/>
+              </a:ext>
+            </a:extLst>
+          </p:cNvPr>
+          <p:cNvSpPr>
+            <a:spLocks noGrp="1" noRot="1" noChangeAspect="1"/>
+          </p:cNvSpPr>
+          <p:nvPr>
+            <p:ph type="sldImg"/>
+          </p:nvPr>
+        </p:nvSpPr>
+        <p:spPr/>
+      </p:sp>
+      <p:sp>
+        <p:nvSpPr>
+          <p:cNvPr id="3" name="Notes Placeholder 2">
+            <a:extLst>
+              <a:ext uri="{FF2B5EF4-FFF2-40B4-BE49-F238E27FC236}">
+                <a16:creationId xmlns:a16="http://schemas.microsoft.com/office/drawing/2014/main" id="{6B5155AF-3C7C-EB7D-B3AA-F81483AF209E}"/>
+              </a:ext>
+            </a:extLst>
+          </p:cNvPr>
+          <p:cNvSpPr>
+            <a:spLocks noGrp="1"/>
+          </p:cNvSpPr>
+          <p:nvPr>
+            <p:ph type="body" idx="1"/>
+          </p:nvPr>
+        </p:nvSpPr>
+        <p:spPr/>
+        <p:txBody>
+          <a:bodyPr/>
+          <a:lstStyle/>
+          <a:p>
+            <a:r>
+              <a:rPr lang="en-GB" dirty="0"/>
+              <a:t>Brown = Sits on the reverse strand. Its coding strand is the reverse strand on the reference, and its template strand is the forward strand</a:t>
+            </a:r>
+            <a:endParaRPr lang="en-NL" dirty="0"/>
+          </a:p>
+        </p:txBody>
+      </p:sp>
+      <p:sp>
+        <p:nvSpPr>
+          <p:cNvPr id="4" name="Slide Number Placeholder 3">
+            <a:extLst>
+              <a:ext uri="{FF2B5EF4-FFF2-40B4-BE49-F238E27FC236}">
+                <a16:creationId xmlns:a16="http://schemas.microsoft.com/office/drawing/2014/main" id="{2B5693E9-45EA-BA56-5B2E-0388AF3BE3F1}"/>
+              </a:ext>
+            </a:extLst>
+          </p:cNvPr>
+          <p:cNvSpPr>
+            <a:spLocks noGrp="1"/>
+          </p:cNvSpPr>
+          <p:nvPr>
+            <p:ph type="sldNum" sz="quarter" idx="5"/>
+          </p:nvPr>
+        </p:nvSpPr>
+        <p:spPr/>
+        <p:txBody>
+          <a:bodyPr/>
+          <a:lstStyle/>
+          <a:p>
+            <a:fld id="{A42A9708-3660-4964-8400-F9F86E56367F}" type="slidenum">
+              <a:rPr lang="en-NL" smtClean="0"/>
+              <a:t>5</a:t>
+            </a:fld>
+            <a:endParaRPr lang="en-NL"/>
+          </a:p>
+        </p:txBody>
+      </p:sp>
+    </p:spTree>
+    <p:extLst>
+      <p:ext uri="{BB962C8B-B14F-4D97-AF65-F5344CB8AC3E}">
+        <p14:creationId xmlns:p14="http://schemas.microsoft.com/office/powerpoint/2010/main" val="1918859391"/>
+      </p:ext>
+    </p:extLst>
+  </p:cSld>
+  <p:clrMapOvr>
+    <a:masterClrMapping/>
+  </p:clrMapOvr>
+</p:notes>
 </file>
 
 <file path=ppt/slideLayouts/slideLayout1.xml><?xml version="1.0" encoding="utf-8"?>
@@ -458,7 +2200,7 @@
           <a:p>
             <a:fld id="{6996F88E-6CC7-4AC3-883C-593357450330}" type="datetimeFigureOut">
               <a:rPr lang="en-NL" smtClean="0"/>
-              <a:t>14/07/2025</a:t>
+              <a:t>24/09/2026</a:t>
             </a:fld>
             <a:endParaRPr lang="en-NL"/>
           </a:p>
@@ -658,7 +2400,7 @@
           <a:p>
             <a:fld id="{6996F88E-6CC7-4AC3-883C-593357450330}" type="datetimeFigureOut">
               <a:rPr lang="en-NL" smtClean="0"/>
-              <a:t>14/07/2025</a:t>
+              <a:t>24/09/2026</a:t>
             </a:fld>
             <a:endParaRPr lang="en-NL"/>
           </a:p>
@@ -868,7 +2610,7 @@
           <a:p>
             <a:fld id="{6996F88E-6CC7-4AC3-883C-593357450330}" type="datetimeFigureOut">
               <a:rPr lang="en-NL" smtClean="0"/>
-              <a:t>14/07/2025</a:t>
+              <a:t>24/09/2026</a:t>
             </a:fld>
             <a:endParaRPr lang="en-NL"/>
           </a:p>
@@ -1068,7 +2810,7 @@
           <a:p>
             <a:fld id="{6996F88E-6CC7-4AC3-883C-593357450330}" type="datetimeFigureOut">
               <a:rPr lang="en-NL" smtClean="0"/>
-              <a:t>14/07/2025</a:t>
+              <a:t>24/09/2026</a:t>
             </a:fld>
             <a:endParaRPr lang="en-NL"/>
           </a:p>
@@ -1344,7 +3086,7 @@
           <a:p>
             <a:fld id="{6996F88E-6CC7-4AC3-883C-593357450330}" type="datetimeFigureOut">
               <a:rPr lang="en-NL" smtClean="0"/>
-              <a:t>14/07/2025</a:t>
+              <a:t>24/09/2026</a:t>
             </a:fld>
             <a:endParaRPr lang="en-NL"/>
           </a:p>
@@ -1612,7 +3354,7 @@
           <a:p>
             <a:fld id="{6996F88E-6CC7-4AC3-883C-593357450330}" type="datetimeFigureOut">
               <a:rPr lang="en-NL" smtClean="0"/>
-              <a:t>14/07/2025</a:t>
+              <a:t>24/09/2026</a:t>
             </a:fld>
             <a:endParaRPr lang="en-NL"/>
           </a:p>
@@ -2027,7 +3769,7 @@
           <a:p>
             <a:fld id="{6996F88E-6CC7-4AC3-883C-593357450330}" type="datetimeFigureOut">
               <a:rPr lang="en-NL" smtClean="0"/>
-              <a:t>14/07/2025</a:t>
+              <a:t>24/09/2026</a:t>
             </a:fld>
             <a:endParaRPr lang="en-NL"/>
           </a:p>
@@ -2169,7 +3911,7 @@
           <a:p>
             <a:fld id="{6996F88E-6CC7-4AC3-883C-593357450330}" type="datetimeFigureOut">
               <a:rPr lang="en-NL" smtClean="0"/>
-              <a:t>14/07/2025</a:t>
+              <a:t>24/09/2026</a:t>
             </a:fld>
             <a:endParaRPr lang="en-NL"/>
           </a:p>
@@ -2282,7 +4024,7 @@
           <a:p>
             <a:fld id="{6996F88E-6CC7-4AC3-883C-593357450330}" type="datetimeFigureOut">
               <a:rPr lang="en-NL" smtClean="0"/>
-              <a:t>14/07/2025</a:t>
+              <a:t>24/09/2026</a:t>
             </a:fld>
             <a:endParaRPr lang="en-NL"/>
           </a:p>
@@ -2595,7 +4337,7 @@
           <a:p>
             <a:fld id="{6996F88E-6CC7-4AC3-883C-593357450330}" type="datetimeFigureOut">
               <a:rPr lang="en-NL" smtClean="0"/>
-              <a:t>14/07/2025</a:t>
+              <a:t>24/09/2026</a:t>
             </a:fld>
             <a:endParaRPr lang="en-NL"/>
           </a:p>
@@ -2884,7 +4626,7 @@
           <a:p>
             <a:fld id="{6996F88E-6CC7-4AC3-883C-593357450330}" type="datetimeFigureOut">
               <a:rPr lang="en-NL" smtClean="0"/>
-              <a:t>14/07/2025</a:t>
+              <a:t>24/09/2026</a:t>
             </a:fld>
             <a:endParaRPr lang="en-NL"/>
           </a:p>
@@ -3127,7 +4869,7 @@
           <a:p>
             <a:fld id="{6996F88E-6CC7-4AC3-883C-593357450330}" type="datetimeFigureOut">
               <a:rPr lang="en-NL" smtClean="0"/>
-              <a:t>14/07/2025</a:t>
+              <a:t>24/09/2026</a:t>
             </a:fld>
             <a:endParaRPr lang="en-NL"/>
           </a:p>
@@ -3532,7 +5274,13 @@
   <p:cSld>
     <p:spTree>
       <p:nvGrpSpPr>
-        <p:cNvPr id="1" name=""/>
+        <p:cNvPr id="1" name="">
+          <a:extLst>
+            <a:ext uri="{FF2B5EF4-FFF2-40B4-BE49-F238E27FC236}">
+              <a16:creationId xmlns:a16="http://schemas.microsoft.com/office/drawing/2014/main" id="{9D217925-5E8D-7C73-2F45-544E4C7C6254}"/>
+            </a:ext>
+          </a:extLst>
+        </p:cNvPr>
         <p:cNvGrpSpPr/>
         <p:nvPr/>
       </p:nvGrpSpPr>
@@ -3544,12 +5292,1447 @@
           <a:chExt cx="0" cy="0"/>
         </a:xfrm>
       </p:grpSpPr>
+      <p:sp>
+        <p:nvSpPr>
+          <p:cNvPr id="4" name="TextBox 3">
+            <a:extLst>
+              <a:ext uri="{FF2B5EF4-FFF2-40B4-BE49-F238E27FC236}">
+                <a16:creationId xmlns:a16="http://schemas.microsoft.com/office/drawing/2014/main" id="{FCDDFEDE-6490-2C79-AEA0-03DAF4E90DB6}"/>
+              </a:ext>
+            </a:extLst>
+          </p:cNvPr>
+          <p:cNvSpPr txBox="1"/>
+          <p:nvPr/>
+        </p:nvSpPr>
+        <p:spPr>
+          <a:xfrm>
+            <a:off x="297647" y="939454"/>
+            <a:ext cx="12409640" cy="430887"/>
+          </a:xfrm>
+          <a:prstGeom prst="rect">
+            <a:avLst/>
+          </a:prstGeom>
+          <a:noFill/>
+        </p:spPr>
+        <p:txBody>
+          <a:bodyPr wrap="square" rtlCol="0">
+            <a:spAutoFit/>
+          </a:bodyPr>
+          <a:lstStyle/>
+          <a:p>
+            <a:r>
+              <a:rPr lang="en-GB" sz="2200" dirty="0"/>
+              <a:t>Some terminology (for an example gene on the forward strand):</a:t>
+            </a:r>
+          </a:p>
+        </p:txBody>
+      </p:sp>
+      <p:sp>
+        <p:nvSpPr>
+          <p:cNvPr id="39" name="TextBox 38">
+            <a:extLst>
+              <a:ext uri="{FF2B5EF4-FFF2-40B4-BE49-F238E27FC236}">
+                <a16:creationId xmlns:a16="http://schemas.microsoft.com/office/drawing/2014/main" id="{B5CEC752-CD61-F19B-E670-378D31574C6C}"/>
+              </a:ext>
+            </a:extLst>
+          </p:cNvPr>
+          <p:cNvSpPr txBox="1"/>
+          <p:nvPr/>
+        </p:nvSpPr>
+        <p:spPr>
+          <a:xfrm>
+            <a:off x="297647" y="6350882"/>
+            <a:ext cx="11894353" cy="523220"/>
+          </a:xfrm>
+          <a:prstGeom prst="rect">
+            <a:avLst/>
+          </a:prstGeom>
+          <a:noFill/>
+        </p:spPr>
+        <p:txBody>
+          <a:bodyPr wrap="square" rtlCol="0">
+            <a:spAutoFit/>
+          </a:bodyPr>
+          <a:lstStyle/>
+          <a:p>
+            <a:pPr algn="r"/>
+            <a:r>
+              <a:rPr lang="en-GB" sz="1400" dirty="0"/>
+              <a:t>*For a gene on the reverse strand these swap:</a:t>
+            </a:r>
+          </a:p>
+          <a:p>
+            <a:pPr algn="r"/>
+            <a:r>
+              <a:rPr lang="en-GB" sz="1400" dirty="0"/>
+              <a:t>Its coding strand is on the negative/reverse strand</a:t>
+            </a:r>
+            <a:endParaRPr lang="en-NL" sz="1400" dirty="0"/>
+          </a:p>
+        </p:txBody>
+      </p:sp>
+      <p:cxnSp>
+        <p:nvCxnSpPr>
+          <p:cNvPr id="41" name="Straight Connector 40">
+            <a:extLst>
+              <a:ext uri="{FF2B5EF4-FFF2-40B4-BE49-F238E27FC236}">
+                <a16:creationId xmlns:a16="http://schemas.microsoft.com/office/drawing/2014/main" id="{E857A248-A3E1-D0D3-1F88-40712A8E3AE4}"/>
+              </a:ext>
+            </a:extLst>
+          </p:cNvPr>
+          <p:cNvCxnSpPr>
+            <a:cxnSpLocks/>
+          </p:cNvCxnSpPr>
+          <p:nvPr/>
+        </p:nvCxnSpPr>
+        <p:spPr>
+          <a:xfrm>
+            <a:off x="898365" y="2372518"/>
+            <a:ext cx="3647440" cy="0"/>
+          </a:xfrm>
+          <a:prstGeom prst="line">
+            <a:avLst/>
+          </a:prstGeom>
+          <a:ln w="76200"/>
+        </p:spPr>
+        <p:style>
+          <a:lnRef idx="2">
+            <a:schemeClr val="accent1"/>
+          </a:lnRef>
+          <a:fillRef idx="0">
+            <a:schemeClr val="accent1"/>
+          </a:fillRef>
+          <a:effectRef idx="1">
+            <a:schemeClr val="accent1"/>
+          </a:effectRef>
+          <a:fontRef idx="minor">
+            <a:schemeClr val="tx1"/>
+          </a:fontRef>
+        </p:style>
+      </p:cxnSp>
+      <p:cxnSp>
+        <p:nvCxnSpPr>
+          <p:cNvPr id="42" name="Straight Connector 41">
+            <a:extLst>
+              <a:ext uri="{FF2B5EF4-FFF2-40B4-BE49-F238E27FC236}">
+                <a16:creationId xmlns:a16="http://schemas.microsoft.com/office/drawing/2014/main" id="{BB6CC617-A283-D2C3-B28F-40F798EF8BF4}"/>
+              </a:ext>
+            </a:extLst>
+          </p:cNvPr>
+          <p:cNvCxnSpPr>
+            <a:cxnSpLocks/>
+          </p:cNvCxnSpPr>
+          <p:nvPr/>
+        </p:nvCxnSpPr>
+        <p:spPr>
+          <a:xfrm>
+            <a:off x="898365" y="2895613"/>
+            <a:ext cx="3647440" cy="0"/>
+          </a:xfrm>
+          <a:prstGeom prst="line">
+            <a:avLst/>
+          </a:prstGeom>
+          <a:ln w="76200"/>
+        </p:spPr>
+        <p:style>
+          <a:lnRef idx="2">
+            <a:schemeClr val="accent6"/>
+          </a:lnRef>
+          <a:fillRef idx="0">
+            <a:schemeClr val="accent6"/>
+          </a:fillRef>
+          <a:effectRef idx="1">
+            <a:schemeClr val="accent6"/>
+          </a:effectRef>
+          <a:fontRef idx="minor">
+            <a:schemeClr val="tx1"/>
+          </a:fontRef>
+        </p:style>
+      </p:cxnSp>
+      <p:sp>
+        <p:nvSpPr>
+          <p:cNvPr id="43" name="TextBox 42">
+            <a:extLst>
+              <a:ext uri="{FF2B5EF4-FFF2-40B4-BE49-F238E27FC236}">
+                <a16:creationId xmlns:a16="http://schemas.microsoft.com/office/drawing/2014/main" id="{56EC2621-1509-7BE2-E862-C2465B3D0FE2}"/>
+              </a:ext>
+            </a:extLst>
+          </p:cNvPr>
+          <p:cNvSpPr txBox="1"/>
+          <p:nvPr/>
+        </p:nvSpPr>
+        <p:spPr>
+          <a:xfrm>
+            <a:off x="4545805" y="2146621"/>
+            <a:ext cx="556231" cy="461665"/>
+          </a:xfrm>
+          <a:prstGeom prst="rect">
+            <a:avLst/>
+          </a:prstGeom>
+          <a:noFill/>
+        </p:spPr>
+        <p:txBody>
+          <a:bodyPr wrap="square" rtlCol="0">
+            <a:spAutoFit/>
+          </a:bodyPr>
+          <a:lstStyle/>
+          <a:p>
+            <a:r>
+              <a:rPr lang="en-GB" sz="2400" b="1" dirty="0">
+                <a:solidFill>
+                  <a:schemeClr val="tx2">
+                    <a:lumMod val="75000"/>
+                    <a:lumOff val="25000"/>
+                  </a:schemeClr>
+                </a:solidFill>
+              </a:rPr>
+              <a:t>3’</a:t>
+            </a:r>
+            <a:endParaRPr lang="en-NL" sz="2400" b="1" dirty="0">
+              <a:solidFill>
+                <a:schemeClr val="tx2">
+                  <a:lumMod val="75000"/>
+                  <a:lumOff val="25000"/>
+                </a:schemeClr>
+              </a:solidFill>
+            </a:endParaRPr>
+          </a:p>
+        </p:txBody>
+      </p:sp>
+      <p:sp>
+        <p:nvSpPr>
+          <p:cNvPr id="44" name="TextBox 43">
+            <a:extLst>
+              <a:ext uri="{FF2B5EF4-FFF2-40B4-BE49-F238E27FC236}">
+                <a16:creationId xmlns:a16="http://schemas.microsoft.com/office/drawing/2014/main" id="{3CBFE0F4-A439-4895-5B90-E8636A88ECDC}"/>
+              </a:ext>
+            </a:extLst>
+          </p:cNvPr>
+          <p:cNvSpPr txBox="1"/>
+          <p:nvPr/>
+        </p:nvSpPr>
+        <p:spPr>
+          <a:xfrm>
+            <a:off x="481169" y="2664781"/>
+            <a:ext cx="556231" cy="461665"/>
+          </a:xfrm>
+          <a:prstGeom prst="rect">
+            <a:avLst/>
+          </a:prstGeom>
+          <a:noFill/>
+        </p:spPr>
+        <p:txBody>
+          <a:bodyPr wrap="square" rtlCol="0">
+            <a:spAutoFit/>
+          </a:bodyPr>
+          <a:lstStyle/>
+          <a:p>
+            <a:r>
+              <a:rPr lang="en-GB" sz="2400" b="1" dirty="0">
+                <a:solidFill>
+                  <a:schemeClr val="accent6">
+                    <a:lumMod val="75000"/>
+                  </a:schemeClr>
+                </a:solidFill>
+              </a:rPr>
+              <a:t>3’</a:t>
+            </a:r>
+            <a:endParaRPr lang="en-NL" sz="2400" b="1" dirty="0">
+              <a:solidFill>
+                <a:schemeClr val="accent6">
+                  <a:lumMod val="75000"/>
+                </a:schemeClr>
+              </a:solidFill>
+            </a:endParaRPr>
+          </a:p>
+        </p:txBody>
+      </p:sp>
+      <p:sp>
+        <p:nvSpPr>
+          <p:cNvPr id="45" name="TextBox 44">
+            <a:extLst>
+              <a:ext uri="{FF2B5EF4-FFF2-40B4-BE49-F238E27FC236}">
+                <a16:creationId xmlns:a16="http://schemas.microsoft.com/office/drawing/2014/main" id="{3B784E65-70E3-C6E6-4DD4-F4E662E854B1}"/>
+              </a:ext>
+            </a:extLst>
+          </p:cNvPr>
+          <p:cNvSpPr txBox="1"/>
+          <p:nvPr/>
+        </p:nvSpPr>
+        <p:spPr>
+          <a:xfrm>
+            <a:off x="481169" y="2146621"/>
+            <a:ext cx="556231" cy="461665"/>
+          </a:xfrm>
+          <a:prstGeom prst="rect">
+            <a:avLst/>
+          </a:prstGeom>
+          <a:noFill/>
+        </p:spPr>
+        <p:txBody>
+          <a:bodyPr wrap="square" rtlCol="0">
+            <a:spAutoFit/>
+          </a:bodyPr>
+          <a:lstStyle/>
+          <a:p>
+            <a:r>
+              <a:rPr lang="en-GB" sz="2400" b="1" dirty="0">
+                <a:solidFill>
+                  <a:schemeClr val="tx2">
+                    <a:lumMod val="75000"/>
+                    <a:lumOff val="25000"/>
+                  </a:schemeClr>
+                </a:solidFill>
+              </a:rPr>
+              <a:t>5’</a:t>
+            </a:r>
+            <a:endParaRPr lang="en-NL" sz="2400" b="1" dirty="0">
+              <a:solidFill>
+                <a:schemeClr val="tx2">
+                  <a:lumMod val="75000"/>
+                  <a:lumOff val="25000"/>
+                </a:schemeClr>
+              </a:solidFill>
+            </a:endParaRPr>
+          </a:p>
+        </p:txBody>
+      </p:sp>
+      <p:sp>
+        <p:nvSpPr>
+          <p:cNvPr id="46" name="TextBox 45">
+            <a:extLst>
+              <a:ext uri="{FF2B5EF4-FFF2-40B4-BE49-F238E27FC236}">
+                <a16:creationId xmlns:a16="http://schemas.microsoft.com/office/drawing/2014/main" id="{62856713-C0AE-F14D-1F1D-5B6AEC0295B0}"/>
+              </a:ext>
+            </a:extLst>
+          </p:cNvPr>
+          <p:cNvSpPr txBox="1"/>
+          <p:nvPr/>
+        </p:nvSpPr>
+        <p:spPr>
+          <a:xfrm>
+            <a:off x="4545804" y="2664781"/>
+            <a:ext cx="556231" cy="461665"/>
+          </a:xfrm>
+          <a:prstGeom prst="rect">
+            <a:avLst/>
+          </a:prstGeom>
+          <a:noFill/>
+        </p:spPr>
+        <p:txBody>
+          <a:bodyPr wrap="square" rtlCol="0">
+            <a:spAutoFit/>
+          </a:bodyPr>
+          <a:lstStyle/>
+          <a:p>
+            <a:r>
+              <a:rPr lang="en-GB" sz="2400" b="1" dirty="0">
+                <a:solidFill>
+                  <a:schemeClr val="accent6">
+                    <a:lumMod val="75000"/>
+                  </a:schemeClr>
+                </a:solidFill>
+              </a:rPr>
+              <a:t>5’</a:t>
+            </a:r>
+            <a:endParaRPr lang="en-NL" sz="2400" b="1" dirty="0">
+              <a:solidFill>
+                <a:schemeClr val="accent6">
+                  <a:lumMod val="75000"/>
+                </a:schemeClr>
+              </a:solidFill>
+            </a:endParaRPr>
+          </a:p>
+        </p:txBody>
+      </p:sp>
+      <p:sp>
+        <p:nvSpPr>
+          <p:cNvPr id="47" name="TextBox 46">
+            <a:extLst>
+              <a:ext uri="{FF2B5EF4-FFF2-40B4-BE49-F238E27FC236}">
+                <a16:creationId xmlns:a16="http://schemas.microsoft.com/office/drawing/2014/main" id="{8B5A1FB4-CF43-E592-0794-71B53042746F}"/>
+              </a:ext>
+            </a:extLst>
+          </p:cNvPr>
+          <p:cNvSpPr txBox="1"/>
+          <p:nvPr/>
+        </p:nvSpPr>
+        <p:spPr>
+          <a:xfrm>
+            <a:off x="5782176" y="1595096"/>
+            <a:ext cx="5828447" cy="923330"/>
+          </a:xfrm>
+          <a:prstGeom prst="rect">
+            <a:avLst/>
+          </a:prstGeom>
+          <a:noFill/>
+        </p:spPr>
+        <p:txBody>
+          <a:bodyPr wrap="square" rtlCol="0">
+            <a:spAutoFit/>
+          </a:bodyPr>
+          <a:lstStyle/>
+          <a:p>
+            <a:r>
+              <a:rPr lang="en-GB" b="1" dirty="0">
+                <a:solidFill>
+                  <a:srgbClr val="002060"/>
+                </a:solidFill>
+              </a:rPr>
+              <a:t>Non-template strand</a:t>
+            </a:r>
+          </a:p>
+          <a:p>
+            <a:r>
+              <a:rPr lang="en-GB" dirty="0">
+                <a:solidFill>
+                  <a:srgbClr val="002060"/>
+                </a:solidFill>
+              </a:rPr>
+              <a:t>Relative to the gene</a:t>
+            </a:r>
+            <a:r>
+              <a:rPr lang="en-GB" b="1" dirty="0">
+                <a:solidFill>
+                  <a:srgbClr val="002060"/>
+                </a:solidFill>
+              </a:rPr>
+              <a:t>: Sense/Coding </a:t>
+            </a:r>
+            <a:r>
+              <a:rPr lang="en-GB" dirty="0">
+                <a:solidFill>
+                  <a:srgbClr val="002060"/>
+                </a:solidFill>
+              </a:rPr>
+              <a:t>strand</a:t>
+            </a:r>
+          </a:p>
+          <a:p>
+            <a:r>
+              <a:rPr lang="en-GB" dirty="0">
+                <a:solidFill>
+                  <a:srgbClr val="002060"/>
+                </a:solidFill>
+              </a:rPr>
+              <a:t>Relative to the genome: </a:t>
+            </a:r>
+            <a:r>
+              <a:rPr lang="en-GB" b="1" dirty="0">
+                <a:solidFill>
+                  <a:srgbClr val="002060"/>
+                </a:solidFill>
+              </a:rPr>
+              <a:t>Positive/(+)/Forward </a:t>
+            </a:r>
+            <a:r>
+              <a:rPr lang="en-GB" dirty="0">
+                <a:solidFill>
+                  <a:srgbClr val="002060"/>
+                </a:solidFill>
+              </a:rPr>
+              <a:t>strand</a:t>
+            </a:r>
+            <a:r>
+              <a:rPr lang="en-GB" b="1" dirty="0">
+                <a:solidFill>
+                  <a:srgbClr val="002060"/>
+                </a:solidFill>
+              </a:rPr>
+              <a:t>*</a:t>
+            </a:r>
+          </a:p>
+        </p:txBody>
+      </p:sp>
+      <p:sp>
+        <p:nvSpPr>
+          <p:cNvPr id="48" name="TextBox 47">
+            <a:extLst>
+              <a:ext uri="{FF2B5EF4-FFF2-40B4-BE49-F238E27FC236}">
+                <a16:creationId xmlns:a16="http://schemas.microsoft.com/office/drawing/2014/main" id="{3DAF0CD5-1906-8F51-BD4B-8047A97C97DC}"/>
+              </a:ext>
+            </a:extLst>
+          </p:cNvPr>
+          <p:cNvSpPr txBox="1"/>
+          <p:nvPr/>
+        </p:nvSpPr>
+        <p:spPr>
+          <a:xfrm>
+            <a:off x="5782177" y="2862146"/>
+            <a:ext cx="5928654" cy="923330"/>
+          </a:xfrm>
+          <a:prstGeom prst="rect">
+            <a:avLst/>
+          </a:prstGeom>
+          <a:noFill/>
+        </p:spPr>
+        <p:txBody>
+          <a:bodyPr wrap="square" rtlCol="0">
+            <a:spAutoFit/>
+          </a:bodyPr>
+          <a:lstStyle/>
+          <a:p>
+            <a:r>
+              <a:rPr lang="en-GB" b="1" dirty="0">
+                <a:solidFill>
+                  <a:schemeClr val="accent6">
+                    <a:lumMod val="50000"/>
+                  </a:schemeClr>
+                </a:solidFill>
+              </a:rPr>
+              <a:t>Template strand </a:t>
+            </a:r>
+            <a:r>
+              <a:rPr lang="en-GB" dirty="0">
+                <a:solidFill>
+                  <a:schemeClr val="accent6">
+                    <a:lumMod val="50000"/>
+                  </a:schemeClr>
+                </a:solidFill>
+              </a:rPr>
+              <a:t>(template that gets transcribed)</a:t>
+            </a:r>
+          </a:p>
+          <a:p>
+            <a:r>
+              <a:rPr lang="en-GB" dirty="0">
+                <a:solidFill>
+                  <a:schemeClr val="accent6">
+                    <a:lumMod val="50000"/>
+                  </a:schemeClr>
+                </a:solidFill>
+              </a:rPr>
+              <a:t>Relative to the gene</a:t>
+            </a:r>
+            <a:r>
+              <a:rPr lang="en-GB" b="1" dirty="0">
+                <a:solidFill>
+                  <a:schemeClr val="accent6">
+                    <a:lumMod val="50000"/>
+                  </a:schemeClr>
+                </a:solidFill>
+              </a:rPr>
+              <a:t>: Antisense/Non-coding </a:t>
+            </a:r>
+            <a:r>
+              <a:rPr lang="en-GB" dirty="0">
+                <a:solidFill>
+                  <a:schemeClr val="accent6">
+                    <a:lumMod val="50000"/>
+                  </a:schemeClr>
+                </a:solidFill>
+              </a:rPr>
+              <a:t>strand</a:t>
+            </a:r>
+          </a:p>
+          <a:p>
+            <a:r>
+              <a:rPr lang="en-GB" dirty="0">
+                <a:solidFill>
+                  <a:schemeClr val="accent6">
+                    <a:lumMod val="50000"/>
+                  </a:schemeClr>
+                </a:solidFill>
+              </a:rPr>
+              <a:t>Relative to the genome: </a:t>
+            </a:r>
+            <a:r>
+              <a:rPr lang="en-GB" b="1" dirty="0">
+                <a:solidFill>
+                  <a:schemeClr val="accent6">
+                    <a:lumMod val="50000"/>
+                  </a:schemeClr>
+                </a:solidFill>
+              </a:rPr>
+              <a:t>Negative/(-)/Reverse </a:t>
+            </a:r>
+            <a:r>
+              <a:rPr lang="en-GB" dirty="0">
+                <a:solidFill>
+                  <a:schemeClr val="accent6">
+                    <a:lumMod val="50000"/>
+                  </a:schemeClr>
+                </a:solidFill>
+              </a:rPr>
+              <a:t>strand*</a:t>
+            </a:r>
+          </a:p>
+        </p:txBody>
+      </p:sp>
+      <p:cxnSp>
+        <p:nvCxnSpPr>
+          <p:cNvPr id="49" name="Straight Arrow Connector 48">
+            <a:extLst>
+              <a:ext uri="{FF2B5EF4-FFF2-40B4-BE49-F238E27FC236}">
+                <a16:creationId xmlns:a16="http://schemas.microsoft.com/office/drawing/2014/main" id="{69E54E2D-81BC-ED3F-707A-132F8C7292AF}"/>
+              </a:ext>
+            </a:extLst>
+          </p:cNvPr>
+          <p:cNvCxnSpPr>
+            <a:cxnSpLocks/>
+          </p:cNvCxnSpPr>
+          <p:nvPr/>
+        </p:nvCxnSpPr>
+        <p:spPr>
+          <a:xfrm>
+            <a:off x="2605245" y="3126445"/>
+            <a:ext cx="0" cy="1080000"/>
+          </a:xfrm>
+          <a:prstGeom prst="straightConnector1">
+            <a:avLst/>
+          </a:prstGeom>
+          <a:ln>
+            <a:tailEnd type="triangle"/>
+          </a:ln>
+        </p:spPr>
+        <p:style>
+          <a:lnRef idx="2">
+            <a:schemeClr val="dk1"/>
+          </a:lnRef>
+          <a:fillRef idx="0">
+            <a:schemeClr val="dk1"/>
+          </a:fillRef>
+          <a:effectRef idx="1">
+            <a:schemeClr val="dk1"/>
+          </a:effectRef>
+          <a:fontRef idx="minor">
+            <a:schemeClr val="tx1"/>
+          </a:fontRef>
+        </p:style>
+      </p:cxnSp>
+      <p:sp>
+        <p:nvSpPr>
+          <p:cNvPr id="50" name="TextBox 49">
+            <a:extLst>
+              <a:ext uri="{FF2B5EF4-FFF2-40B4-BE49-F238E27FC236}">
+                <a16:creationId xmlns:a16="http://schemas.microsoft.com/office/drawing/2014/main" id="{AB5A9BD6-10BF-59BA-13AE-71EADEF867C0}"/>
+              </a:ext>
+            </a:extLst>
+          </p:cNvPr>
+          <p:cNvSpPr txBox="1"/>
+          <p:nvPr/>
+        </p:nvSpPr>
+        <p:spPr>
+          <a:xfrm>
+            <a:off x="2683341" y="3448169"/>
+            <a:ext cx="4281156" cy="369332"/>
+          </a:xfrm>
+          <a:prstGeom prst="rect">
+            <a:avLst/>
+          </a:prstGeom>
+          <a:noFill/>
+        </p:spPr>
+        <p:txBody>
+          <a:bodyPr wrap="square" rtlCol="0">
+            <a:spAutoFit/>
+          </a:bodyPr>
+          <a:lstStyle/>
+          <a:p>
+            <a:r>
+              <a:rPr lang="en-GB" dirty="0"/>
+              <a:t>transcription</a:t>
+            </a:r>
+            <a:endParaRPr lang="en-NL" dirty="0"/>
+          </a:p>
+        </p:txBody>
+      </p:sp>
+      <p:cxnSp>
+        <p:nvCxnSpPr>
+          <p:cNvPr id="51" name="Straight Connector 50">
+            <a:extLst>
+              <a:ext uri="{FF2B5EF4-FFF2-40B4-BE49-F238E27FC236}">
+                <a16:creationId xmlns:a16="http://schemas.microsoft.com/office/drawing/2014/main" id="{88DF5D39-A5AC-2CD7-D09B-F8F91D93E710}"/>
+              </a:ext>
+            </a:extLst>
+          </p:cNvPr>
+          <p:cNvCxnSpPr>
+            <a:cxnSpLocks/>
+          </p:cNvCxnSpPr>
+          <p:nvPr/>
+        </p:nvCxnSpPr>
+        <p:spPr>
+          <a:xfrm>
+            <a:off x="898365" y="4333978"/>
+            <a:ext cx="3647440" cy="0"/>
+          </a:xfrm>
+          <a:prstGeom prst="line">
+            <a:avLst/>
+          </a:prstGeom>
+          <a:ln w="76200">
+            <a:solidFill>
+              <a:srgbClr val="7030A0"/>
+            </a:solidFill>
+          </a:ln>
+        </p:spPr>
+        <p:style>
+          <a:lnRef idx="2">
+            <a:schemeClr val="accent1"/>
+          </a:lnRef>
+          <a:fillRef idx="0">
+            <a:schemeClr val="accent1"/>
+          </a:fillRef>
+          <a:effectRef idx="1">
+            <a:schemeClr val="accent1"/>
+          </a:effectRef>
+          <a:fontRef idx="minor">
+            <a:schemeClr val="tx1"/>
+          </a:fontRef>
+        </p:style>
+      </p:cxnSp>
+      <p:sp>
+        <p:nvSpPr>
+          <p:cNvPr id="52" name="TextBox 51">
+            <a:extLst>
+              <a:ext uri="{FF2B5EF4-FFF2-40B4-BE49-F238E27FC236}">
+                <a16:creationId xmlns:a16="http://schemas.microsoft.com/office/drawing/2014/main" id="{A218484F-7842-C779-1E30-EEB63A7F268E}"/>
+              </a:ext>
+            </a:extLst>
+          </p:cNvPr>
+          <p:cNvSpPr txBox="1"/>
+          <p:nvPr/>
+        </p:nvSpPr>
+        <p:spPr>
+          <a:xfrm>
+            <a:off x="4545805" y="4103146"/>
+            <a:ext cx="556231" cy="461665"/>
+          </a:xfrm>
+          <a:prstGeom prst="rect">
+            <a:avLst/>
+          </a:prstGeom>
+          <a:noFill/>
+        </p:spPr>
+        <p:txBody>
+          <a:bodyPr wrap="square" rtlCol="0">
+            <a:spAutoFit/>
+          </a:bodyPr>
+          <a:lstStyle/>
+          <a:p>
+            <a:r>
+              <a:rPr lang="en-GB" sz="2400" b="1" dirty="0">
+                <a:solidFill>
+                  <a:schemeClr val="accent5"/>
+                </a:solidFill>
+              </a:rPr>
+              <a:t>3’</a:t>
+            </a:r>
+            <a:endParaRPr lang="en-NL" sz="2400" b="1" dirty="0">
+              <a:solidFill>
+                <a:schemeClr val="accent5"/>
+              </a:solidFill>
+            </a:endParaRPr>
+          </a:p>
+        </p:txBody>
+      </p:sp>
+      <p:sp>
+        <p:nvSpPr>
+          <p:cNvPr id="53" name="TextBox 52">
+            <a:extLst>
+              <a:ext uri="{FF2B5EF4-FFF2-40B4-BE49-F238E27FC236}">
+                <a16:creationId xmlns:a16="http://schemas.microsoft.com/office/drawing/2014/main" id="{3D6D1745-C9A9-7267-462E-59D04F8DDADA}"/>
+              </a:ext>
+            </a:extLst>
+          </p:cNvPr>
+          <p:cNvSpPr txBox="1"/>
+          <p:nvPr/>
+        </p:nvSpPr>
+        <p:spPr>
+          <a:xfrm>
+            <a:off x="481169" y="4103146"/>
+            <a:ext cx="556231" cy="461665"/>
+          </a:xfrm>
+          <a:prstGeom prst="rect">
+            <a:avLst/>
+          </a:prstGeom>
+          <a:noFill/>
+        </p:spPr>
+        <p:txBody>
+          <a:bodyPr wrap="square" rtlCol="0">
+            <a:spAutoFit/>
+          </a:bodyPr>
+          <a:lstStyle/>
+          <a:p>
+            <a:r>
+              <a:rPr lang="en-GB" sz="2400" b="1" dirty="0">
+                <a:solidFill>
+                  <a:schemeClr val="accent5"/>
+                </a:solidFill>
+              </a:rPr>
+              <a:t>5’</a:t>
+            </a:r>
+            <a:endParaRPr lang="en-NL" sz="2400" b="1" dirty="0">
+              <a:solidFill>
+                <a:schemeClr val="accent5"/>
+              </a:solidFill>
+            </a:endParaRPr>
+          </a:p>
+        </p:txBody>
+      </p:sp>
+      <p:sp>
+        <p:nvSpPr>
+          <p:cNvPr id="54" name="TextBox 53">
+            <a:extLst>
+              <a:ext uri="{FF2B5EF4-FFF2-40B4-BE49-F238E27FC236}">
+                <a16:creationId xmlns:a16="http://schemas.microsoft.com/office/drawing/2014/main" id="{65C2769E-E765-1B4D-23BD-0A465C48A4CC}"/>
+              </a:ext>
+            </a:extLst>
+          </p:cNvPr>
+          <p:cNvSpPr txBox="1"/>
+          <p:nvPr/>
+        </p:nvSpPr>
+        <p:spPr>
+          <a:xfrm>
+            <a:off x="5782177" y="4149312"/>
+            <a:ext cx="4281156" cy="369332"/>
+          </a:xfrm>
+          <a:prstGeom prst="rect">
+            <a:avLst/>
+          </a:prstGeom>
+          <a:noFill/>
+        </p:spPr>
+        <p:txBody>
+          <a:bodyPr wrap="square" rtlCol="0">
+            <a:spAutoFit/>
+          </a:bodyPr>
+          <a:lstStyle/>
+          <a:p>
+            <a:r>
+              <a:rPr lang="en-GB" dirty="0">
+                <a:solidFill>
+                  <a:schemeClr val="accent5"/>
+                </a:solidFill>
+              </a:rPr>
+              <a:t>mRNA (copy of the non-template strand)</a:t>
+            </a:r>
+            <a:endParaRPr lang="en-NL" dirty="0">
+              <a:solidFill>
+                <a:schemeClr val="accent5"/>
+              </a:solidFill>
+            </a:endParaRPr>
+          </a:p>
+        </p:txBody>
+      </p:sp>
+      <p:cxnSp>
+        <p:nvCxnSpPr>
+          <p:cNvPr id="55" name="Straight Connector 54">
+            <a:extLst>
+              <a:ext uri="{FF2B5EF4-FFF2-40B4-BE49-F238E27FC236}">
+                <a16:creationId xmlns:a16="http://schemas.microsoft.com/office/drawing/2014/main" id="{782E6291-E3EF-CB52-D818-09E8C19FE2D9}"/>
+              </a:ext>
+            </a:extLst>
+          </p:cNvPr>
+          <p:cNvCxnSpPr/>
+          <p:nvPr/>
+        </p:nvCxnSpPr>
+        <p:spPr>
+          <a:xfrm>
+            <a:off x="898365" y="5717498"/>
+            <a:ext cx="3647440" cy="0"/>
+          </a:xfrm>
+          <a:prstGeom prst="line">
+            <a:avLst/>
+          </a:prstGeom>
+          <a:ln w="76200">
+            <a:solidFill>
+              <a:schemeClr val="accent6">
+                <a:lumMod val="40000"/>
+                <a:lumOff val="60000"/>
+              </a:schemeClr>
+            </a:solidFill>
+          </a:ln>
+        </p:spPr>
+        <p:style>
+          <a:lnRef idx="2">
+            <a:schemeClr val="accent1"/>
+          </a:lnRef>
+          <a:fillRef idx="0">
+            <a:schemeClr val="accent1"/>
+          </a:fillRef>
+          <a:effectRef idx="1">
+            <a:schemeClr val="accent1"/>
+          </a:effectRef>
+          <a:fontRef idx="minor">
+            <a:schemeClr val="tx1"/>
+          </a:fontRef>
+        </p:style>
+      </p:cxnSp>
+      <p:sp>
+        <p:nvSpPr>
+          <p:cNvPr id="56" name="TextBox 55">
+            <a:extLst>
+              <a:ext uri="{FF2B5EF4-FFF2-40B4-BE49-F238E27FC236}">
+                <a16:creationId xmlns:a16="http://schemas.microsoft.com/office/drawing/2014/main" id="{4771C872-8362-0799-FA90-2285256D35A4}"/>
+              </a:ext>
+            </a:extLst>
+          </p:cNvPr>
+          <p:cNvSpPr txBox="1"/>
+          <p:nvPr/>
+        </p:nvSpPr>
+        <p:spPr>
+          <a:xfrm>
+            <a:off x="4545805" y="5486665"/>
+            <a:ext cx="556231" cy="461665"/>
+          </a:xfrm>
+          <a:prstGeom prst="rect">
+            <a:avLst/>
+          </a:prstGeom>
+          <a:noFill/>
+        </p:spPr>
+        <p:txBody>
+          <a:bodyPr wrap="square" rtlCol="0">
+            <a:spAutoFit/>
+          </a:bodyPr>
+          <a:lstStyle/>
+          <a:p>
+            <a:r>
+              <a:rPr lang="en-GB" sz="2400" b="1" dirty="0">
+                <a:solidFill>
+                  <a:schemeClr val="accent6">
+                    <a:lumMod val="60000"/>
+                    <a:lumOff val="40000"/>
+                  </a:schemeClr>
+                </a:solidFill>
+              </a:rPr>
+              <a:t>5’</a:t>
+            </a:r>
+            <a:endParaRPr lang="en-NL" sz="2400" b="1" dirty="0">
+              <a:solidFill>
+                <a:schemeClr val="accent6">
+                  <a:lumMod val="60000"/>
+                  <a:lumOff val="40000"/>
+                </a:schemeClr>
+              </a:solidFill>
+            </a:endParaRPr>
+          </a:p>
+        </p:txBody>
+      </p:sp>
+      <p:sp>
+        <p:nvSpPr>
+          <p:cNvPr id="57" name="TextBox 56">
+            <a:extLst>
+              <a:ext uri="{FF2B5EF4-FFF2-40B4-BE49-F238E27FC236}">
+                <a16:creationId xmlns:a16="http://schemas.microsoft.com/office/drawing/2014/main" id="{A04D9F67-16B2-2077-92C8-EED421CCDE51}"/>
+              </a:ext>
+            </a:extLst>
+          </p:cNvPr>
+          <p:cNvSpPr txBox="1"/>
+          <p:nvPr/>
+        </p:nvSpPr>
+        <p:spPr>
+          <a:xfrm>
+            <a:off x="481169" y="5486665"/>
+            <a:ext cx="556231" cy="461665"/>
+          </a:xfrm>
+          <a:prstGeom prst="rect">
+            <a:avLst/>
+          </a:prstGeom>
+          <a:noFill/>
+          <a:ln>
+            <a:noFill/>
+          </a:ln>
+        </p:spPr>
+        <p:txBody>
+          <a:bodyPr wrap="square" rtlCol="0">
+            <a:spAutoFit/>
+          </a:bodyPr>
+          <a:lstStyle/>
+          <a:p>
+            <a:r>
+              <a:rPr lang="en-GB" sz="2400" b="1" dirty="0">
+                <a:solidFill>
+                  <a:schemeClr val="accent6">
+                    <a:lumMod val="60000"/>
+                    <a:lumOff val="40000"/>
+                  </a:schemeClr>
+                </a:solidFill>
+              </a:rPr>
+              <a:t>3’</a:t>
+            </a:r>
+            <a:endParaRPr lang="en-NL" sz="2400" b="1" dirty="0">
+              <a:solidFill>
+                <a:schemeClr val="accent6">
+                  <a:lumMod val="60000"/>
+                  <a:lumOff val="40000"/>
+                </a:schemeClr>
+              </a:solidFill>
+            </a:endParaRPr>
+          </a:p>
+        </p:txBody>
+      </p:sp>
+      <p:cxnSp>
+        <p:nvCxnSpPr>
+          <p:cNvPr id="58" name="Straight Connector 57">
+            <a:extLst>
+              <a:ext uri="{FF2B5EF4-FFF2-40B4-BE49-F238E27FC236}">
+                <a16:creationId xmlns:a16="http://schemas.microsoft.com/office/drawing/2014/main" id="{1BCDC969-2284-562C-059C-FECC7F98926D}"/>
+              </a:ext>
+            </a:extLst>
+          </p:cNvPr>
+          <p:cNvCxnSpPr/>
+          <p:nvPr/>
+        </p:nvCxnSpPr>
+        <p:spPr>
+          <a:xfrm>
+            <a:off x="898364" y="6243807"/>
+            <a:ext cx="3647440" cy="0"/>
+          </a:xfrm>
+          <a:prstGeom prst="line">
+            <a:avLst/>
+          </a:prstGeom>
+          <a:ln w="76200">
+            <a:solidFill>
+              <a:schemeClr val="tx2">
+                <a:lumMod val="25000"/>
+                <a:lumOff val="75000"/>
+              </a:schemeClr>
+            </a:solidFill>
+          </a:ln>
+        </p:spPr>
+        <p:style>
+          <a:lnRef idx="2">
+            <a:schemeClr val="accent1"/>
+          </a:lnRef>
+          <a:fillRef idx="0">
+            <a:schemeClr val="accent1"/>
+          </a:fillRef>
+          <a:effectRef idx="1">
+            <a:schemeClr val="accent1"/>
+          </a:effectRef>
+          <a:fontRef idx="minor">
+            <a:schemeClr val="tx1"/>
+          </a:fontRef>
+        </p:style>
+      </p:cxnSp>
+      <p:sp>
+        <p:nvSpPr>
+          <p:cNvPr id="59" name="TextBox 58">
+            <a:extLst>
+              <a:ext uri="{FF2B5EF4-FFF2-40B4-BE49-F238E27FC236}">
+                <a16:creationId xmlns:a16="http://schemas.microsoft.com/office/drawing/2014/main" id="{7E51C19A-C13A-A336-D9DC-1D74F7FC9CD9}"/>
+              </a:ext>
+            </a:extLst>
+          </p:cNvPr>
+          <p:cNvSpPr txBox="1"/>
+          <p:nvPr/>
+        </p:nvSpPr>
+        <p:spPr>
+          <a:xfrm>
+            <a:off x="4545804" y="6012974"/>
+            <a:ext cx="556231" cy="461665"/>
+          </a:xfrm>
+          <a:prstGeom prst="rect">
+            <a:avLst/>
+          </a:prstGeom>
+          <a:noFill/>
+        </p:spPr>
+        <p:txBody>
+          <a:bodyPr wrap="square" rtlCol="0">
+            <a:spAutoFit/>
+          </a:bodyPr>
+          <a:lstStyle/>
+          <a:p>
+            <a:r>
+              <a:rPr lang="en-GB" sz="2400" b="1" dirty="0">
+                <a:solidFill>
+                  <a:schemeClr val="tx2">
+                    <a:lumMod val="50000"/>
+                    <a:lumOff val="50000"/>
+                  </a:schemeClr>
+                </a:solidFill>
+              </a:rPr>
+              <a:t>3’</a:t>
+            </a:r>
+            <a:endParaRPr lang="en-NL" sz="2400" b="1" dirty="0">
+              <a:solidFill>
+                <a:schemeClr val="tx2">
+                  <a:lumMod val="50000"/>
+                  <a:lumOff val="50000"/>
+                </a:schemeClr>
+              </a:solidFill>
+            </a:endParaRPr>
+          </a:p>
+        </p:txBody>
+      </p:sp>
+      <p:sp>
+        <p:nvSpPr>
+          <p:cNvPr id="60" name="TextBox 59">
+            <a:extLst>
+              <a:ext uri="{FF2B5EF4-FFF2-40B4-BE49-F238E27FC236}">
+                <a16:creationId xmlns:a16="http://schemas.microsoft.com/office/drawing/2014/main" id="{9326552A-86D1-2240-8C99-EE0CAB950B12}"/>
+              </a:ext>
+            </a:extLst>
+          </p:cNvPr>
+          <p:cNvSpPr txBox="1"/>
+          <p:nvPr/>
+        </p:nvSpPr>
+        <p:spPr>
+          <a:xfrm>
+            <a:off x="481168" y="6012974"/>
+            <a:ext cx="556231" cy="461665"/>
+          </a:xfrm>
+          <a:prstGeom prst="rect">
+            <a:avLst/>
+          </a:prstGeom>
+          <a:noFill/>
+        </p:spPr>
+        <p:txBody>
+          <a:bodyPr wrap="square" rtlCol="0">
+            <a:spAutoFit/>
+          </a:bodyPr>
+          <a:lstStyle/>
+          <a:p>
+            <a:r>
+              <a:rPr lang="en-GB" sz="2400" b="1" dirty="0">
+                <a:solidFill>
+                  <a:schemeClr val="tx2">
+                    <a:lumMod val="50000"/>
+                    <a:lumOff val="50000"/>
+                  </a:schemeClr>
+                </a:solidFill>
+              </a:rPr>
+              <a:t>5’</a:t>
+            </a:r>
+            <a:endParaRPr lang="en-NL" sz="2400" b="1" dirty="0">
+              <a:solidFill>
+                <a:schemeClr val="tx2">
+                  <a:lumMod val="50000"/>
+                  <a:lumOff val="50000"/>
+                </a:schemeClr>
+              </a:solidFill>
+            </a:endParaRPr>
+          </a:p>
+        </p:txBody>
+      </p:sp>
+      <p:sp>
+        <p:nvSpPr>
+          <p:cNvPr id="61" name="TextBox 60">
+            <a:extLst>
+              <a:ext uri="{FF2B5EF4-FFF2-40B4-BE49-F238E27FC236}">
+                <a16:creationId xmlns:a16="http://schemas.microsoft.com/office/drawing/2014/main" id="{EADC69EF-F346-06ED-AF73-614644892CD7}"/>
+              </a:ext>
+            </a:extLst>
+          </p:cNvPr>
+          <p:cNvSpPr txBox="1"/>
+          <p:nvPr/>
+        </p:nvSpPr>
+        <p:spPr>
+          <a:xfrm>
+            <a:off x="5782177" y="5524782"/>
+            <a:ext cx="4281156" cy="369332"/>
+          </a:xfrm>
+          <a:prstGeom prst="rect">
+            <a:avLst/>
+          </a:prstGeom>
+          <a:noFill/>
+        </p:spPr>
+        <p:txBody>
+          <a:bodyPr wrap="square" rtlCol="0">
+            <a:spAutoFit/>
+          </a:bodyPr>
+          <a:lstStyle/>
+          <a:p>
+            <a:r>
+              <a:rPr lang="en-GB" dirty="0">
+                <a:solidFill>
+                  <a:schemeClr val="accent6">
+                    <a:lumMod val="60000"/>
+                    <a:lumOff val="40000"/>
+                  </a:schemeClr>
+                </a:solidFill>
+              </a:rPr>
+              <a:t>First-strand cDNA</a:t>
+            </a:r>
+            <a:endParaRPr lang="en-NL" dirty="0">
+              <a:solidFill>
+                <a:schemeClr val="accent6">
+                  <a:lumMod val="60000"/>
+                  <a:lumOff val="40000"/>
+                </a:schemeClr>
+              </a:solidFill>
+            </a:endParaRPr>
+          </a:p>
+        </p:txBody>
+      </p:sp>
+      <p:sp>
+        <p:nvSpPr>
+          <p:cNvPr id="62" name="TextBox 61">
+            <a:extLst>
+              <a:ext uri="{FF2B5EF4-FFF2-40B4-BE49-F238E27FC236}">
+                <a16:creationId xmlns:a16="http://schemas.microsoft.com/office/drawing/2014/main" id="{DAA2E13D-1083-B20E-3263-BBA7D7EAB9EA}"/>
+              </a:ext>
+            </a:extLst>
+          </p:cNvPr>
+          <p:cNvSpPr txBox="1"/>
+          <p:nvPr/>
+        </p:nvSpPr>
+        <p:spPr>
+          <a:xfrm>
+            <a:off x="5782177" y="6012974"/>
+            <a:ext cx="4281156" cy="369332"/>
+          </a:xfrm>
+          <a:prstGeom prst="rect">
+            <a:avLst/>
+          </a:prstGeom>
+          <a:noFill/>
+        </p:spPr>
+        <p:txBody>
+          <a:bodyPr wrap="square" rtlCol="0">
+            <a:spAutoFit/>
+          </a:bodyPr>
+          <a:lstStyle/>
+          <a:p>
+            <a:r>
+              <a:rPr lang="en-GB" dirty="0">
+                <a:solidFill>
+                  <a:schemeClr val="tx2">
+                    <a:lumMod val="50000"/>
+                    <a:lumOff val="50000"/>
+                  </a:schemeClr>
+                </a:solidFill>
+              </a:rPr>
+              <a:t>Second-strand cDNA</a:t>
+            </a:r>
+            <a:endParaRPr lang="en-NL" dirty="0">
+              <a:solidFill>
+                <a:schemeClr val="tx2">
+                  <a:lumMod val="50000"/>
+                  <a:lumOff val="50000"/>
+                </a:schemeClr>
+              </a:solidFill>
+            </a:endParaRPr>
+          </a:p>
+        </p:txBody>
+      </p:sp>
+      <p:cxnSp>
+        <p:nvCxnSpPr>
+          <p:cNvPr id="63" name="Straight Arrow Connector 62">
+            <a:extLst>
+              <a:ext uri="{FF2B5EF4-FFF2-40B4-BE49-F238E27FC236}">
+                <a16:creationId xmlns:a16="http://schemas.microsoft.com/office/drawing/2014/main" id="{40A66F33-C001-3E0F-9E83-003D2FDC8170}"/>
+              </a:ext>
+            </a:extLst>
+          </p:cNvPr>
+          <p:cNvCxnSpPr>
+            <a:cxnSpLocks/>
+          </p:cNvCxnSpPr>
+          <p:nvPr/>
+        </p:nvCxnSpPr>
+        <p:spPr>
+          <a:xfrm>
+            <a:off x="2605245" y="4481083"/>
+            <a:ext cx="0" cy="1080000"/>
+          </a:xfrm>
+          <a:prstGeom prst="straightConnector1">
+            <a:avLst/>
+          </a:prstGeom>
+          <a:ln>
+            <a:tailEnd type="triangle"/>
+          </a:ln>
+        </p:spPr>
+        <p:style>
+          <a:lnRef idx="2">
+            <a:schemeClr val="dk1"/>
+          </a:lnRef>
+          <a:fillRef idx="0">
+            <a:schemeClr val="dk1"/>
+          </a:fillRef>
+          <a:effectRef idx="1">
+            <a:schemeClr val="dk1"/>
+          </a:effectRef>
+          <a:fontRef idx="minor">
+            <a:schemeClr val="tx1"/>
+          </a:fontRef>
+        </p:style>
+      </p:cxnSp>
+      <p:sp>
+        <p:nvSpPr>
+          <p:cNvPr id="64" name="TextBox 63">
+            <a:extLst>
+              <a:ext uri="{FF2B5EF4-FFF2-40B4-BE49-F238E27FC236}">
+                <a16:creationId xmlns:a16="http://schemas.microsoft.com/office/drawing/2014/main" id="{93025214-1C47-D5C0-4C7D-509478CAC6A6}"/>
+              </a:ext>
+            </a:extLst>
+          </p:cNvPr>
+          <p:cNvSpPr txBox="1"/>
+          <p:nvPr/>
+        </p:nvSpPr>
+        <p:spPr>
+          <a:xfrm>
+            <a:off x="2683341" y="4802807"/>
+            <a:ext cx="4281156" cy="369332"/>
+          </a:xfrm>
+          <a:prstGeom prst="rect">
+            <a:avLst/>
+          </a:prstGeom>
+          <a:noFill/>
+        </p:spPr>
+        <p:txBody>
+          <a:bodyPr wrap="square" rtlCol="0">
+            <a:spAutoFit/>
+          </a:bodyPr>
+          <a:lstStyle/>
+          <a:p>
+            <a:r>
+              <a:rPr lang="en-GB" dirty="0"/>
+              <a:t>Reverse transcription</a:t>
+            </a:r>
+            <a:endParaRPr lang="en-NL" dirty="0"/>
+          </a:p>
+        </p:txBody>
+      </p:sp>
+      <p:cxnSp>
+        <p:nvCxnSpPr>
+          <p:cNvPr id="65" name="Straight Arrow Connector 64">
+            <a:extLst>
+              <a:ext uri="{FF2B5EF4-FFF2-40B4-BE49-F238E27FC236}">
+                <a16:creationId xmlns:a16="http://schemas.microsoft.com/office/drawing/2014/main" id="{042AF189-922A-E2BB-78C8-097FBED06097}"/>
+              </a:ext>
+            </a:extLst>
+          </p:cNvPr>
+          <p:cNvCxnSpPr>
+            <a:cxnSpLocks/>
+          </p:cNvCxnSpPr>
+          <p:nvPr/>
+        </p:nvCxnSpPr>
+        <p:spPr>
+          <a:xfrm>
+            <a:off x="2605245" y="5894114"/>
+            <a:ext cx="0" cy="262424"/>
+          </a:xfrm>
+          <a:prstGeom prst="straightConnector1">
+            <a:avLst/>
+          </a:prstGeom>
+          <a:ln>
+            <a:tailEnd type="triangle"/>
+          </a:ln>
+        </p:spPr>
+        <p:style>
+          <a:lnRef idx="2">
+            <a:schemeClr val="dk1"/>
+          </a:lnRef>
+          <a:fillRef idx="0">
+            <a:schemeClr val="dk1"/>
+          </a:fillRef>
+          <a:effectRef idx="1">
+            <a:schemeClr val="dk1"/>
+          </a:effectRef>
+          <a:fontRef idx="minor">
+            <a:schemeClr val="tx1"/>
+          </a:fontRef>
+        </p:style>
+      </p:cxnSp>
+      <p:sp>
+        <p:nvSpPr>
+          <p:cNvPr id="66" name="TextBox 65">
+            <a:extLst>
+              <a:ext uri="{FF2B5EF4-FFF2-40B4-BE49-F238E27FC236}">
+                <a16:creationId xmlns:a16="http://schemas.microsoft.com/office/drawing/2014/main" id="{E2D2E61B-247C-39B3-B54D-75AC30D28415}"/>
+              </a:ext>
+            </a:extLst>
+          </p:cNvPr>
+          <p:cNvSpPr txBox="1"/>
+          <p:nvPr/>
+        </p:nvSpPr>
+        <p:spPr>
+          <a:xfrm>
+            <a:off x="2605244" y="5857835"/>
+            <a:ext cx="4281156" cy="276999"/>
+          </a:xfrm>
+          <a:prstGeom prst="rect">
+            <a:avLst/>
+          </a:prstGeom>
+          <a:noFill/>
+        </p:spPr>
+        <p:txBody>
+          <a:bodyPr wrap="square" rtlCol="0">
+            <a:spAutoFit/>
+          </a:bodyPr>
+          <a:lstStyle/>
+          <a:p>
+            <a:r>
+              <a:rPr lang="en-GB" sz="1200" dirty="0"/>
+              <a:t>Second-strand synthesis</a:t>
+            </a:r>
+            <a:endParaRPr lang="en-NL" sz="1200" dirty="0"/>
+          </a:p>
+        </p:txBody>
+      </p:sp>
+    </p:spTree>
+    <p:extLst>
+      <p:ext uri="{BB962C8B-B14F-4D97-AF65-F5344CB8AC3E}">
+        <p14:creationId xmlns:p14="http://schemas.microsoft.com/office/powerpoint/2010/main" val="2013311443"/>
+      </p:ext>
+    </p:extLst>
+  </p:cSld>
+  <p:clrMapOvr>
+    <a:masterClrMapping/>
+  </p:clrMapOvr>
+</p:sld>
+</file>
+
+<file path=ppt/slides/slide2.xml><?xml version="1.0" encoding="utf-8"?>
+<p:sld xmlns:a="http://schemas.openxmlformats.org/drawingml/2006/main" xmlns:r="http://schemas.openxmlformats.org/officeDocument/2006/relationships" xmlns:p="http://schemas.openxmlformats.org/presentationml/2006/main">
+  <p:cSld>
+    <p:spTree>
+      <p:nvGrpSpPr>
+        <p:cNvPr id="1" name="">
+          <a:extLst>
+            <a:ext uri="{FF2B5EF4-FFF2-40B4-BE49-F238E27FC236}">
+              <a16:creationId xmlns:a16="http://schemas.microsoft.com/office/drawing/2014/main" id="{7BA8350A-4A0E-54E2-A260-0DAC627F5AF3}"/>
+            </a:ext>
+          </a:extLst>
+        </p:cNvPr>
+        <p:cNvGrpSpPr/>
+        <p:nvPr/>
+      </p:nvGrpSpPr>
+      <p:grpSpPr>
+        <a:xfrm>
+          <a:off x="0" y="0"/>
+          <a:ext cx="0" cy="0"/>
+          <a:chOff x="0" y="0"/>
+          <a:chExt cx="0" cy="0"/>
+        </a:xfrm>
+      </p:grpSpPr>
+      <p:sp>
+        <p:nvSpPr>
+          <p:cNvPr id="4" name="TextBox 3">
+            <a:extLst>
+              <a:ext uri="{FF2B5EF4-FFF2-40B4-BE49-F238E27FC236}">
+                <a16:creationId xmlns:a16="http://schemas.microsoft.com/office/drawing/2014/main" id="{791A771A-2458-A292-892B-F8D049F18092}"/>
+              </a:ext>
+            </a:extLst>
+          </p:cNvPr>
+          <p:cNvSpPr txBox="1"/>
+          <p:nvPr/>
+        </p:nvSpPr>
+        <p:spPr>
+          <a:xfrm>
+            <a:off x="297647" y="939454"/>
+            <a:ext cx="12409640" cy="430887"/>
+          </a:xfrm>
+          <a:prstGeom prst="rect">
+            <a:avLst/>
+          </a:prstGeom>
+          <a:noFill/>
+        </p:spPr>
+        <p:txBody>
+          <a:bodyPr wrap="square" rtlCol="0">
+            <a:spAutoFit/>
+          </a:bodyPr>
+          <a:lstStyle/>
+          <a:p>
+            <a:r>
+              <a:rPr lang="en-GB" sz="2200" dirty="0"/>
+              <a:t>More terminology (that helps us to choose the right parameters for Trinity):</a:t>
+            </a:r>
+          </a:p>
+        </p:txBody>
+      </p:sp>
       <p:grpSp>
         <p:nvGrpSpPr>
-          <p:cNvPr id="3" name="Group 2">
-            <a:extLst>
-              <a:ext uri="{FF2B5EF4-FFF2-40B4-BE49-F238E27FC236}">
-                <a16:creationId xmlns:a16="http://schemas.microsoft.com/office/drawing/2014/main" id="{030C76F0-99ED-EE56-4D25-A9817F8CF7C1}"/>
+          <p:cNvPr id="2" name="Group 1">
+            <a:extLst>
+              <a:ext uri="{FF2B5EF4-FFF2-40B4-BE49-F238E27FC236}">
+                <a16:creationId xmlns:a16="http://schemas.microsoft.com/office/drawing/2014/main" id="{B6B32DC2-CAEB-3906-A75E-5A52ACF5ED92}"/>
               </a:ext>
             </a:extLst>
           </p:cNvPr>
@@ -3558,18 +6741,18 @@
         </p:nvGrpSpPr>
         <p:grpSpPr>
           <a:xfrm>
-            <a:off x="446680" y="886653"/>
-            <a:ext cx="7656787" cy="4234029"/>
-            <a:chOff x="446680" y="886653"/>
-            <a:chExt cx="7656787" cy="4234029"/>
+            <a:off x="15240" y="1565921"/>
+            <a:ext cx="7247351" cy="4234029"/>
+            <a:chOff x="15240" y="1565921"/>
+            <a:chExt cx="7247351" cy="4234029"/>
           </a:xfrm>
         </p:grpSpPr>
         <p:sp>
           <p:nvSpPr>
-            <p:cNvPr id="4" name="Arrow: Pentagon 3">
+            <p:cNvPr id="43" name="Arrow: Pentagon 42">
               <a:extLst>
                 <a:ext uri="{FF2B5EF4-FFF2-40B4-BE49-F238E27FC236}">
-                  <a16:creationId xmlns:a16="http://schemas.microsoft.com/office/drawing/2014/main" id="{D045D440-78C1-4C0D-5F4F-BC42E79077A2}"/>
+                  <a16:creationId xmlns:a16="http://schemas.microsoft.com/office/drawing/2014/main" id="{FBA55C95-7E0D-ABF6-BB90-86E46CD9934E}"/>
                 </a:ext>
               </a:extLst>
             </p:cNvPr>
@@ -3578,16 +6761,14 @@
           </p:nvSpPr>
           <p:spPr>
             <a:xfrm>
-              <a:off x="756736" y="1429407"/>
+              <a:off x="325296" y="2108675"/>
               <a:ext cx="4088524" cy="173421"/>
             </a:xfrm>
             <a:prstGeom prst="homePlate">
               <a:avLst/>
             </a:prstGeom>
             <a:solidFill>
-              <a:schemeClr val="bg1">
-                <a:lumMod val="95000"/>
-              </a:schemeClr>
+              <a:srgbClr val="7030A0"/>
             </a:solidFill>
             <a:ln>
               <a:solidFill>
@@ -3622,10 +6803,10 @@
         </p:sp>
         <p:cxnSp>
           <p:nvCxnSpPr>
-            <p:cNvPr id="6" name="Straight Arrow Connector 5">
+            <p:cNvPr id="44" name="Straight Arrow Connector 43">
               <a:extLst>
                 <a:ext uri="{FF2B5EF4-FFF2-40B4-BE49-F238E27FC236}">
-                  <a16:creationId xmlns:a16="http://schemas.microsoft.com/office/drawing/2014/main" id="{0F5C4C31-F284-19DA-ED6C-74F7A68D1C2B}"/>
+                  <a16:creationId xmlns:a16="http://schemas.microsoft.com/office/drawing/2014/main" id="{A62B0C6C-4017-75FC-8078-F03EE4B41397}"/>
                 </a:ext>
               </a:extLst>
             </p:cNvPr>
@@ -3634,7 +6815,7 @@
           </p:nvCxnSpPr>
           <p:spPr>
             <a:xfrm>
-              <a:off x="614846" y="1229710"/>
+              <a:off x="183406" y="1908978"/>
               <a:ext cx="4377559" cy="0"/>
             </a:xfrm>
             <a:prstGeom prst="straightConnector1">
@@ -3661,10 +6842,10 @@
         </p:cxnSp>
         <p:sp>
           <p:nvSpPr>
-            <p:cNvPr id="7" name="TextBox 6">
+            <p:cNvPr id="45" name="TextBox 44">
               <a:extLst>
                 <a:ext uri="{FF2B5EF4-FFF2-40B4-BE49-F238E27FC236}">
-                  <a16:creationId xmlns:a16="http://schemas.microsoft.com/office/drawing/2014/main" id="{2B05F203-F766-9E72-9F9B-EFF0720AE500}"/>
+                  <a16:creationId xmlns:a16="http://schemas.microsoft.com/office/drawing/2014/main" id="{4286253E-1698-B2DB-4C01-8088F6B50C21}"/>
                 </a:ext>
               </a:extLst>
             </p:cNvPr>
@@ -3673,7 +6854,7 @@
           </p:nvSpPr>
           <p:spPr>
             <a:xfrm>
-              <a:off x="4924088" y="886653"/>
+              <a:off x="4492648" y="1565921"/>
               <a:ext cx="914400" cy="369332"/>
             </a:xfrm>
             <a:prstGeom prst="rect">
@@ -3697,10 +6878,10 @@
         </p:sp>
         <p:sp>
           <p:nvSpPr>
-            <p:cNvPr id="8" name="TextBox 7">
+            <p:cNvPr id="46" name="TextBox 45">
               <a:extLst>
                 <a:ext uri="{FF2B5EF4-FFF2-40B4-BE49-F238E27FC236}">
-                  <a16:creationId xmlns:a16="http://schemas.microsoft.com/office/drawing/2014/main" id="{F1A1917C-FF36-898A-402E-85CB4E7CC561}"/>
+                  <a16:creationId xmlns:a16="http://schemas.microsoft.com/office/drawing/2014/main" id="{1BB9F8F0-57DB-0789-FD70-19ED6E6CDF5A}"/>
                 </a:ext>
               </a:extLst>
             </p:cNvPr>
@@ -3709,7 +6890,7 @@
           </p:nvSpPr>
           <p:spPr>
             <a:xfrm>
-              <a:off x="446680" y="886653"/>
+              <a:off x="15240" y="1565921"/>
               <a:ext cx="914400" cy="369332"/>
             </a:xfrm>
             <a:prstGeom prst="rect">
@@ -3733,10 +6914,10 @@
         </p:sp>
         <p:sp>
           <p:nvSpPr>
-            <p:cNvPr id="9" name="TextBox 8">
+            <p:cNvPr id="47" name="TextBox 46">
               <a:extLst>
                 <a:ext uri="{FF2B5EF4-FFF2-40B4-BE49-F238E27FC236}">
-                  <a16:creationId xmlns:a16="http://schemas.microsoft.com/office/drawing/2014/main" id="{DE512159-F005-980F-D3D3-BA6844052EB0}"/>
+                  <a16:creationId xmlns:a16="http://schemas.microsoft.com/office/drawing/2014/main" id="{A946DD81-5022-CE51-AC84-DACD9A62DA47}"/>
                 </a:ext>
               </a:extLst>
             </p:cNvPr>
@@ -3745,8 +6926,8 @@
           </p:nvSpPr>
           <p:spPr>
             <a:xfrm>
-              <a:off x="5323481" y="1331451"/>
-              <a:ext cx="1723696" cy="369332"/>
+              <a:off x="4482605" y="2038015"/>
+              <a:ext cx="1723696" cy="338554"/>
             </a:xfrm>
             <a:prstGeom prst="rect">
               <a:avLst/>
@@ -3760,19 +6941,19 @@
             <a:lstStyle/>
             <a:p>
               <a:r>
-                <a:rPr lang="en-GB" dirty="0"/>
+                <a:rPr lang="en-GB" sz="1600" dirty="0"/>
                 <a:t>Transcript</a:t>
               </a:r>
-              <a:endParaRPr lang="en-NL" dirty="0"/>
+              <a:endParaRPr lang="en-NL" sz="1600" dirty="0"/>
             </a:p>
           </p:txBody>
         </p:sp>
         <p:sp>
           <p:nvSpPr>
-            <p:cNvPr id="10" name="Arrow: Pentagon 9">
+            <p:cNvPr id="48" name="Arrow: Pentagon 47">
               <a:extLst>
                 <a:ext uri="{FF2B5EF4-FFF2-40B4-BE49-F238E27FC236}">
-                  <a16:creationId xmlns:a16="http://schemas.microsoft.com/office/drawing/2014/main" id="{FF7DD1AD-9BCE-34E9-C91F-FE633D814B01}"/>
+                  <a16:creationId xmlns:a16="http://schemas.microsoft.com/office/drawing/2014/main" id="{6F566721-E960-E7E5-535C-03A2D09E06A5}"/>
                 </a:ext>
               </a:extLst>
             </p:cNvPr>
@@ -3781,16 +6962,16 @@
           </p:nvSpPr>
           <p:spPr>
             <a:xfrm>
-              <a:off x="756736" y="2003321"/>
+              <a:off x="325296" y="2682589"/>
               <a:ext cx="746234" cy="173421"/>
             </a:xfrm>
             <a:prstGeom prst="homePlate">
               <a:avLst/>
             </a:prstGeom>
             <a:solidFill>
-              <a:schemeClr val="accent1">
-                <a:lumMod val="20000"/>
-                <a:lumOff val="80000"/>
+              <a:schemeClr val="tx2">
+                <a:lumMod val="25000"/>
+                <a:lumOff val="75000"/>
               </a:schemeClr>
             </a:solidFill>
             <a:ln>
@@ -3816,20 +6997,20 @@
             </a:fontRef>
           </p:style>
           <p:txBody>
-            <a:bodyPr rtlCol="0" anchor="ctr"/>
+            <a:bodyPr wrap="none" lIns="0" tIns="0" rIns="0" bIns="0" rtlCol="0" anchor="ctr"/>
             <a:lstStyle/>
             <a:p>
               <a:pPr algn="ctr"/>
-              <a:endParaRPr lang="en-NL" dirty="0"/>
+              <a:endParaRPr lang="en-NL" sz="1000" b="1" dirty="0"/>
             </a:p>
           </p:txBody>
         </p:sp>
         <p:sp>
           <p:nvSpPr>
-            <p:cNvPr id="11" name="Arrow: Pentagon 10">
+            <p:cNvPr id="49" name="Arrow: Pentagon 48">
               <a:extLst>
                 <a:ext uri="{FF2B5EF4-FFF2-40B4-BE49-F238E27FC236}">
-                  <a16:creationId xmlns:a16="http://schemas.microsoft.com/office/drawing/2014/main" id="{679532BE-FAB5-8268-5E71-4B94DDB32B28}"/>
+                  <a16:creationId xmlns:a16="http://schemas.microsoft.com/office/drawing/2014/main" id="{1426E45C-8667-CDF8-A91A-755DC24A3889}"/>
                 </a:ext>
               </a:extLst>
             </p:cNvPr>
@@ -3837,17 +7018,288 @@
             <p:nvPr/>
           </p:nvSpPr>
           <p:spPr>
-            <a:xfrm rot="10800000">
-              <a:off x="4009688" y="2003321"/>
+            <a:xfrm flipH="1">
+              <a:off x="3578248" y="2682589"/>
               <a:ext cx="746234" cy="173421"/>
             </a:xfrm>
             <a:prstGeom prst="homePlate">
               <a:avLst/>
             </a:prstGeom>
             <a:solidFill>
-              <a:schemeClr val="tx2">
-                <a:lumMod val="75000"/>
-                <a:lumOff val="25000"/>
+              <a:srgbClr val="B4E5A2"/>
+            </a:solidFill>
+            <a:ln>
+              <a:solidFill>
+                <a:schemeClr val="tx1"/>
+              </a:solidFill>
+            </a:ln>
+          </p:spPr>
+          <p:style>
+            <a:lnRef idx="2">
+              <a:schemeClr val="accent1">
+                <a:shade val="15000"/>
+              </a:schemeClr>
+            </a:lnRef>
+            <a:fillRef idx="1">
+              <a:schemeClr val="accent1"/>
+            </a:fillRef>
+            <a:effectRef idx="0">
+              <a:schemeClr val="accent1"/>
+            </a:effectRef>
+            <a:fontRef idx="minor">
+              <a:schemeClr val="lt1"/>
+            </a:fontRef>
+          </p:style>
+          <p:txBody>
+            <a:bodyPr wrap="none" lIns="0" tIns="0" rIns="0" bIns="0" rtlCol="0" anchor="ctr"/>
+            <a:lstStyle/>
+            <a:p>
+              <a:pPr algn="ctr"/>
+              <a:endParaRPr lang="en-NL" sz="1000" b="1" dirty="0"/>
+            </a:p>
+          </p:txBody>
+        </p:sp>
+        <p:sp>
+          <p:nvSpPr>
+            <p:cNvPr id="50" name="TextBox 49">
+              <a:extLst>
+                <a:ext uri="{FF2B5EF4-FFF2-40B4-BE49-F238E27FC236}">
+                  <a16:creationId xmlns:a16="http://schemas.microsoft.com/office/drawing/2014/main" id="{44A89654-1926-7AF0-D0DE-79904290E8F7}"/>
+                </a:ext>
+              </a:extLst>
+            </p:cNvPr>
+            <p:cNvSpPr txBox="1"/>
+            <p:nvPr/>
+          </p:nvSpPr>
+          <p:spPr>
+            <a:xfrm>
+              <a:off x="241213" y="2388667"/>
+              <a:ext cx="914400" cy="369332"/>
+            </a:xfrm>
+            <a:prstGeom prst="rect">
+              <a:avLst/>
+            </a:prstGeom>
+            <a:noFill/>
+          </p:spPr>
+          <p:txBody>
+            <a:bodyPr wrap="square" rtlCol="0">
+              <a:spAutoFit/>
+            </a:bodyPr>
+            <a:lstStyle/>
+            <a:p>
+              <a:r>
+                <a:rPr lang="en-GB" b="1" dirty="0"/>
+                <a:t>R1</a:t>
+              </a:r>
+              <a:endParaRPr lang="en-NL" b="1" dirty="0"/>
+            </a:p>
+          </p:txBody>
+        </p:sp>
+        <p:sp>
+          <p:nvSpPr>
+            <p:cNvPr id="51" name="TextBox 50">
+              <a:extLst>
+                <a:ext uri="{FF2B5EF4-FFF2-40B4-BE49-F238E27FC236}">
+                  <a16:creationId xmlns:a16="http://schemas.microsoft.com/office/drawing/2014/main" id="{9B3FB1A1-C9D3-4F43-035C-72851642B855}"/>
+                </a:ext>
+              </a:extLst>
+            </p:cNvPr>
+            <p:cNvSpPr txBox="1"/>
+            <p:nvPr/>
+          </p:nvSpPr>
+          <p:spPr>
+            <a:xfrm>
+              <a:off x="3956620" y="2388667"/>
+              <a:ext cx="914400" cy="369332"/>
+            </a:xfrm>
+            <a:prstGeom prst="rect">
+              <a:avLst/>
+            </a:prstGeom>
+            <a:noFill/>
+          </p:spPr>
+          <p:txBody>
+            <a:bodyPr wrap="square" rtlCol="0">
+              <a:spAutoFit/>
+            </a:bodyPr>
+            <a:lstStyle/>
+            <a:p>
+              <a:r>
+                <a:rPr lang="en-GB" i="1" dirty="0"/>
+                <a:t>R2</a:t>
+              </a:r>
+              <a:endParaRPr lang="en-NL" i="1" dirty="0"/>
+            </a:p>
+          </p:txBody>
+        </p:sp>
+        <p:sp>
+          <p:nvSpPr>
+            <p:cNvPr id="52" name="TextBox 51">
+              <a:extLst>
+                <a:ext uri="{FF2B5EF4-FFF2-40B4-BE49-F238E27FC236}">
+                  <a16:creationId xmlns:a16="http://schemas.microsoft.com/office/drawing/2014/main" id="{9E91CFE2-B1AB-1582-1FFB-E31B58A48679}"/>
+                </a:ext>
+              </a:extLst>
+            </p:cNvPr>
+            <p:cNvSpPr txBox="1"/>
+            <p:nvPr/>
+          </p:nvSpPr>
+          <p:spPr>
+            <a:xfrm>
+              <a:off x="4482605" y="2478659"/>
+              <a:ext cx="2779986" cy="584775"/>
+            </a:xfrm>
+            <a:prstGeom prst="rect">
+              <a:avLst/>
+            </a:prstGeom>
+            <a:noFill/>
+          </p:spPr>
+          <p:txBody>
+            <a:bodyPr wrap="square" rtlCol="0">
+              <a:spAutoFit/>
+            </a:bodyPr>
+            <a:lstStyle/>
+            <a:p>
+              <a:r>
+                <a:rPr lang="en-GB" sz="1600" b="1" dirty="0" err="1"/>
+                <a:t>fr-secondstrand</a:t>
+              </a:r>
+              <a:r>
+                <a:rPr lang="en-GB" sz="1600" b="1" dirty="0"/>
+                <a:t>*, FR, </a:t>
+              </a:r>
+            </a:p>
+            <a:p>
+              <a:r>
+                <a:rPr lang="en-GB" sz="1600" b="1" dirty="0"/>
+                <a:t>direct stranded</a:t>
+              </a:r>
+              <a:endParaRPr lang="en-NL" sz="1600" b="1" dirty="0"/>
+            </a:p>
+          </p:txBody>
+        </p:sp>
+        <p:cxnSp>
+          <p:nvCxnSpPr>
+            <p:cNvPr id="53" name="Straight Connector 52">
+              <a:extLst>
+                <a:ext uri="{FF2B5EF4-FFF2-40B4-BE49-F238E27FC236}">
+                  <a16:creationId xmlns:a16="http://schemas.microsoft.com/office/drawing/2014/main" id="{8E81BFEC-179F-052B-31E1-781436E44BC1}"/>
+                </a:ext>
+              </a:extLst>
+            </p:cNvPr>
+            <p:cNvCxnSpPr>
+              <a:cxnSpLocks/>
+              <a:endCxn id="49" idx="3"/>
+            </p:cNvCxnSpPr>
+            <p:nvPr/>
+          </p:nvCxnSpPr>
+          <p:spPr>
+            <a:xfrm>
+              <a:off x="1071530" y="2757999"/>
+              <a:ext cx="2506718" cy="11300"/>
+            </a:xfrm>
+            <a:prstGeom prst="line">
+              <a:avLst/>
+            </a:prstGeom>
+            <a:ln>
+              <a:solidFill>
+                <a:srgbClr val="7F7F7F"/>
+              </a:solidFill>
+              <a:prstDash val="sysDash"/>
+            </a:ln>
+          </p:spPr>
+          <p:style>
+            <a:lnRef idx="2">
+              <a:schemeClr val="dk1"/>
+            </a:lnRef>
+            <a:fillRef idx="0">
+              <a:schemeClr val="dk1"/>
+            </a:fillRef>
+            <a:effectRef idx="1">
+              <a:schemeClr val="dk1"/>
+            </a:effectRef>
+            <a:fontRef idx="minor">
+              <a:schemeClr val="tx1"/>
+            </a:fontRef>
+          </p:style>
+        </p:cxnSp>
+        <p:sp>
+          <p:nvSpPr>
+            <p:cNvPr id="54" name="Arrow: Pentagon 53">
+              <a:extLst>
+                <a:ext uri="{FF2B5EF4-FFF2-40B4-BE49-F238E27FC236}">
+                  <a16:creationId xmlns:a16="http://schemas.microsoft.com/office/drawing/2014/main" id="{6B181ED0-3725-D9BA-E7EB-CB2D48A16271}"/>
+                </a:ext>
+              </a:extLst>
+            </p:cNvPr>
+            <p:cNvSpPr/>
+            <p:nvPr/>
+          </p:nvSpPr>
+          <p:spPr>
+            <a:xfrm>
+              <a:off x="325293" y="3859745"/>
+              <a:ext cx="746234" cy="173421"/>
+            </a:xfrm>
+            <a:prstGeom prst="homePlate">
+              <a:avLst/>
+            </a:prstGeom>
+            <a:solidFill>
+              <a:srgbClr val="A6CAEC"/>
+            </a:solidFill>
+            <a:ln>
+              <a:solidFill>
+                <a:schemeClr val="tx1"/>
+              </a:solidFill>
+            </a:ln>
+          </p:spPr>
+          <p:style>
+            <a:lnRef idx="2">
+              <a:schemeClr val="accent1">
+                <a:shade val="15000"/>
+              </a:schemeClr>
+            </a:lnRef>
+            <a:fillRef idx="1">
+              <a:schemeClr val="accent1"/>
+            </a:fillRef>
+            <a:effectRef idx="0">
+              <a:schemeClr val="accent1"/>
+            </a:effectRef>
+            <a:fontRef idx="minor">
+              <a:schemeClr val="lt1"/>
+            </a:fontRef>
+          </p:style>
+          <p:txBody>
+            <a:bodyPr wrap="none" lIns="0" tIns="0" rIns="0" bIns="0" rtlCol="0" anchor="ctr"/>
+            <a:lstStyle/>
+            <a:p>
+              <a:pPr algn="ctr"/>
+              <a:endParaRPr lang="en-NL" sz="1000" b="1" dirty="0"/>
+            </a:p>
+          </p:txBody>
+        </p:sp>
+        <p:sp>
+          <p:nvSpPr>
+            <p:cNvPr id="55" name="Arrow: Pentagon 54">
+              <a:extLst>
+                <a:ext uri="{FF2B5EF4-FFF2-40B4-BE49-F238E27FC236}">
+                  <a16:creationId xmlns:a16="http://schemas.microsoft.com/office/drawing/2014/main" id="{86E02EA5-A008-D6CA-0116-377AFCCE3579}"/>
+                </a:ext>
+              </a:extLst>
+            </p:cNvPr>
+            <p:cNvSpPr/>
+            <p:nvPr/>
+          </p:nvSpPr>
+          <p:spPr>
+            <a:xfrm flipH="1">
+              <a:off x="3578245" y="3859745"/>
+              <a:ext cx="746234" cy="173421"/>
+            </a:xfrm>
+            <a:prstGeom prst="homePlate">
+              <a:avLst/>
+            </a:prstGeom>
+            <a:solidFill>
+              <a:schemeClr val="accent6">
+                <a:lumMod val="40000"/>
+                <a:lumOff val="60000"/>
               </a:schemeClr>
             </a:solidFill>
             <a:ln>
@@ -3873,20 +7325,20 @@
             </a:fontRef>
           </p:style>
           <p:txBody>
-            <a:bodyPr rtlCol="0" anchor="ctr"/>
+            <a:bodyPr wrap="none" lIns="0" tIns="0" rIns="0" bIns="0" rtlCol="0" anchor="ctr"/>
             <a:lstStyle/>
             <a:p>
               <a:pPr algn="ctr"/>
-              <a:endParaRPr lang="en-NL" dirty="0"/>
+              <a:endParaRPr lang="en-NL" sz="1000" b="1" dirty="0"/>
             </a:p>
           </p:txBody>
         </p:sp>
         <p:sp>
           <p:nvSpPr>
-            <p:cNvPr id="13" name="TextBox 12">
+            <p:cNvPr id="56" name="TextBox 55">
               <a:extLst>
                 <a:ext uri="{FF2B5EF4-FFF2-40B4-BE49-F238E27FC236}">
-                  <a16:creationId xmlns:a16="http://schemas.microsoft.com/office/drawing/2014/main" id="{7962918C-0814-56FD-CC01-874B6DB80D87}"/>
+                  <a16:creationId xmlns:a16="http://schemas.microsoft.com/office/drawing/2014/main" id="{4FA680A6-2B2B-8934-C3DD-C137C2BBEAB4}"/>
                 </a:ext>
               </a:extLst>
             </p:cNvPr>
@@ -3895,7 +7347,7 @@
           </p:nvSpPr>
           <p:spPr>
             <a:xfrm>
-              <a:off x="672653" y="1709399"/>
+              <a:off x="241210" y="3565823"/>
               <a:ext cx="914400" cy="369332"/>
             </a:xfrm>
             <a:prstGeom prst="rect">
@@ -3910,19 +7362,19 @@
             <a:lstStyle/>
             <a:p>
               <a:r>
-                <a:rPr lang="en-GB" dirty="0"/>
-                <a:t>R1</a:t>
+                <a:rPr lang="en-GB" i="1" dirty="0"/>
+                <a:t>R2</a:t>
               </a:r>
-              <a:endParaRPr lang="en-NL" dirty="0"/>
+              <a:endParaRPr lang="en-NL" i="1" dirty="0"/>
             </a:p>
           </p:txBody>
         </p:sp>
         <p:sp>
           <p:nvSpPr>
-            <p:cNvPr id="14" name="TextBox 13">
+            <p:cNvPr id="57" name="TextBox 56">
               <a:extLst>
                 <a:ext uri="{FF2B5EF4-FFF2-40B4-BE49-F238E27FC236}">
-                  <a16:creationId xmlns:a16="http://schemas.microsoft.com/office/drawing/2014/main" id="{F320FF99-C067-1BCA-AEEF-A33AF3D09B70}"/>
+                  <a16:creationId xmlns:a16="http://schemas.microsoft.com/office/drawing/2014/main" id="{B78C4960-3EFA-151A-E21B-A4A55974AB7A}"/>
                 </a:ext>
               </a:extLst>
             </p:cNvPr>
@@ -3931,7 +7383,7 @@
           </p:nvSpPr>
           <p:spPr>
             <a:xfrm>
-              <a:off x="4388060" y="1709399"/>
+              <a:off x="3956617" y="3565823"/>
               <a:ext cx="914400" cy="369332"/>
             </a:xfrm>
             <a:prstGeom prst="rect">
@@ -3946,19 +7398,19 @@
             <a:lstStyle/>
             <a:p>
               <a:r>
-                <a:rPr lang="en-GB" dirty="0"/>
-                <a:t>R2</a:t>
+                <a:rPr lang="en-GB" b="1" dirty="0"/>
+                <a:t>R1</a:t>
               </a:r>
-              <a:endParaRPr lang="en-NL" dirty="0"/>
+              <a:endParaRPr lang="en-NL" b="1" dirty="0"/>
             </a:p>
           </p:txBody>
         </p:sp>
         <p:sp>
           <p:nvSpPr>
-            <p:cNvPr id="15" name="TextBox 14">
+            <p:cNvPr id="58" name="TextBox 57">
               <a:extLst>
                 <a:ext uri="{FF2B5EF4-FFF2-40B4-BE49-F238E27FC236}">
-                  <a16:creationId xmlns:a16="http://schemas.microsoft.com/office/drawing/2014/main" id="{5764C468-27E7-D485-4D03-16652C75A0B3}"/>
+                  <a16:creationId xmlns:a16="http://schemas.microsoft.com/office/drawing/2014/main" id="{810EA87A-DEE2-5715-80C1-4D73BAE27CD9}"/>
                 </a:ext>
               </a:extLst>
             </p:cNvPr>
@@ -3967,8 +7419,8 @@
           </p:nvSpPr>
           <p:spPr>
             <a:xfrm>
-              <a:off x="5323481" y="1772095"/>
-              <a:ext cx="2779986" cy="646331"/>
+              <a:off x="4482602" y="3655815"/>
+              <a:ext cx="2517239" cy="584775"/>
             </a:xfrm>
             <a:prstGeom prst="rect">
               <a:avLst/>
@@ -3982,40 +7434,93 @@
             <a:lstStyle/>
             <a:p>
               <a:r>
-                <a:rPr lang="en-GB" dirty="0" err="1"/>
-                <a:t>fr-secondstrand</a:t>
+                <a:rPr lang="en-GB" sz="1600" b="1" dirty="0" err="1"/>
+                <a:t>fr-firststrand</a:t>
               </a:r>
               <a:r>
-                <a:rPr lang="en-GB" dirty="0"/>
-                <a:t>, FR, direct stranded</a:t>
+                <a:rPr lang="en-GB" sz="1600" b="1" dirty="0"/>
+                <a:t>*, RF, </a:t>
               </a:r>
-              <a:endParaRPr lang="en-NL" dirty="0"/>
+            </a:p>
+            <a:p>
+              <a:r>
+                <a:rPr lang="en-GB" sz="1600" b="1" dirty="0"/>
+                <a:t>reverse stranded</a:t>
+              </a:r>
+              <a:endParaRPr lang="en-NL" sz="1600" b="1" dirty="0"/>
             </a:p>
           </p:txBody>
         </p:sp>
         <p:cxnSp>
           <p:nvCxnSpPr>
-            <p:cNvPr id="17" name="Straight Connector 16">
+            <p:cNvPr id="59" name="Straight Connector 58">
               <a:extLst>
                 <a:ext uri="{FF2B5EF4-FFF2-40B4-BE49-F238E27FC236}">
-                  <a16:creationId xmlns:a16="http://schemas.microsoft.com/office/drawing/2014/main" id="{DDF0E57E-BB09-0054-E60F-95AD78D5BE13}"/>
+                  <a16:creationId xmlns:a16="http://schemas.microsoft.com/office/drawing/2014/main" id="{63B82087-6AF3-97ED-8711-D581A3EEECA7}"/>
                 </a:ext>
               </a:extLst>
             </p:cNvPr>
             <p:cNvCxnSpPr>
               <a:cxnSpLocks/>
-              <a:endCxn id="11" idx="3"/>
+              <a:endCxn id="55" idx="3"/>
             </p:cNvCxnSpPr>
             <p:nvPr/>
           </p:nvCxnSpPr>
           <p:spPr>
             <a:xfrm>
-              <a:off x="1502970" y="2078731"/>
+              <a:off x="1071527" y="3935155"/>
               <a:ext cx="2506718" cy="11300"/>
             </a:xfrm>
             <a:prstGeom prst="line">
               <a:avLst/>
             </a:prstGeom>
+            <a:ln>
+              <a:solidFill>
+                <a:srgbClr val="7F7F7F"/>
+              </a:solidFill>
+              <a:prstDash val="sysDash"/>
+            </a:ln>
+          </p:spPr>
+          <p:style>
+            <a:lnRef idx="2">
+              <a:schemeClr val="dk1"/>
+            </a:lnRef>
+            <a:fillRef idx="0">
+              <a:schemeClr val="dk1"/>
+            </a:fillRef>
+            <a:effectRef idx="1">
+              <a:schemeClr val="dk1"/>
+            </a:effectRef>
+            <a:fontRef idx="minor">
+              <a:schemeClr val="tx1"/>
+            </a:fontRef>
+          </p:style>
+        </p:cxnSp>
+        <p:cxnSp>
+          <p:nvCxnSpPr>
+            <p:cNvPr id="60" name="Straight Connector 59">
+              <a:extLst>
+                <a:ext uri="{FF2B5EF4-FFF2-40B4-BE49-F238E27FC236}">
+                  <a16:creationId xmlns:a16="http://schemas.microsoft.com/office/drawing/2014/main" id="{7205289F-0A5E-B505-62B7-CB8339762694}"/>
+                </a:ext>
+              </a:extLst>
+            </p:cNvPr>
+            <p:cNvCxnSpPr>
+              <a:cxnSpLocks/>
+            </p:cNvCxnSpPr>
+            <p:nvPr/>
+          </p:nvCxnSpPr>
+          <p:spPr>
+            <a:xfrm>
+              <a:off x="285880" y="4512916"/>
+              <a:ext cx="6297631" cy="0"/>
+            </a:xfrm>
+            <a:prstGeom prst="line">
+              <a:avLst/>
+            </a:prstGeom>
+            <a:ln>
+              <a:prstDash val="solid"/>
+            </a:ln>
           </p:spPr>
           <p:style>
             <a:lnRef idx="2">
@@ -4034,10 +7539,10 @@
         </p:cxnSp>
         <p:sp>
           <p:nvSpPr>
-            <p:cNvPr id="24" name="Arrow: Pentagon 23">
+            <p:cNvPr id="61" name="Arrow: Pentagon 60">
               <a:extLst>
                 <a:ext uri="{FF2B5EF4-FFF2-40B4-BE49-F238E27FC236}">
-                  <a16:creationId xmlns:a16="http://schemas.microsoft.com/office/drawing/2014/main" id="{45744D7A-E8EE-87E0-318A-DFFB235FD6A9}"/>
+                  <a16:creationId xmlns:a16="http://schemas.microsoft.com/office/drawing/2014/main" id="{515EEF95-CA54-D823-103F-24DBEF355593}"/>
                 </a:ext>
               </a:extLst>
             </p:cNvPr>
@@ -4046,7 +7551,7 @@
           </p:nvSpPr>
           <p:spPr>
             <a:xfrm>
-              <a:off x="756733" y="3180477"/>
+              <a:off x="409379" y="4938104"/>
               <a:ext cx="746234" cy="173421"/>
             </a:xfrm>
             <a:prstGeom prst="homePlate">
@@ -4054,8 +7559,8 @@
             </a:prstGeom>
             <a:solidFill>
               <a:schemeClr val="tx2">
-                <a:lumMod val="75000"/>
-                <a:lumOff val="25000"/>
+                <a:lumMod val="25000"/>
+                <a:lumOff val="75000"/>
               </a:schemeClr>
             </a:solidFill>
             <a:ln>
@@ -4081,20 +7586,20 @@
             </a:fontRef>
           </p:style>
           <p:txBody>
-            <a:bodyPr rtlCol="0" anchor="ctr"/>
+            <a:bodyPr wrap="none" lIns="0" tIns="0" rIns="0" bIns="0" rtlCol="0" anchor="ctr"/>
             <a:lstStyle/>
             <a:p>
               <a:pPr algn="ctr"/>
-              <a:endParaRPr lang="en-NL" dirty="0"/>
+              <a:endParaRPr lang="en-NL" sz="1000" b="1" dirty="0"/>
             </a:p>
           </p:txBody>
         </p:sp>
         <p:sp>
           <p:nvSpPr>
-            <p:cNvPr id="25" name="Arrow: Pentagon 24">
+            <p:cNvPr id="62" name="Arrow: Pentagon 61">
               <a:extLst>
                 <a:ext uri="{FF2B5EF4-FFF2-40B4-BE49-F238E27FC236}">
-                  <a16:creationId xmlns:a16="http://schemas.microsoft.com/office/drawing/2014/main" id="{AA59D390-7F94-414D-F6D1-89D81157857F}"/>
+                  <a16:creationId xmlns:a16="http://schemas.microsoft.com/office/drawing/2014/main" id="{23AC8FAB-96F8-0D0C-3364-0E9A1CF98E1E}"/>
                 </a:ext>
               </a:extLst>
             </p:cNvPr>
@@ -4102,15 +7607,15 @@
             <p:nvPr/>
           </p:nvSpPr>
           <p:spPr>
-            <a:xfrm rot="10800000">
-              <a:off x="4009685" y="3180477"/>
+            <a:xfrm flipH="1">
+              <a:off x="3662331" y="4938104"/>
               <a:ext cx="746234" cy="173421"/>
             </a:xfrm>
             <a:prstGeom prst="homePlate">
               <a:avLst/>
             </a:prstGeom>
             <a:solidFill>
-              <a:srgbClr val="C1E5F5"/>
+              <a:srgbClr val="B4E5A2"/>
             </a:solidFill>
             <a:ln>
               <a:solidFill>
@@ -4135,20 +7640,20 @@
             </a:fontRef>
           </p:style>
           <p:txBody>
-            <a:bodyPr rtlCol="0" anchor="ctr"/>
+            <a:bodyPr wrap="none" lIns="0" tIns="0" rIns="0" bIns="0" rtlCol="0" anchor="ctr"/>
             <a:lstStyle/>
             <a:p>
               <a:pPr algn="ctr"/>
-              <a:endParaRPr lang="en-NL" dirty="0"/>
+              <a:endParaRPr lang="en-NL" sz="1000" b="1" dirty="0"/>
             </a:p>
           </p:txBody>
         </p:sp>
         <p:sp>
           <p:nvSpPr>
-            <p:cNvPr id="26" name="TextBox 25">
+            <p:cNvPr id="63" name="TextBox 62">
               <a:extLst>
                 <a:ext uri="{FF2B5EF4-FFF2-40B4-BE49-F238E27FC236}">
-                  <a16:creationId xmlns:a16="http://schemas.microsoft.com/office/drawing/2014/main" id="{113F94F8-A742-EE51-5D29-2384B5A6B5D0}"/>
+                  <a16:creationId xmlns:a16="http://schemas.microsoft.com/office/drawing/2014/main" id="{C8AF78F3-5894-F1C9-8481-1A0685385A62}"/>
                 </a:ext>
               </a:extLst>
             </p:cNvPr>
@@ -4157,7 +7662,7 @@
           </p:nvSpPr>
           <p:spPr>
             <a:xfrm>
-              <a:off x="672650" y="2886555"/>
+              <a:off x="325296" y="4644182"/>
               <a:ext cx="914400" cy="369332"/>
             </a:xfrm>
             <a:prstGeom prst="rect">
@@ -4172,19 +7677,19 @@
             <a:lstStyle/>
             <a:p>
               <a:r>
-                <a:rPr lang="en-GB" dirty="0"/>
-                <a:t>R2</a:t>
+                <a:rPr lang="en-GB" b="1" dirty="0"/>
+                <a:t>R1</a:t>
               </a:r>
-              <a:endParaRPr lang="en-NL" dirty="0"/>
+              <a:endParaRPr lang="en-NL" b="1" dirty="0"/>
             </a:p>
           </p:txBody>
         </p:sp>
         <p:sp>
           <p:nvSpPr>
-            <p:cNvPr id="27" name="TextBox 26">
+            <p:cNvPr id="64" name="TextBox 63">
               <a:extLst>
                 <a:ext uri="{FF2B5EF4-FFF2-40B4-BE49-F238E27FC236}">
-                  <a16:creationId xmlns:a16="http://schemas.microsoft.com/office/drawing/2014/main" id="{D5BBD72A-355B-A80A-FF79-5B3268DC475D}"/>
+                  <a16:creationId xmlns:a16="http://schemas.microsoft.com/office/drawing/2014/main" id="{BCE93E3B-B329-E8D5-31FF-3583F2216D3B}"/>
                 </a:ext>
               </a:extLst>
             </p:cNvPr>
@@ -4193,7 +7698,7 @@
           </p:nvSpPr>
           <p:spPr>
             <a:xfrm>
-              <a:off x="4388057" y="2886555"/>
+              <a:off x="4035448" y="4644182"/>
               <a:ext cx="914400" cy="369332"/>
             </a:xfrm>
             <a:prstGeom prst="rect">
@@ -4208,115 +7713,40 @@
             <a:lstStyle/>
             <a:p>
               <a:r>
-                <a:rPr lang="en-GB" dirty="0"/>
-                <a:t>R1</a:t>
+                <a:rPr lang="en-GB" i="1" dirty="0"/>
+                <a:t>R2</a:t>
               </a:r>
-              <a:endParaRPr lang="en-NL" dirty="0"/>
-            </a:p>
-          </p:txBody>
-        </p:sp>
-        <p:sp>
-          <p:nvSpPr>
-            <p:cNvPr id="28" name="TextBox 27">
-              <a:extLst>
-                <a:ext uri="{FF2B5EF4-FFF2-40B4-BE49-F238E27FC236}">
-                  <a16:creationId xmlns:a16="http://schemas.microsoft.com/office/drawing/2014/main" id="{7512CD16-20EC-993D-789F-7640DA2090AC}"/>
-                </a:ext>
-              </a:extLst>
-            </p:cNvPr>
-            <p:cNvSpPr txBox="1"/>
-            <p:nvPr/>
-          </p:nvSpPr>
-          <p:spPr>
-            <a:xfrm>
-              <a:off x="5323478" y="2949251"/>
-              <a:ext cx="2517239" cy="646331"/>
-            </a:xfrm>
-            <a:prstGeom prst="rect">
-              <a:avLst/>
-            </a:prstGeom>
-            <a:noFill/>
-          </p:spPr>
-          <p:txBody>
-            <a:bodyPr wrap="square" rtlCol="0">
-              <a:spAutoFit/>
-            </a:bodyPr>
-            <a:lstStyle/>
-            <a:p>
-              <a:r>
-                <a:rPr lang="en-GB" dirty="0" err="1"/>
-                <a:t>fr-firststrand</a:t>
-              </a:r>
-              <a:r>
-                <a:rPr lang="en-GB" dirty="0"/>
-                <a:t>, RF, reverse stranded</a:t>
-              </a:r>
-              <a:endParaRPr lang="en-NL" dirty="0"/>
+              <a:endParaRPr lang="en-NL" i="1" dirty="0"/>
             </a:p>
           </p:txBody>
         </p:sp>
         <p:cxnSp>
           <p:nvCxnSpPr>
-            <p:cNvPr id="29" name="Straight Connector 28">
+            <p:cNvPr id="65" name="Straight Connector 64">
               <a:extLst>
                 <a:ext uri="{FF2B5EF4-FFF2-40B4-BE49-F238E27FC236}">
-                  <a16:creationId xmlns:a16="http://schemas.microsoft.com/office/drawing/2014/main" id="{1B02B072-0ADE-6B66-9025-C9530F2C6AEC}"/>
+                  <a16:creationId xmlns:a16="http://schemas.microsoft.com/office/drawing/2014/main" id="{8270444E-5D46-4929-07EC-4F2267703DFF}"/>
                 </a:ext>
               </a:extLst>
             </p:cNvPr>
             <p:cNvCxnSpPr>
               <a:cxnSpLocks/>
-              <a:endCxn id="25" idx="3"/>
+              <a:endCxn id="62" idx="3"/>
             </p:cNvCxnSpPr>
             <p:nvPr/>
           </p:nvCxnSpPr>
           <p:spPr>
             <a:xfrm>
-              <a:off x="1502967" y="3255887"/>
+              <a:off x="1155613" y="5013514"/>
               <a:ext cx="2506718" cy="11300"/>
             </a:xfrm>
             <a:prstGeom prst="line">
               <a:avLst/>
             </a:prstGeom>
-          </p:spPr>
-          <p:style>
-            <a:lnRef idx="2">
-              <a:schemeClr val="dk1"/>
-            </a:lnRef>
-            <a:fillRef idx="0">
-              <a:schemeClr val="dk1"/>
-            </a:fillRef>
-            <a:effectRef idx="1">
-              <a:schemeClr val="dk1"/>
-            </a:effectRef>
-            <a:fontRef idx="minor">
-              <a:schemeClr val="tx1"/>
-            </a:fontRef>
-          </p:style>
-        </p:cxnSp>
-        <p:cxnSp>
-          <p:nvCxnSpPr>
-            <p:cNvPr id="30" name="Straight Connector 29">
-              <a:extLst>
-                <a:ext uri="{FF2B5EF4-FFF2-40B4-BE49-F238E27FC236}">
-                  <a16:creationId xmlns:a16="http://schemas.microsoft.com/office/drawing/2014/main" id="{A954DE12-E116-E8AC-6EEA-1A9B99DF6993}"/>
-                </a:ext>
-              </a:extLst>
-            </p:cNvPr>
-            <p:cNvCxnSpPr>
-              <a:cxnSpLocks/>
-            </p:cNvCxnSpPr>
-            <p:nvPr/>
-          </p:nvCxnSpPr>
-          <p:spPr>
-            <a:xfrm>
-              <a:off x="717320" y="3833648"/>
-              <a:ext cx="4167355" cy="0"/>
-            </a:xfrm>
-            <a:prstGeom prst="line">
-              <a:avLst/>
-            </a:prstGeom>
             <a:ln>
+              <a:solidFill>
+                <a:srgbClr val="7F7F7F"/>
+              </a:solidFill>
               <a:prstDash val="sysDash"/>
             </a:ln>
           </p:spPr>
@@ -4337,10 +7767,10 @@
         </p:cxnSp>
         <p:sp>
           <p:nvSpPr>
-            <p:cNvPr id="32" name="Arrow: Pentagon 31">
+            <p:cNvPr id="66" name="Arrow: Pentagon 65">
               <a:extLst>
                 <a:ext uri="{FF2B5EF4-FFF2-40B4-BE49-F238E27FC236}">
-                  <a16:creationId xmlns:a16="http://schemas.microsoft.com/office/drawing/2014/main" id="{8A5DBBCE-44ED-0D81-DD63-AF79DD164729}"/>
+                  <a16:creationId xmlns:a16="http://schemas.microsoft.com/office/drawing/2014/main" id="{9ABE67E5-71FC-1F99-1C24-3BA2C749D4CA}"/>
                 </a:ext>
               </a:extLst>
             </p:cNvPr>
@@ -4349,16 +7779,70 @@
           </p:nvSpPr>
           <p:spPr>
             <a:xfrm>
-              <a:off x="840819" y="4258836"/>
+              <a:off x="409376" y="5626529"/>
               <a:ext cx="746234" cy="173421"/>
             </a:xfrm>
             <a:prstGeom prst="homePlate">
               <a:avLst/>
             </a:prstGeom>
             <a:solidFill>
+              <a:srgbClr val="A6CAEC"/>
+            </a:solidFill>
+            <a:ln>
+              <a:solidFill>
+                <a:schemeClr val="tx1"/>
+              </a:solidFill>
+            </a:ln>
+          </p:spPr>
+          <p:style>
+            <a:lnRef idx="2">
               <a:schemeClr val="accent1">
-                <a:lumMod val="20000"/>
-                <a:lumOff val="80000"/>
+                <a:shade val="15000"/>
+              </a:schemeClr>
+            </a:lnRef>
+            <a:fillRef idx="1">
+              <a:schemeClr val="accent1"/>
+            </a:fillRef>
+            <a:effectRef idx="0">
+              <a:schemeClr val="accent1"/>
+            </a:effectRef>
+            <a:fontRef idx="minor">
+              <a:schemeClr val="lt1"/>
+            </a:fontRef>
+          </p:style>
+          <p:txBody>
+            <a:bodyPr wrap="none" lIns="0" tIns="0" rIns="0" bIns="0" rtlCol="0" anchor="ctr"/>
+            <a:lstStyle/>
+            <a:p>
+              <a:pPr algn="ctr"/>
+              <a:endParaRPr lang="en-NL" sz="1000" b="1" dirty="0"/>
+            </a:p>
+          </p:txBody>
+        </p:sp>
+        <p:sp>
+          <p:nvSpPr>
+            <p:cNvPr id="67" name="Arrow: Pentagon 66">
+              <a:extLst>
+                <a:ext uri="{FF2B5EF4-FFF2-40B4-BE49-F238E27FC236}">
+                  <a16:creationId xmlns:a16="http://schemas.microsoft.com/office/drawing/2014/main" id="{30B011CC-1D24-AE9E-B1F8-9AD15BE8CF62}"/>
+                </a:ext>
+              </a:extLst>
+            </p:cNvPr>
+            <p:cNvSpPr/>
+            <p:nvPr/>
+          </p:nvSpPr>
+          <p:spPr>
+            <a:xfrm flipH="1">
+              <a:off x="3662328" y="5626529"/>
+              <a:ext cx="746234" cy="173421"/>
+            </a:xfrm>
+            <a:prstGeom prst="homePlate">
+              <a:avLst/>
+            </a:prstGeom>
+            <a:solidFill>
+              <a:schemeClr val="accent6">
+                <a:lumMod val="40000"/>
+                <a:lumOff val="60000"/>
               </a:schemeClr>
             </a:solidFill>
             <a:ln>
@@ -4384,77 +7868,36 @@
             </a:fontRef>
           </p:style>
           <p:txBody>
-            <a:bodyPr rtlCol="0" anchor="ctr"/>
+            <a:bodyPr wrap="none" lIns="0" tIns="0" rIns="0" bIns="0" rtlCol="0" anchor="ctr"/>
             <a:lstStyle/>
             <a:p>
               <a:pPr algn="ctr"/>
-              <a:endParaRPr lang="en-NL" dirty="0"/>
+              <a:endParaRPr lang="en-GB" sz="1000" b="1" dirty="0">
+                <a:solidFill>
+                  <a:schemeClr val="tx1"/>
+                </a:solidFill>
+              </a:endParaRPr>
+            </a:p>
+            <a:p>
+              <a:pPr algn="ctr"/>
+              <a:endParaRPr lang="en-GB" sz="1000" b="1" dirty="0">
+                <a:solidFill>
+                  <a:schemeClr val="tx1"/>
+                </a:solidFill>
+              </a:endParaRPr>
+            </a:p>
+            <a:p>
+              <a:pPr algn="ctr"/>
+              <a:endParaRPr lang="en-NL" sz="1000" b="1" dirty="0"/>
             </a:p>
           </p:txBody>
         </p:sp>
         <p:sp>
           <p:nvSpPr>
-            <p:cNvPr id="33" name="Arrow: Pentagon 32">
+            <p:cNvPr id="68" name="TextBox 67">
               <a:extLst>
                 <a:ext uri="{FF2B5EF4-FFF2-40B4-BE49-F238E27FC236}">
-                  <a16:creationId xmlns:a16="http://schemas.microsoft.com/office/drawing/2014/main" id="{A9DB57F1-8B77-5912-DBFA-0D5D4A6EF311}"/>
-                </a:ext>
-              </a:extLst>
-            </p:cNvPr>
-            <p:cNvSpPr/>
-            <p:nvPr/>
-          </p:nvSpPr>
-          <p:spPr>
-            <a:xfrm rot="10800000">
-              <a:off x="4093771" y="4258836"/>
-              <a:ext cx="746234" cy="173421"/>
-            </a:xfrm>
-            <a:prstGeom prst="homePlate">
-              <a:avLst/>
-            </a:prstGeom>
-            <a:solidFill>
-              <a:schemeClr val="tx2">
-                <a:lumMod val="75000"/>
-                <a:lumOff val="25000"/>
-              </a:schemeClr>
-            </a:solidFill>
-            <a:ln>
-              <a:solidFill>
-                <a:schemeClr val="tx1"/>
-              </a:solidFill>
-            </a:ln>
-          </p:spPr>
-          <p:style>
-            <a:lnRef idx="2">
-              <a:schemeClr val="accent1">
-                <a:shade val="15000"/>
-              </a:schemeClr>
-            </a:lnRef>
-            <a:fillRef idx="1">
-              <a:schemeClr val="accent1"/>
-            </a:fillRef>
-            <a:effectRef idx="0">
-              <a:schemeClr val="accent1"/>
-            </a:effectRef>
-            <a:fontRef idx="minor">
-              <a:schemeClr val="lt1"/>
-            </a:fontRef>
-          </p:style>
-          <p:txBody>
-            <a:bodyPr rtlCol="0" anchor="ctr"/>
-            <a:lstStyle/>
-            <a:p>
-              <a:pPr algn="ctr"/>
-              <a:endParaRPr lang="en-NL" dirty="0"/>
-            </a:p>
-          </p:txBody>
-        </p:sp>
-        <p:sp>
-          <p:nvSpPr>
-            <p:cNvPr id="34" name="TextBox 33">
-              <a:extLst>
-                <a:ext uri="{FF2B5EF4-FFF2-40B4-BE49-F238E27FC236}">
-                  <a16:creationId xmlns:a16="http://schemas.microsoft.com/office/drawing/2014/main" id="{B4B141A0-9085-509F-CE00-84A82C0A039D}"/>
+                  <a16:creationId xmlns:a16="http://schemas.microsoft.com/office/drawing/2014/main" id="{81A34C3E-9265-2CFB-5C91-55A06796257C}"/>
                 </a:ext>
               </a:extLst>
             </p:cNvPr>
@@ -4463,7 +7906,7 @@
           </p:nvSpPr>
           <p:spPr>
             <a:xfrm>
-              <a:off x="756736" y="3964914"/>
+              <a:off x="325293" y="5332607"/>
               <a:ext cx="914400" cy="369332"/>
             </a:xfrm>
             <a:prstGeom prst="rect">
@@ -4478,72 +7921,42 @@
             <a:lstStyle/>
             <a:p>
               <a:r>
-                <a:rPr lang="en-GB" dirty="0"/>
-                <a:t>R1</a:t>
-              </a:r>
-              <a:endParaRPr lang="en-NL" dirty="0"/>
-            </a:p>
-          </p:txBody>
-        </p:sp>
-        <p:sp>
-          <p:nvSpPr>
-            <p:cNvPr id="35" name="TextBox 34">
-              <a:extLst>
-                <a:ext uri="{FF2B5EF4-FFF2-40B4-BE49-F238E27FC236}">
-                  <a16:creationId xmlns:a16="http://schemas.microsoft.com/office/drawing/2014/main" id="{15517C3D-262D-90E2-5F6E-2572E6627978}"/>
-                </a:ext>
-              </a:extLst>
-            </p:cNvPr>
-            <p:cNvSpPr txBox="1"/>
-            <p:nvPr/>
-          </p:nvSpPr>
-          <p:spPr>
-            <a:xfrm>
-              <a:off x="4466888" y="3964914"/>
-              <a:ext cx="914400" cy="369332"/>
-            </a:xfrm>
-            <a:prstGeom prst="rect">
-              <a:avLst/>
-            </a:prstGeom>
-            <a:noFill/>
-          </p:spPr>
-          <p:txBody>
-            <a:bodyPr wrap="square" rtlCol="0">
-              <a:spAutoFit/>
-            </a:bodyPr>
-            <a:lstStyle/>
-            <a:p>
-              <a:r>
-                <a:rPr lang="en-GB" dirty="0"/>
+                <a:rPr lang="en-GB" i="1" dirty="0"/>
                 <a:t>R2</a:t>
               </a:r>
-              <a:endParaRPr lang="en-NL" dirty="0"/>
+              <a:endParaRPr lang="en-NL" i="1" dirty="0"/>
             </a:p>
           </p:txBody>
         </p:sp>
         <p:cxnSp>
           <p:nvCxnSpPr>
-            <p:cNvPr id="36" name="Straight Connector 35">
+            <p:cNvPr id="69" name="Straight Connector 68">
               <a:extLst>
                 <a:ext uri="{FF2B5EF4-FFF2-40B4-BE49-F238E27FC236}">
-                  <a16:creationId xmlns:a16="http://schemas.microsoft.com/office/drawing/2014/main" id="{1250E470-762D-C14B-6C99-371D9B18A0AE}"/>
+                  <a16:creationId xmlns:a16="http://schemas.microsoft.com/office/drawing/2014/main" id="{1236D464-8A33-9B2B-4533-03EB5FD8292F}"/>
                 </a:ext>
               </a:extLst>
             </p:cNvPr>
             <p:cNvCxnSpPr>
               <a:cxnSpLocks/>
-              <a:endCxn id="33" idx="3"/>
+              <a:endCxn id="67" idx="3"/>
             </p:cNvCxnSpPr>
             <p:nvPr/>
           </p:nvCxnSpPr>
           <p:spPr>
             <a:xfrm>
-              <a:off x="1587053" y="4334246"/>
+              <a:off x="1155610" y="5701939"/>
               <a:ext cx="2506718" cy="11300"/>
             </a:xfrm>
             <a:prstGeom prst="line">
               <a:avLst/>
             </a:prstGeom>
+            <a:ln>
+              <a:solidFill>
+                <a:srgbClr val="7F7F7F"/>
+              </a:solidFill>
+              <a:prstDash val="sysDash"/>
+            </a:ln>
           </p:spPr>
           <p:style>
             <a:lnRef idx="2">
@@ -4562,121 +7975,10 @@
         </p:cxnSp>
         <p:sp>
           <p:nvSpPr>
-            <p:cNvPr id="37" name="Arrow: Pentagon 36">
+            <p:cNvPr id="70" name="TextBox 69">
               <a:extLst>
                 <a:ext uri="{FF2B5EF4-FFF2-40B4-BE49-F238E27FC236}">
-                  <a16:creationId xmlns:a16="http://schemas.microsoft.com/office/drawing/2014/main" id="{C27156E4-B107-F007-E63C-C2635206825E}"/>
-                </a:ext>
-              </a:extLst>
-            </p:cNvPr>
-            <p:cNvSpPr/>
-            <p:nvPr/>
-          </p:nvSpPr>
-          <p:spPr>
-            <a:xfrm>
-              <a:off x="840816" y="4947261"/>
-              <a:ext cx="746234" cy="173421"/>
-            </a:xfrm>
-            <a:prstGeom prst="homePlate">
-              <a:avLst/>
-            </a:prstGeom>
-            <a:solidFill>
-              <a:schemeClr val="tx2">
-                <a:lumMod val="75000"/>
-                <a:lumOff val="25000"/>
-              </a:schemeClr>
-            </a:solidFill>
-            <a:ln>
-              <a:solidFill>
-                <a:schemeClr val="tx1"/>
-              </a:solidFill>
-            </a:ln>
-          </p:spPr>
-          <p:style>
-            <a:lnRef idx="2">
-              <a:schemeClr val="accent1">
-                <a:shade val="15000"/>
-              </a:schemeClr>
-            </a:lnRef>
-            <a:fillRef idx="1">
-              <a:schemeClr val="accent1"/>
-            </a:fillRef>
-            <a:effectRef idx="0">
-              <a:schemeClr val="accent1"/>
-            </a:effectRef>
-            <a:fontRef idx="minor">
-              <a:schemeClr val="lt1"/>
-            </a:fontRef>
-          </p:style>
-          <p:txBody>
-            <a:bodyPr rtlCol="0" anchor="ctr"/>
-            <a:lstStyle/>
-            <a:p>
-              <a:pPr algn="ctr"/>
-              <a:endParaRPr lang="en-NL" dirty="0"/>
-            </a:p>
-          </p:txBody>
-        </p:sp>
-        <p:sp>
-          <p:nvSpPr>
-            <p:cNvPr id="38" name="Arrow: Pentagon 37">
-              <a:extLst>
-                <a:ext uri="{FF2B5EF4-FFF2-40B4-BE49-F238E27FC236}">
-                  <a16:creationId xmlns:a16="http://schemas.microsoft.com/office/drawing/2014/main" id="{D66C399C-22A7-7A82-F481-CD39EFCB40C5}"/>
-                </a:ext>
-              </a:extLst>
-            </p:cNvPr>
-            <p:cNvSpPr/>
-            <p:nvPr/>
-          </p:nvSpPr>
-          <p:spPr>
-            <a:xfrm rot="10800000">
-              <a:off x="4093768" y="4947261"/>
-              <a:ext cx="746234" cy="173421"/>
-            </a:xfrm>
-            <a:prstGeom prst="homePlate">
-              <a:avLst/>
-            </a:prstGeom>
-            <a:solidFill>
-              <a:srgbClr val="C1E5F5"/>
-            </a:solidFill>
-            <a:ln>
-              <a:solidFill>
-                <a:schemeClr val="tx1"/>
-              </a:solidFill>
-            </a:ln>
-          </p:spPr>
-          <p:style>
-            <a:lnRef idx="2">
-              <a:schemeClr val="accent1">
-                <a:shade val="15000"/>
-              </a:schemeClr>
-            </a:lnRef>
-            <a:fillRef idx="1">
-              <a:schemeClr val="accent1"/>
-            </a:fillRef>
-            <a:effectRef idx="0">
-              <a:schemeClr val="accent1"/>
-            </a:effectRef>
-            <a:fontRef idx="minor">
-              <a:schemeClr val="lt1"/>
-            </a:fontRef>
-          </p:style>
-          <p:txBody>
-            <a:bodyPr rtlCol="0" anchor="ctr"/>
-            <a:lstStyle/>
-            <a:p>
-              <a:pPr algn="ctr"/>
-              <a:endParaRPr lang="en-NL" dirty="0"/>
-            </a:p>
-          </p:txBody>
-        </p:sp>
-        <p:sp>
-          <p:nvSpPr>
-            <p:cNvPr id="39" name="TextBox 38">
-              <a:extLst>
-                <a:ext uri="{FF2B5EF4-FFF2-40B4-BE49-F238E27FC236}">
-                  <a16:creationId xmlns:a16="http://schemas.microsoft.com/office/drawing/2014/main" id="{DB66D24E-A68C-C674-F25E-52E597743723}"/>
+                  <a16:creationId xmlns:a16="http://schemas.microsoft.com/office/drawing/2014/main" id="{8E6EDE3B-93EE-1499-5186-09F4C71E7153}"/>
                 </a:ext>
               </a:extLst>
             </p:cNvPr>
@@ -4685,7 +7987,43 @@
           </p:nvSpPr>
           <p:spPr>
             <a:xfrm>
-              <a:off x="756733" y="4653339"/>
+              <a:off x="4540412" y="5195103"/>
+              <a:ext cx="2517239" cy="338554"/>
+            </a:xfrm>
+            <a:prstGeom prst="rect">
+              <a:avLst/>
+            </a:prstGeom>
+            <a:noFill/>
+          </p:spPr>
+          <p:txBody>
+            <a:bodyPr wrap="square" rtlCol="0">
+              <a:spAutoFit/>
+            </a:bodyPr>
+            <a:lstStyle/>
+            <a:p>
+              <a:r>
+                <a:rPr lang="en-GB" sz="1600" b="1" dirty="0" err="1"/>
+                <a:t>unstranded</a:t>
+              </a:r>
+              <a:endParaRPr lang="en-NL" sz="1600" b="1" dirty="0"/>
+            </a:p>
+          </p:txBody>
+        </p:sp>
+        <p:sp>
+          <p:nvSpPr>
+            <p:cNvPr id="71" name="TextBox 70">
+              <a:extLst>
+                <a:ext uri="{FF2B5EF4-FFF2-40B4-BE49-F238E27FC236}">
+                  <a16:creationId xmlns:a16="http://schemas.microsoft.com/office/drawing/2014/main" id="{BD023DDC-765B-03B9-6358-3090305170BA}"/>
+                </a:ext>
+              </a:extLst>
+            </p:cNvPr>
+            <p:cNvSpPr txBox="1"/>
+            <p:nvPr/>
+          </p:nvSpPr>
+          <p:spPr>
+            <a:xfrm>
+              <a:off x="4035448" y="5332607"/>
               <a:ext cx="914400" cy="369332"/>
             </a:xfrm>
             <a:prstGeom prst="rect">
@@ -4700,130 +8038,19 @@
             <a:lstStyle/>
             <a:p>
               <a:r>
-                <a:rPr lang="en-GB" dirty="0"/>
-                <a:t>R2</a:t>
+                <a:rPr lang="en-GB" b="1" dirty="0"/>
+                <a:t>R1</a:t>
               </a:r>
-              <a:endParaRPr lang="en-NL" dirty="0"/>
+              <a:endParaRPr lang="en-NL" b="1" dirty="0"/>
             </a:p>
           </p:txBody>
         </p:sp>
         <p:cxnSp>
           <p:nvCxnSpPr>
-            <p:cNvPr id="40" name="Straight Connector 39">
+            <p:cNvPr id="72" name="Straight Connector 71">
               <a:extLst>
                 <a:ext uri="{FF2B5EF4-FFF2-40B4-BE49-F238E27FC236}">
-                  <a16:creationId xmlns:a16="http://schemas.microsoft.com/office/drawing/2014/main" id="{33FBA9C4-9150-CEC1-9E5E-5B7D40EFF55A}"/>
-                </a:ext>
-              </a:extLst>
-            </p:cNvPr>
-            <p:cNvCxnSpPr>
-              <a:cxnSpLocks/>
-              <a:endCxn id="38" idx="3"/>
-            </p:cNvCxnSpPr>
-            <p:nvPr/>
-          </p:nvCxnSpPr>
-          <p:spPr>
-            <a:xfrm>
-              <a:off x="1587050" y="5022671"/>
-              <a:ext cx="2506718" cy="11300"/>
-            </a:xfrm>
-            <a:prstGeom prst="line">
-              <a:avLst/>
-            </a:prstGeom>
-          </p:spPr>
-          <p:style>
-            <a:lnRef idx="2">
-              <a:schemeClr val="dk1"/>
-            </a:lnRef>
-            <a:fillRef idx="0">
-              <a:schemeClr val="dk1"/>
-            </a:fillRef>
-            <a:effectRef idx="1">
-              <a:schemeClr val="dk1"/>
-            </a:effectRef>
-            <a:fontRef idx="minor">
-              <a:schemeClr val="tx1"/>
-            </a:fontRef>
-          </p:style>
-        </p:cxnSp>
-        <p:sp>
-          <p:nvSpPr>
-            <p:cNvPr id="41" name="TextBox 40">
-              <a:extLst>
-                <a:ext uri="{FF2B5EF4-FFF2-40B4-BE49-F238E27FC236}">
-                  <a16:creationId xmlns:a16="http://schemas.microsoft.com/office/drawing/2014/main" id="{5C8D5E14-678E-D298-4FD2-A0A73AFB4DA5}"/>
-                </a:ext>
-              </a:extLst>
-            </p:cNvPr>
-            <p:cNvSpPr txBox="1"/>
-            <p:nvPr/>
-          </p:nvSpPr>
-          <p:spPr>
-            <a:xfrm>
-              <a:off x="5381288" y="4488539"/>
-              <a:ext cx="2517239" cy="369332"/>
-            </a:xfrm>
-            <a:prstGeom prst="rect">
-              <a:avLst/>
-            </a:prstGeom>
-            <a:noFill/>
-          </p:spPr>
-          <p:txBody>
-            <a:bodyPr wrap="square" rtlCol="0">
-              <a:spAutoFit/>
-            </a:bodyPr>
-            <a:lstStyle/>
-            <a:p>
-              <a:r>
-                <a:rPr lang="en-GB" dirty="0" err="1"/>
-                <a:t>unstranded</a:t>
-              </a:r>
-              <a:endParaRPr lang="en-NL" dirty="0"/>
-            </a:p>
-          </p:txBody>
-        </p:sp>
-        <p:sp>
-          <p:nvSpPr>
-            <p:cNvPr id="42" name="TextBox 41">
-              <a:extLst>
-                <a:ext uri="{FF2B5EF4-FFF2-40B4-BE49-F238E27FC236}">
-                  <a16:creationId xmlns:a16="http://schemas.microsoft.com/office/drawing/2014/main" id="{982B4967-A453-7413-C50F-070AA579BB4D}"/>
-                </a:ext>
-              </a:extLst>
-            </p:cNvPr>
-            <p:cNvSpPr txBox="1"/>
-            <p:nvPr/>
-          </p:nvSpPr>
-          <p:spPr>
-            <a:xfrm>
-              <a:off x="4466888" y="4653339"/>
-              <a:ext cx="914400" cy="369332"/>
-            </a:xfrm>
-            <a:prstGeom prst="rect">
-              <a:avLst/>
-            </a:prstGeom>
-            <a:noFill/>
-          </p:spPr>
-          <p:txBody>
-            <a:bodyPr wrap="square" rtlCol="0">
-              <a:spAutoFit/>
-            </a:bodyPr>
-            <a:lstStyle/>
-            <a:p>
-              <a:r>
-                <a:rPr lang="en-GB" dirty="0"/>
-                <a:t>R1</a:t>
-              </a:r>
-              <a:endParaRPr lang="en-NL" dirty="0"/>
-            </a:p>
-          </p:txBody>
-        </p:sp>
-        <p:cxnSp>
-          <p:nvCxnSpPr>
-            <p:cNvPr id="2" name="Straight Connector 1">
-              <a:extLst>
-                <a:ext uri="{FF2B5EF4-FFF2-40B4-BE49-F238E27FC236}">
-                  <a16:creationId xmlns:a16="http://schemas.microsoft.com/office/drawing/2014/main" id="{852DE008-57A1-CD6D-38DB-6FBDECBD00E4}"/>
+                  <a16:creationId xmlns:a16="http://schemas.microsoft.com/office/drawing/2014/main" id="{4C93E511-FE20-C7B8-214C-482BE2DEF67D}"/>
                 </a:ext>
               </a:extLst>
             </p:cNvPr>
@@ -4833,15 +8060,15 @@
             <p:nvPr/>
           </p:nvCxnSpPr>
           <p:spPr>
-            <a:xfrm>
-              <a:off x="717320" y="2603937"/>
-              <a:ext cx="4167355" cy="0"/>
+            <a:xfrm flipV="1">
+              <a:off x="285880" y="3251987"/>
+              <a:ext cx="6202097" cy="31218"/>
             </a:xfrm>
             <a:prstGeom prst="line">
               <a:avLst/>
             </a:prstGeom>
             <a:ln>
-              <a:prstDash val="sysDash"/>
+              <a:prstDash val="solid"/>
             </a:ln>
           </p:spPr>
           <p:style>
@@ -4860,10 +8087,1710 @@
           </p:style>
         </p:cxnSp>
       </p:grpSp>
+      <p:sp>
+        <p:nvSpPr>
+          <p:cNvPr id="73" name="TextBox 72">
+            <a:extLst>
+              <a:ext uri="{FF2B5EF4-FFF2-40B4-BE49-F238E27FC236}">
+                <a16:creationId xmlns:a16="http://schemas.microsoft.com/office/drawing/2014/main" id="{1944BFE9-D86A-8D0D-769D-84F4C73E1262}"/>
+              </a:ext>
+            </a:extLst>
+          </p:cNvPr>
+          <p:cNvSpPr txBox="1"/>
+          <p:nvPr/>
+        </p:nvSpPr>
+        <p:spPr>
+          <a:xfrm>
+            <a:off x="6659057" y="4934648"/>
+            <a:ext cx="6432114" cy="338554"/>
+          </a:xfrm>
+          <a:prstGeom prst="rect">
+            <a:avLst/>
+          </a:prstGeom>
+          <a:noFill/>
+        </p:spPr>
+        <p:txBody>
+          <a:bodyPr wrap="square">
+            <a:spAutoFit/>
+          </a:bodyPr>
+          <a:lstStyle/>
+          <a:p>
+            <a:r>
+              <a:rPr lang="en-GB" sz="1600" dirty="0">
+                <a:sym typeface="Wingdings" panose="05000000000000000000" pitchFamily="2" charset="2"/>
+              </a:rPr>
+              <a:t> </a:t>
+            </a:r>
+            <a:r>
+              <a:rPr lang="en-GB" sz="1600" dirty="0"/>
+              <a:t>We don’t know from what strand a read came from</a:t>
+            </a:r>
+            <a:endParaRPr lang="en-NL" sz="1600" dirty="0"/>
+          </a:p>
+        </p:txBody>
+      </p:sp>
+      <p:sp>
+        <p:nvSpPr>
+          <p:cNvPr id="74" name="TextBox 73">
+            <a:extLst>
+              <a:ext uri="{FF2B5EF4-FFF2-40B4-BE49-F238E27FC236}">
+                <a16:creationId xmlns:a16="http://schemas.microsoft.com/office/drawing/2014/main" id="{3F24CD0F-3A4C-0C84-6F43-593AB04DB901}"/>
+              </a:ext>
+            </a:extLst>
+          </p:cNvPr>
+          <p:cNvSpPr txBox="1"/>
+          <p:nvPr/>
+        </p:nvSpPr>
+        <p:spPr>
+          <a:xfrm>
+            <a:off x="6659056" y="2667212"/>
+            <a:ext cx="5602977" cy="584775"/>
+          </a:xfrm>
+          <a:prstGeom prst="rect">
+            <a:avLst/>
+          </a:prstGeom>
+          <a:noFill/>
+        </p:spPr>
+        <p:txBody>
+          <a:bodyPr wrap="square">
+            <a:spAutoFit/>
+          </a:bodyPr>
+          <a:lstStyle/>
+          <a:p>
+            <a:r>
+              <a:rPr lang="en-GB" sz="1600" dirty="0">
+                <a:sym typeface="Wingdings" panose="05000000000000000000" pitchFamily="2" charset="2"/>
+              </a:rPr>
+              <a:t> </a:t>
+            </a:r>
+            <a:r>
+              <a:rPr lang="en-GB" sz="1600" dirty="0"/>
+              <a:t>Read 1 runs in the same direction as the transcript (</a:t>
+            </a:r>
+            <a:r>
+              <a:rPr lang="en-GB" sz="1600" b="1" dirty="0">
+                <a:solidFill>
+                  <a:srgbClr val="215F9A"/>
+                </a:solidFill>
+              </a:rPr>
+              <a:t>sense</a:t>
+            </a:r>
+            <a:r>
+              <a:rPr lang="en-GB" sz="1600" dirty="0"/>
+              <a:t>), 	that’s why we call it "direct"</a:t>
+            </a:r>
+          </a:p>
+        </p:txBody>
+      </p:sp>
+      <p:sp>
+        <p:nvSpPr>
+          <p:cNvPr id="75" name="TextBox 74">
+            <a:extLst>
+              <a:ext uri="{FF2B5EF4-FFF2-40B4-BE49-F238E27FC236}">
+                <a16:creationId xmlns:a16="http://schemas.microsoft.com/office/drawing/2014/main" id="{2EAD36D5-B4C4-6AF7-E816-9EFBE834FFE0}"/>
+              </a:ext>
+            </a:extLst>
+          </p:cNvPr>
+          <p:cNvSpPr txBox="1"/>
+          <p:nvPr/>
+        </p:nvSpPr>
+        <p:spPr>
+          <a:xfrm>
+            <a:off x="6659056" y="3800930"/>
+            <a:ext cx="5288025" cy="584775"/>
+          </a:xfrm>
+          <a:prstGeom prst="rect">
+            <a:avLst/>
+          </a:prstGeom>
+          <a:noFill/>
+        </p:spPr>
+        <p:txBody>
+          <a:bodyPr wrap="square">
+            <a:spAutoFit/>
+          </a:bodyPr>
+          <a:lstStyle/>
+          <a:p>
+            <a:r>
+              <a:rPr lang="en-GB" sz="1600" dirty="0">
+                <a:sym typeface="Wingdings" panose="05000000000000000000" pitchFamily="2" charset="2"/>
+              </a:rPr>
+              <a:t> </a:t>
+            </a:r>
+            <a:r>
+              <a:rPr lang="en-GB" sz="1600" dirty="0"/>
+              <a:t>Read 1 runs opposite to the transcript (</a:t>
+            </a:r>
+            <a:r>
+              <a:rPr lang="en-GB" sz="1600" b="1" dirty="0">
+                <a:solidFill>
+                  <a:srgbClr val="3B7D23"/>
+                </a:solidFill>
+              </a:rPr>
+              <a:t>antisense</a:t>
+            </a:r>
+            <a:r>
+              <a:rPr lang="en-GB" sz="1600" dirty="0"/>
+              <a:t>), 	 that’s why we call it "reverse"</a:t>
+            </a:r>
+          </a:p>
+        </p:txBody>
+      </p:sp>
+      <p:sp>
+        <p:nvSpPr>
+          <p:cNvPr id="77" name="TextBox 76">
+            <a:extLst>
+              <a:ext uri="{FF2B5EF4-FFF2-40B4-BE49-F238E27FC236}">
+                <a16:creationId xmlns:a16="http://schemas.microsoft.com/office/drawing/2014/main" id="{7BAD2764-4F6A-57E2-CBB5-5221D8C9C1D1}"/>
+              </a:ext>
+            </a:extLst>
+          </p:cNvPr>
+          <p:cNvSpPr txBox="1"/>
+          <p:nvPr/>
+        </p:nvSpPr>
+        <p:spPr>
+          <a:xfrm>
+            <a:off x="4134168" y="6334780"/>
+            <a:ext cx="8057832" cy="523220"/>
+          </a:xfrm>
+          <a:prstGeom prst="rect">
+            <a:avLst/>
+          </a:prstGeom>
+          <a:noFill/>
+        </p:spPr>
+        <p:txBody>
+          <a:bodyPr wrap="square">
+            <a:spAutoFit/>
+          </a:bodyPr>
+          <a:lstStyle/>
+          <a:p>
+            <a:pPr algn="r"/>
+            <a:r>
+              <a:rPr lang="en-NL" sz="1400" dirty="0"/>
+              <a:t>*first-/second-strand = the cDNA strand whose sequence Read 1 matches.</a:t>
+            </a:r>
+            <a:endParaRPr lang="en-GB" sz="1400" dirty="0"/>
+          </a:p>
+          <a:p>
+            <a:pPr algn="r"/>
+            <a:r>
+              <a:rPr lang="en-NL" sz="1400" dirty="0"/>
+              <a:t> Colours: sequence of first- (green) or second-strand (blue) cDNA, as on the previous slide.</a:t>
+            </a:r>
+          </a:p>
+        </p:txBody>
+      </p:sp>
     </p:spTree>
     <p:extLst>
       <p:ext uri="{BB962C8B-B14F-4D97-AF65-F5344CB8AC3E}">
-        <p14:creationId xmlns:p14="http://schemas.microsoft.com/office/powerpoint/2010/main" val="3960934056"/>
+        <p14:creationId xmlns:p14="http://schemas.microsoft.com/office/powerpoint/2010/main" val="1811978892"/>
+      </p:ext>
+    </p:extLst>
+  </p:cSld>
+  <p:clrMapOvr>
+    <a:masterClrMapping/>
+  </p:clrMapOvr>
+</p:sld>
+</file>
+
+<file path=ppt/slides/slide3.xml><?xml version="1.0" encoding="utf-8"?>
+<p:sld xmlns:a="http://schemas.openxmlformats.org/drawingml/2006/main" xmlns:r="http://schemas.openxmlformats.org/officeDocument/2006/relationships" xmlns:p="http://schemas.openxmlformats.org/presentationml/2006/main">
+  <p:cSld>
+    <p:spTree>
+      <p:nvGrpSpPr>
+        <p:cNvPr id="1" name="">
+          <a:extLst>
+            <a:ext uri="{FF2B5EF4-FFF2-40B4-BE49-F238E27FC236}">
+              <a16:creationId xmlns:a16="http://schemas.microsoft.com/office/drawing/2014/main" id="{40CFDDCB-7BD0-8FC0-2022-937DBB706EFF}"/>
+            </a:ext>
+          </a:extLst>
+        </p:cNvPr>
+        <p:cNvGrpSpPr/>
+        <p:nvPr/>
+      </p:nvGrpSpPr>
+      <p:grpSpPr>
+        <a:xfrm>
+          <a:off x="0" y="0"/>
+          <a:ext cx="0" cy="0"/>
+          <a:chOff x="0" y="0"/>
+          <a:chExt cx="0" cy="0"/>
+        </a:xfrm>
+      </p:grpSpPr>
+      <p:sp>
+        <p:nvSpPr>
+          <p:cNvPr id="7" name="TextBox 6">
+            <a:extLst>
+              <a:ext uri="{FF2B5EF4-FFF2-40B4-BE49-F238E27FC236}">
+                <a16:creationId xmlns:a16="http://schemas.microsoft.com/office/drawing/2014/main" id="{0B9EEFFA-97E0-B2AC-FB57-6AB5806E9E35}"/>
+              </a:ext>
+            </a:extLst>
+          </p:cNvPr>
+          <p:cNvSpPr txBox="1"/>
+          <p:nvPr/>
+        </p:nvSpPr>
+        <p:spPr>
+          <a:xfrm>
+            <a:off x="-190500" y="3338512"/>
+            <a:ext cx="3965548" cy="200055"/>
+          </a:xfrm>
+          <a:prstGeom prst="rect">
+            <a:avLst/>
+          </a:prstGeom>
+          <a:noFill/>
+        </p:spPr>
+        <p:txBody>
+          <a:bodyPr wrap="square">
+            <a:spAutoFit/>
+          </a:bodyPr>
+          <a:lstStyle/>
+          <a:p>
+            <a:pPr algn="r"/>
+            <a:r>
+              <a:rPr lang="en-NL" sz="700" b="1" dirty="0">
+                <a:solidFill>
+                  <a:schemeClr val="bg1"/>
+                </a:solidFill>
+              </a:rPr>
+              <a:t>https://images.marinespecies.org/thumbs/48541_cymodocea-nodosa.jpg</a:t>
+            </a:r>
+          </a:p>
+        </p:txBody>
+      </p:sp>
+      <p:sp>
+        <p:nvSpPr>
+          <p:cNvPr id="8" name="TextBox 7">
+            <a:extLst>
+              <a:ext uri="{FF2B5EF4-FFF2-40B4-BE49-F238E27FC236}">
+                <a16:creationId xmlns:a16="http://schemas.microsoft.com/office/drawing/2014/main" id="{96A266D2-AB59-0C86-C3CC-71C67E14F4D3}"/>
+              </a:ext>
+            </a:extLst>
+          </p:cNvPr>
+          <p:cNvSpPr txBox="1"/>
+          <p:nvPr/>
+        </p:nvSpPr>
+        <p:spPr>
+          <a:xfrm>
+            <a:off x="279226" y="914401"/>
+            <a:ext cx="12409640" cy="430887"/>
+          </a:xfrm>
+          <a:prstGeom prst="rect">
+            <a:avLst/>
+          </a:prstGeom>
+          <a:noFill/>
+        </p:spPr>
+        <p:txBody>
+          <a:bodyPr wrap="square" rtlCol="0">
+            <a:spAutoFit/>
+          </a:bodyPr>
+          <a:lstStyle/>
+          <a:p>
+            <a:r>
+              <a:rPr lang="en-GB" sz="2200" dirty="0"/>
+              <a:t>Why we care:</a:t>
+            </a:r>
+            <a:endParaRPr lang="en-NL" sz="2200" dirty="0"/>
+          </a:p>
+        </p:txBody>
+      </p:sp>
+      <p:pic>
+        <p:nvPicPr>
+          <p:cNvPr id="5" name="Picture 4">
+            <a:extLst>
+              <a:ext uri="{FF2B5EF4-FFF2-40B4-BE49-F238E27FC236}">
+                <a16:creationId xmlns:a16="http://schemas.microsoft.com/office/drawing/2014/main" id="{F1295D50-B8F8-63E0-69FC-AD3EF28C8275}"/>
+              </a:ext>
+            </a:extLst>
+          </p:cNvPr>
+          <p:cNvPicPr>
+            <a:picLocks noChangeAspect="1"/>
+          </p:cNvPicPr>
+          <p:nvPr/>
+        </p:nvPicPr>
+        <p:blipFill>
+          <a:blip r:embed="rId3">
+            <a:extLst>
+              <a:ext uri="{28A0092B-C50C-407E-A947-70E740481C1C}">
+                <a14:useLocalDpi xmlns:a14="http://schemas.microsoft.com/office/drawing/2010/main" val="0"/>
+              </a:ext>
+            </a:extLst>
+          </a:blip>
+          <a:srcRect b="49278"/>
+          <a:stretch>
+            <a:fillRect/>
+          </a:stretch>
+        </p:blipFill>
+        <p:spPr>
+          <a:xfrm>
+            <a:off x="417155" y="1517767"/>
+            <a:ext cx="6174062" cy="2641534"/>
+          </a:xfrm>
+          <a:prstGeom prst="rect">
+            <a:avLst/>
+          </a:prstGeom>
+        </p:spPr>
+      </p:pic>
+      <p:sp>
+        <p:nvSpPr>
+          <p:cNvPr id="19" name="TextBox 18">
+            <a:extLst>
+              <a:ext uri="{FF2B5EF4-FFF2-40B4-BE49-F238E27FC236}">
+                <a16:creationId xmlns:a16="http://schemas.microsoft.com/office/drawing/2014/main" id="{2A41B9A5-E21E-FBCE-D6F5-7E9423272120}"/>
+              </a:ext>
+            </a:extLst>
+          </p:cNvPr>
+          <p:cNvSpPr txBox="1"/>
+          <p:nvPr/>
+        </p:nvSpPr>
+        <p:spPr>
+          <a:xfrm>
+            <a:off x="555350" y="1443662"/>
+            <a:ext cx="3528135" cy="338554"/>
+          </a:xfrm>
+          <a:prstGeom prst="rect">
+            <a:avLst/>
+          </a:prstGeom>
+          <a:noFill/>
+        </p:spPr>
+        <p:txBody>
+          <a:bodyPr wrap="square" rtlCol="0">
+            <a:spAutoFit/>
+          </a:bodyPr>
+          <a:lstStyle/>
+          <a:p>
+            <a:r>
+              <a:rPr lang="en-GB" sz="1600" b="1" dirty="0" err="1"/>
+              <a:t>Unstranded</a:t>
+            </a:r>
+            <a:r>
+              <a:rPr lang="en-GB" sz="1600" b="1" dirty="0"/>
+              <a:t> sequencing protocol</a:t>
+            </a:r>
+            <a:endParaRPr lang="en-NL" sz="1600" b="1" dirty="0"/>
+          </a:p>
+        </p:txBody>
+      </p:sp>
+      <p:sp>
+        <p:nvSpPr>
+          <p:cNvPr id="23" name="TextBox 22">
+            <a:extLst>
+              <a:ext uri="{FF2B5EF4-FFF2-40B4-BE49-F238E27FC236}">
+                <a16:creationId xmlns:a16="http://schemas.microsoft.com/office/drawing/2014/main" id="{D7B16A9D-AA44-0E04-D7B1-7380BEC42FA6}"/>
+              </a:ext>
+            </a:extLst>
+          </p:cNvPr>
+          <p:cNvSpPr txBox="1"/>
+          <p:nvPr/>
+        </p:nvSpPr>
+        <p:spPr>
+          <a:xfrm>
+            <a:off x="8305800" y="6599705"/>
+            <a:ext cx="3886200" cy="276999"/>
+          </a:xfrm>
+          <a:prstGeom prst="rect">
+            <a:avLst/>
+          </a:prstGeom>
+          <a:noFill/>
+        </p:spPr>
+        <p:txBody>
+          <a:bodyPr wrap="square">
+            <a:spAutoFit/>
+          </a:bodyPr>
+          <a:lstStyle/>
+          <a:p>
+            <a:pPr algn="r"/>
+            <a:r>
+              <a:rPr lang="en-NL" sz="1200" dirty="0"/>
+              <a:t>Griffith </a:t>
+            </a:r>
+            <a:r>
+              <a:rPr lang="en-GB" sz="1200" dirty="0"/>
+              <a:t>et al., 2015; </a:t>
+            </a:r>
+            <a:r>
+              <a:rPr lang="fr-FR" sz="1200" dirty="0"/>
+              <a:t>doi:10.1371/journal.pcbi.1004393</a:t>
+            </a:r>
+            <a:endParaRPr lang="en-NL" sz="1200" dirty="0"/>
+          </a:p>
+        </p:txBody>
+      </p:sp>
+      <p:sp>
+        <p:nvSpPr>
+          <p:cNvPr id="12" name="TextBox 11">
+            <a:extLst>
+              <a:ext uri="{FF2B5EF4-FFF2-40B4-BE49-F238E27FC236}">
+                <a16:creationId xmlns:a16="http://schemas.microsoft.com/office/drawing/2014/main" id="{8C5D5527-6747-5411-766F-6E8840283C40}"/>
+              </a:ext>
+            </a:extLst>
+          </p:cNvPr>
+          <p:cNvSpPr txBox="1"/>
+          <p:nvPr/>
+        </p:nvSpPr>
+        <p:spPr>
+          <a:xfrm>
+            <a:off x="6591217" y="3287609"/>
+            <a:ext cx="5724000" cy="738664"/>
+          </a:xfrm>
+          <a:prstGeom prst="rect">
+            <a:avLst/>
+          </a:prstGeom>
+          <a:noFill/>
+        </p:spPr>
+        <p:txBody>
+          <a:bodyPr wrap="square">
+            <a:spAutoFit/>
+          </a:bodyPr>
+          <a:lstStyle/>
+          <a:p>
+            <a:r>
+              <a:rPr lang="en-GB" sz="1400" dirty="0"/>
+              <a:t>Green (+) gene:</a:t>
+            </a:r>
+          </a:p>
+          <a:p>
+            <a:r>
+              <a:rPr lang="en-NL" sz="1400" dirty="0"/>
+              <a:t>~50% of read pairs appear to come from +, ~50% from –</a:t>
+            </a:r>
+            <a:endParaRPr lang="en-GB" sz="1400" dirty="0"/>
+          </a:p>
+          <a:p>
+            <a:r>
+              <a:rPr lang="en-GB" sz="1400" dirty="0">
+                <a:sym typeface="Wingdings" panose="05000000000000000000" pitchFamily="2" charset="2"/>
+              </a:rPr>
+              <a:t> This tells us nothing about the gene’s strand</a:t>
+            </a:r>
+            <a:endParaRPr lang="en-NL" sz="1400" dirty="0"/>
+          </a:p>
+        </p:txBody>
+      </p:sp>
+      <p:sp>
+        <p:nvSpPr>
+          <p:cNvPr id="3" name="TextBox 2">
+            <a:extLst>
+              <a:ext uri="{FF2B5EF4-FFF2-40B4-BE49-F238E27FC236}">
+                <a16:creationId xmlns:a16="http://schemas.microsoft.com/office/drawing/2014/main" id="{175B56A8-2C65-53B8-7192-0F9D875DF03E}"/>
+              </a:ext>
+            </a:extLst>
+          </p:cNvPr>
+          <p:cNvSpPr txBox="1"/>
+          <p:nvPr/>
+        </p:nvSpPr>
+        <p:spPr>
+          <a:xfrm>
+            <a:off x="6591217" y="1724041"/>
+            <a:ext cx="5600783" cy="1169551"/>
+          </a:xfrm>
+          <a:prstGeom prst="rect">
+            <a:avLst/>
+          </a:prstGeom>
+          <a:noFill/>
+        </p:spPr>
+        <p:txBody>
+          <a:bodyPr wrap="square" rtlCol="0">
+            <a:spAutoFit/>
+          </a:bodyPr>
+          <a:lstStyle/>
+          <a:p>
+            <a:r>
+              <a:rPr lang="en-NL" sz="1400" b="1" dirty="0"/>
+              <a:t>Colours</a:t>
+            </a:r>
+            <a:r>
+              <a:rPr lang="en-GB" sz="1400" b="1" dirty="0"/>
+              <a:t> =	 genome strand (+/-) a pair appears to come from</a:t>
+            </a:r>
+          </a:p>
+          <a:p>
+            <a:pPr lvl="2"/>
+            <a:r>
+              <a:rPr lang="en-NL" sz="1400" dirty="0"/>
+              <a:t>not cDNA strand as on the previous slide</a:t>
+            </a:r>
+            <a:br>
+              <a:rPr lang="en-NL" sz="1400" dirty="0"/>
+            </a:br>
+            <a:endParaRPr lang="en-GB" sz="1400" dirty="0"/>
+          </a:p>
+          <a:p>
+            <a:pPr lvl="2"/>
+            <a:r>
+              <a:rPr lang="en-GB" sz="1400" dirty="0">
+                <a:sym typeface="Wingdings" panose="05000000000000000000" pitchFamily="2" charset="2"/>
+              </a:rPr>
+              <a:t></a:t>
+            </a:r>
+            <a:r>
+              <a:rPr lang="en-GB" sz="1400" dirty="0"/>
+              <a:t> </a:t>
+            </a:r>
+            <a:r>
+              <a:rPr lang="en-NL" sz="1400" b="1" dirty="0"/>
+              <a:t>Blue</a:t>
+            </a:r>
+            <a:r>
+              <a:rPr lang="en-NL" sz="1400" dirty="0"/>
+              <a:t> = </a:t>
+            </a:r>
+            <a:r>
+              <a:rPr lang="en-NL" sz="1400" b="1" dirty="0"/>
+              <a:t>forward (+)</a:t>
+            </a:r>
+            <a:r>
+              <a:rPr lang="en-NL" sz="1400" dirty="0"/>
+              <a:t> strand </a:t>
+            </a:r>
+            <a:endParaRPr lang="en-GB" sz="1400" dirty="0"/>
+          </a:p>
+          <a:p>
+            <a:pPr lvl="2"/>
+            <a:r>
+              <a:rPr lang="en-GB" sz="1400" b="1" dirty="0">
+                <a:sym typeface="Wingdings" panose="05000000000000000000" pitchFamily="2" charset="2"/>
+              </a:rPr>
+              <a:t></a:t>
+            </a:r>
+            <a:r>
+              <a:rPr lang="en-GB" sz="1400" b="1" dirty="0"/>
+              <a:t> R</a:t>
+            </a:r>
+            <a:r>
+              <a:rPr lang="en-NL" sz="1400" b="1" dirty="0"/>
+              <a:t>ed</a:t>
+            </a:r>
+            <a:r>
+              <a:rPr lang="en-NL" sz="1400" dirty="0"/>
+              <a:t> = </a:t>
+            </a:r>
+            <a:r>
+              <a:rPr lang="en-GB" sz="1400" dirty="0"/>
+              <a:t>  </a:t>
+            </a:r>
+            <a:r>
+              <a:rPr lang="en-NL" sz="1400" b="1" dirty="0"/>
+              <a:t>reverse (–)</a:t>
+            </a:r>
+            <a:r>
+              <a:rPr lang="en-NL" sz="1400" dirty="0"/>
+              <a:t> strand</a:t>
+            </a:r>
+            <a:endParaRPr lang="en-GB" sz="1400" dirty="0"/>
+          </a:p>
+        </p:txBody>
+      </p:sp>
+    </p:spTree>
+    <p:extLst>
+      <p:ext uri="{BB962C8B-B14F-4D97-AF65-F5344CB8AC3E}">
+        <p14:creationId xmlns:p14="http://schemas.microsoft.com/office/powerpoint/2010/main" val="3033509731"/>
+      </p:ext>
+    </p:extLst>
+  </p:cSld>
+  <p:clrMapOvr>
+    <a:masterClrMapping/>
+  </p:clrMapOvr>
+</p:sld>
+</file>
+
+<file path=ppt/slides/slide4.xml><?xml version="1.0" encoding="utf-8"?>
+<p:sld xmlns:a="http://schemas.openxmlformats.org/drawingml/2006/main" xmlns:r="http://schemas.openxmlformats.org/officeDocument/2006/relationships" xmlns:p="http://schemas.openxmlformats.org/presentationml/2006/main">
+  <p:cSld>
+    <p:spTree>
+      <p:nvGrpSpPr>
+        <p:cNvPr id="1" name="">
+          <a:extLst>
+            <a:ext uri="{FF2B5EF4-FFF2-40B4-BE49-F238E27FC236}">
+              <a16:creationId xmlns:a16="http://schemas.microsoft.com/office/drawing/2014/main" id="{AE5C67E5-C9DF-F3AD-DF74-CEC81E9CF0F9}"/>
+            </a:ext>
+          </a:extLst>
+        </p:cNvPr>
+        <p:cNvGrpSpPr/>
+        <p:nvPr/>
+      </p:nvGrpSpPr>
+      <p:grpSpPr>
+        <a:xfrm>
+          <a:off x="0" y="0"/>
+          <a:ext cx="0" cy="0"/>
+          <a:chOff x="0" y="0"/>
+          <a:chExt cx="0" cy="0"/>
+        </a:xfrm>
+      </p:grpSpPr>
+      <p:sp>
+        <p:nvSpPr>
+          <p:cNvPr id="7" name="TextBox 6">
+            <a:extLst>
+              <a:ext uri="{FF2B5EF4-FFF2-40B4-BE49-F238E27FC236}">
+                <a16:creationId xmlns:a16="http://schemas.microsoft.com/office/drawing/2014/main" id="{7F684EF0-9B7B-F0AE-A878-D2CFAD35DA35}"/>
+              </a:ext>
+            </a:extLst>
+          </p:cNvPr>
+          <p:cNvSpPr txBox="1"/>
+          <p:nvPr/>
+        </p:nvSpPr>
+        <p:spPr>
+          <a:xfrm>
+            <a:off x="-190500" y="3338512"/>
+            <a:ext cx="3965548" cy="200055"/>
+          </a:xfrm>
+          <a:prstGeom prst="rect">
+            <a:avLst/>
+          </a:prstGeom>
+          <a:noFill/>
+        </p:spPr>
+        <p:txBody>
+          <a:bodyPr wrap="square">
+            <a:spAutoFit/>
+          </a:bodyPr>
+          <a:lstStyle/>
+          <a:p>
+            <a:pPr algn="r"/>
+            <a:r>
+              <a:rPr lang="en-NL" sz="700" b="1" dirty="0">
+                <a:solidFill>
+                  <a:schemeClr val="bg1"/>
+                </a:solidFill>
+              </a:rPr>
+              <a:t>https://images.marinespecies.org/thumbs/48541_cymodocea-nodosa.jpg</a:t>
+            </a:r>
+          </a:p>
+        </p:txBody>
+      </p:sp>
+      <p:sp>
+        <p:nvSpPr>
+          <p:cNvPr id="8" name="TextBox 7">
+            <a:extLst>
+              <a:ext uri="{FF2B5EF4-FFF2-40B4-BE49-F238E27FC236}">
+                <a16:creationId xmlns:a16="http://schemas.microsoft.com/office/drawing/2014/main" id="{61866592-AE69-FA13-7623-E3187CDC0E20}"/>
+              </a:ext>
+            </a:extLst>
+          </p:cNvPr>
+          <p:cNvSpPr txBox="1"/>
+          <p:nvPr/>
+        </p:nvSpPr>
+        <p:spPr>
+          <a:xfrm>
+            <a:off x="279226" y="914401"/>
+            <a:ext cx="12409640" cy="430887"/>
+          </a:xfrm>
+          <a:prstGeom prst="rect">
+            <a:avLst/>
+          </a:prstGeom>
+          <a:noFill/>
+        </p:spPr>
+        <p:txBody>
+          <a:bodyPr wrap="square" rtlCol="0">
+            <a:spAutoFit/>
+          </a:bodyPr>
+          <a:lstStyle/>
+          <a:p>
+            <a:r>
+              <a:rPr lang="en-GB" sz="2200" dirty="0"/>
+              <a:t>Why we care:</a:t>
+            </a:r>
+            <a:endParaRPr lang="en-NL" sz="2200" dirty="0"/>
+          </a:p>
+        </p:txBody>
+      </p:sp>
+      <p:pic>
+        <p:nvPicPr>
+          <p:cNvPr id="5" name="Picture 4">
+            <a:extLst>
+              <a:ext uri="{FF2B5EF4-FFF2-40B4-BE49-F238E27FC236}">
+                <a16:creationId xmlns:a16="http://schemas.microsoft.com/office/drawing/2014/main" id="{F5343BF3-884F-C84C-A115-3540CE69A0E1}"/>
+              </a:ext>
+            </a:extLst>
+          </p:cNvPr>
+          <p:cNvPicPr>
+            <a:picLocks noChangeAspect="1"/>
+          </p:cNvPicPr>
+          <p:nvPr/>
+        </p:nvPicPr>
+        <p:blipFill>
+          <a:blip r:embed="rId3">
+            <a:extLst>
+              <a:ext uri="{28A0092B-C50C-407E-A947-70E740481C1C}">
+                <a14:useLocalDpi xmlns:a14="http://schemas.microsoft.com/office/drawing/2010/main" val="0"/>
+              </a:ext>
+            </a:extLst>
+          </a:blip>
+          <a:stretch>
+            <a:fillRect/>
+          </a:stretch>
+        </p:blipFill>
+        <p:spPr>
+          <a:xfrm>
+            <a:off x="417155" y="1517767"/>
+            <a:ext cx="6174062" cy="5207912"/>
+          </a:xfrm>
+          <a:prstGeom prst="rect">
+            <a:avLst/>
+          </a:prstGeom>
+        </p:spPr>
+      </p:pic>
+      <p:sp>
+        <p:nvSpPr>
+          <p:cNvPr id="19" name="TextBox 18">
+            <a:extLst>
+              <a:ext uri="{FF2B5EF4-FFF2-40B4-BE49-F238E27FC236}">
+                <a16:creationId xmlns:a16="http://schemas.microsoft.com/office/drawing/2014/main" id="{A40611D1-7644-90C5-B964-19002E8E9D22}"/>
+              </a:ext>
+            </a:extLst>
+          </p:cNvPr>
+          <p:cNvSpPr txBox="1"/>
+          <p:nvPr/>
+        </p:nvSpPr>
+        <p:spPr>
+          <a:xfrm>
+            <a:off x="555350" y="1443662"/>
+            <a:ext cx="3528135" cy="338554"/>
+          </a:xfrm>
+          <a:prstGeom prst="rect">
+            <a:avLst/>
+          </a:prstGeom>
+          <a:noFill/>
+        </p:spPr>
+        <p:txBody>
+          <a:bodyPr wrap="square" rtlCol="0">
+            <a:spAutoFit/>
+          </a:bodyPr>
+          <a:lstStyle/>
+          <a:p>
+            <a:r>
+              <a:rPr lang="en-GB" sz="1600" b="1" dirty="0" err="1"/>
+              <a:t>Unstranded</a:t>
+            </a:r>
+            <a:r>
+              <a:rPr lang="en-GB" sz="1600" b="1" dirty="0"/>
+              <a:t> sequencing protocol</a:t>
+            </a:r>
+            <a:endParaRPr lang="en-NL" sz="1600" b="1" dirty="0"/>
+          </a:p>
+        </p:txBody>
+      </p:sp>
+      <p:sp>
+        <p:nvSpPr>
+          <p:cNvPr id="21" name="TextBox 20">
+            <a:extLst>
+              <a:ext uri="{FF2B5EF4-FFF2-40B4-BE49-F238E27FC236}">
+                <a16:creationId xmlns:a16="http://schemas.microsoft.com/office/drawing/2014/main" id="{06ADFD29-3D2C-66EC-1E93-906BA5EB6F6B}"/>
+              </a:ext>
+            </a:extLst>
+          </p:cNvPr>
+          <p:cNvSpPr txBox="1"/>
+          <p:nvPr/>
+        </p:nvSpPr>
+        <p:spPr>
+          <a:xfrm>
+            <a:off x="555350" y="4159301"/>
+            <a:ext cx="3528135" cy="338554"/>
+          </a:xfrm>
+          <a:prstGeom prst="rect">
+            <a:avLst/>
+          </a:prstGeom>
+          <a:noFill/>
+        </p:spPr>
+        <p:txBody>
+          <a:bodyPr wrap="square" rtlCol="0">
+            <a:spAutoFit/>
+          </a:bodyPr>
+          <a:lstStyle/>
+          <a:p>
+            <a:r>
+              <a:rPr lang="en-GB" sz="1600" b="1" dirty="0"/>
+              <a:t>Stranded sequencing protocol</a:t>
+            </a:r>
+            <a:endParaRPr lang="en-NL" sz="1600" b="1" dirty="0"/>
+          </a:p>
+        </p:txBody>
+      </p:sp>
+      <p:sp>
+        <p:nvSpPr>
+          <p:cNvPr id="23" name="TextBox 22">
+            <a:extLst>
+              <a:ext uri="{FF2B5EF4-FFF2-40B4-BE49-F238E27FC236}">
+                <a16:creationId xmlns:a16="http://schemas.microsoft.com/office/drawing/2014/main" id="{EE5DCFC4-558A-7BB3-379B-BA341AF05922}"/>
+              </a:ext>
+            </a:extLst>
+          </p:cNvPr>
+          <p:cNvSpPr txBox="1"/>
+          <p:nvPr/>
+        </p:nvSpPr>
+        <p:spPr>
+          <a:xfrm>
+            <a:off x="8305800" y="6599705"/>
+            <a:ext cx="3886200" cy="276999"/>
+          </a:xfrm>
+          <a:prstGeom prst="rect">
+            <a:avLst/>
+          </a:prstGeom>
+          <a:noFill/>
+        </p:spPr>
+        <p:txBody>
+          <a:bodyPr wrap="square">
+            <a:spAutoFit/>
+          </a:bodyPr>
+          <a:lstStyle/>
+          <a:p>
+            <a:pPr algn="r"/>
+            <a:r>
+              <a:rPr lang="en-NL" sz="1200" dirty="0"/>
+              <a:t>Griffith </a:t>
+            </a:r>
+            <a:r>
+              <a:rPr lang="en-GB" sz="1200" dirty="0"/>
+              <a:t>et al., 2015; </a:t>
+            </a:r>
+            <a:r>
+              <a:rPr lang="fr-FR" sz="1200" dirty="0"/>
+              <a:t>doi:10.1371/journal.pcbi.1004393</a:t>
+            </a:r>
+            <a:endParaRPr lang="en-NL" sz="1200" dirty="0"/>
+          </a:p>
+        </p:txBody>
+      </p:sp>
+      <p:sp>
+        <p:nvSpPr>
+          <p:cNvPr id="12" name="TextBox 11">
+            <a:extLst>
+              <a:ext uri="{FF2B5EF4-FFF2-40B4-BE49-F238E27FC236}">
+                <a16:creationId xmlns:a16="http://schemas.microsoft.com/office/drawing/2014/main" id="{D0089872-91F0-A25C-37C5-9A365735DC47}"/>
+              </a:ext>
+            </a:extLst>
+          </p:cNvPr>
+          <p:cNvSpPr txBox="1"/>
+          <p:nvPr/>
+        </p:nvSpPr>
+        <p:spPr>
+          <a:xfrm>
+            <a:off x="6591217" y="5682468"/>
+            <a:ext cx="6438378" cy="738664"/>
+          </a:xfrm>
+          <a:prstGeom prst="rect">
+            <a:avLst/>
+          </a:prstGeom>
+          <a:noFill/>
+        </p:spPr>
+        <p:txBody>
+          <a:bodyPr wrap="square">
+            <a:spAutoFit/>
+          </a:bodyPr>
+          <a:lstStyle/>
+          <a:p>
+            <a:r>
+              <a:rPr lang="en-GB" sz="1400" dirty="0"/>
+              <a:t>Green (+) gene:</a:t>
+            </a:r>
+          </a:p>
+          <a:p>
+            <a:r>
+              <a:rPr lang="en-NL" sz="1400" dirty="0"/>
+              <a:t>All read pairs appear to come from +, the gene's own strand</a:t>
+            </a:r>
+            <a:endParaRPr lang="en-GB" sz="1400" dirty="0"/>
+          </a:p>
+          <a:p>
+            <a:r>
+              <a:rPr lang="en-GB" sz="1400" dirty="0">
+                <a:sym typeface="Wingdings" panose="05000000000000000000" pitchFamily="2" charset="2"/>
+              </a:rPr>
+              <a:t> The reads tell us the strand of the transcript</a:t>
+            </a:r>
+            <a:endParaRPr lang="en-NL" sz="1400" dirty="0"/>
+          </a:p>
+        </p:txBody>
+      </p:sp>
+      <p:sp>
+        <p:nvSpPr>
+          <p:cNvPr id="13" name="TextBox 12">
+            <a:extLst>
+              <a:ext uri="{FF2B5EF4-FFF2-40B4-BE49-F238E27FC236}">
+                <a16:creationId xmlns:a16="http://schemas.microsoft.com/office/drawing/2014/main" id="{405AB234-16CE-9483-9F0E-4924C7CF1479}"/>
+              </a:ext>
+            </a:extLst>
+          </p:cNvPr>
+          <p:cNvSpPr txBox="1"/>
+          <p:nvPr/>
+        </p:nvSpPr>
+        <p:spPr>
+          <a:xfrm>
+            <a:off x="6591217" y="1724041"/>
+            <a:ext cx="5600783" cy="1169551"/>
+          </a:xfrm>
+          <a:prstGeom prst="rect">
+            <a:avLst/>
+          </a:prstGeom>
+          <a:noFill/>
+        </p:spPr>
+        <p:txBody>
+          <a:bodyPr wrap="square" rtlCol="0">
+            <a:spAutoFit/>
+          </a:bodyPr>
+          <a:lstStyle/>
+          <a:p>
+            <a:r>
+              <a:rPr lang="en-NL" sz="1400" b="1" dirty="0"/>
+              <a:t>Colours</a:t>
+            </a:r>
+            <a:r>
+              <a:rPr lang="en-GB" sz="1400" b="1" dirty="0"/>
+              <a:t> =	 genome strand (+/-) a pair appears to come from</a:t>
+            </a:r>
+          </a:p>
+          <a:p>
+            <a:pPr lvl="2"/>
+            <a:r>
+              <a:rPr lang="en-NL" sz="1400" dirty="0"/>
+              <a:t>not cDNA strand as on the previous slide</a:t>
+            </a:r>
+            <a:br>
+              <a:rPr lang="en-NL" sz="1400" dirty="0"/>
+            </a:br>
+            <a:endParaRPr lang="en-GB" sz="1400" dirty="0"/>
+          </a:p>
+          <a:p>
+            <a:pPr lvl="2"/>
+            <a:r>
+              <a:rPr lang="en-GB" sz="1400" dirty="0">
+                <a:sym typeface="Wingdings" panose="05000000000000000000" pitchFamily="2" charset="2"/>
+              </a:rPr>
+              <a:t></a:t>
+            </a:r>
+            <a:r>
+              <a:rPr lang="en-GB" sz="1400" dirty="0"/>
+              <a:t> </a:t>
+            </a:r>
+            <a:r>
+              <a:rPr lang="en-NL" sz="1400" b="1" dirty="0"/>
+              <a:t>Blue</a:t>
+            </a:r>
+            <a:r>
+              <a:rPr lang="en-NL" sz="1400" dirty="0"/>
+              <a:t> = </a:t>
+            </a:r>
+            <a:r>
+              <a:rPr lang="en-NL" sz="1400" b="1" dirty="0"/>
+              <a:t>forward (+)</a:t>
+            </a:r>
+            <a:r>
+              <a:rPr lang="en-NL" sz="1400" dirty="0"/>
+              <a:t> strand </a:t>
+            </a:r>
+            <a:endParaRPr lang="en-GB" sz="1400" dirty="0"/>
+          </a:p>
+          <a:p>
+            <a:pPr lvl="2"/>
+            <a:r>
+              <a:rPr lang="en-GB" sz="1400" b="1" dirty="0">
+                <a:sym typeface="Wingdings" panose="05000000000000000000" pitchFamily="2" charset="2"/>
+              </a:rPr>
+              <a:t></a:t>
+            </a:r>
+            <a:r>
+              <a:rPr lang="en-GB" sz="1400" b="1" dirty="0"/>
+              <a:t> R</a:t>
+            </a:r>
+            <a:r>
+              <a:rPr lang="en-NL" sz="1400" b="1" dirty="0"/>
+              <a:t>ed</a:t>
+            </a:r>
+            <a:r>
+              <a:rPr lang="en-NL" sz="1400" dirty="0"/>
+              <a:t> = </a:t>
+            </a:r>
+            <a:r>
+              <a:rPr lang="en-GB" sz="1400" dirty="0"/>
+              <a:t>  </a:t>
+            </a:r>
+            <a:r>
+              <a:rPr lang="en-NL" sz="1400" b="1" dirty="0"/>
+              <a:t>reverse (–)</a:t>
+            </a:r>
+            <a:r>
+              <a:rPr lang="en-NL" sz="1400" dirty="0"/>
+              <a:t> strand</a:t>
+            </a:r>
+            <a:endParaRPr lang="en-GB" sz="1400" dirty="0"/>
+          </a:p>
+        </p:txBody>
+      </p:sp>
+      <p:sp>
+        <p:nvSpPr>
+          <p:cNvPr id="15" name="TextBox 14">
+            <a:extLst>
+              <a:ext uri="{FF2B5EF4-FFF2-40B4-BE49-F238E27FC236}">
+                <a16:creationId xmlns:a16="http://schemas.microsoft.com/office/drawing/2014/main" id="{74C1E42E-EA78-5931-926B-7B6E69A15961}"/>
+              </a:ext>
+            </a:extLst>
+          </p:cNvPr>
+          <p:cNvSpPr txBox="1"/>
+          <p:nvPr/>
+        </p:nvSpPr>
+        <p:spPr>
+          <a:xfrm>
+            <a:off x="6591217" y="3287609"/>
+            <a:ext cx="5724000" cy="738664"/>
+          </a:xfrm>
+          <a:prstGeom prst="rect">
+            <a:avLst/>
+          </a:prstGeom>
+          <a:noFill/>
+        </p:spPr>
+        <p:txBody>
+          <a:bodyPr wrap="square">
+            <a:spAutoFit/>
+          </a:bodyPr>
+          <a:lstStyle/>
+          <a:p>
+            <a:r>
+              <a:rPr lang="en-GB" sz="1400" dirty="0"/>
+              <a:t>Green (+) gene:</a:t>
+            </a:r>
+          </a:p>
+          <a:p>
+            <a:r>
+              <a:rPr lang="en-NL" sz="1400" dirty="0"/>
+              <a:t>~50% of read pairs appear to come from +, ~50% from –</a:t>
+            </a:r>
+            <a:endParaRPr lang="en-GB" sz="1400" dirty="0"/>
+          </a:p>
+          <a:p>
+            <a:r>
+              <a:rPr lang="en-GB" sz="1400" dirty="0">
+                <a:sym typeface="Wingdings" panose="05000000000000000000" pitchFamily="2" charset="2"/>
+              </a:rPr>
+              <a:t> This tells us nothing about the gene’s strand</a:t>
+            </a:r>
+            <a:endParaRPr lang="en-NL" sz="1400" dirty="0"/>
+          </a:p>
+        </p:txBody>
+      </p:sp>
+      <p:sp>
+        <p:nvSpPr>
+          <p:cNvPr id="3" name="TextBox 2">
+            <a:extLst>
+              <a:ext uri="{FF2B5EF4-FFF2-40B4-BE49-F238E27FC236}">
+                <a16:creationId xmlns:a16="http://schemas.microsoft.com/office/drawing/2014/main" id="{50F805DA-D78E-1AE5-18B5-F1B55223517A}"/>
+              </a:ext>
+            </a:extLst>
+          </p:cNvPr>
+          <p:cNvSpPr txBox="1"/>
+          <p:nvPr/>
+        </p:nvSpPr>
+        <p:spPr>
+          <a:xfrm>
+            <a:off x="6591216" y="4497855"/>
+            <a:ext cx="5600783" cy="738664"/>
+          </a:xfrm>
+          <a:prstGeom prst="rect">
+            <a:avLst/>
+          </a:prstGeom>
+          <a:noFill/>
+        </p:spPr>
+        <p:txBody>
+          <a:bodyPr wrap="square">
+            <a:spAutoFit/>
+          </a:bodyPr>
+          <a:lstStyle/>
+          <a:p>
+            <a:r>
+              <a:rPr lang="en-NL" sz="1400" dirty="0"/>
+              <a:t>In a stranded library, R1 always has the same orientation </a:t>
+            </a:r>
+            <a:r>
+              <a:rPr lang="en-NL" sz="1400" b="1" dirty="0"/>
+              <a:t>relative to the transcript</a:t>
+            </a:r>
+            <a:r>
+              <a:rPr lang="en-NL" sz="1400" dirty="0"/>
+              <a:t> </a:t>
+            </a:r>
+            <a:r>
+              <a:rPr lang="en-GB" sz="1400" dirty="0"/>
+              <a:t>. </a:t>
+            </a:r>
+            <a:r>
+              <a:rPr lang="en-NL" sz="1400" dirty="0"/>
+              <a:t>Combined with where the pair maps, this tells us the transcript's strand </a:t>
+            </a:r>
+            <a:r>
+              <a:rPr lang="en-NL" sz="1400" b="1" dirty="0"/>
+              <a:t>relative to the genome</a:t>
+            </a:r>
+            <a:r>
+              <a:rPr lang="en-NL" sz="1400" dirty="0"/>
+              <a:t>.</a:t>
+            </a:r>
+          </a:p>
+        </p:txBody>
+      </p:sp>
+      <p:cxnSp>
+        <p:nvCxnSpPr>
+          <p:cNvPr id="4" name="Straight Arrow Connector 3">
+            <a:extLst>
+              <a:ext uri="{FF2B5EF4-FFF2-40B4-BE49-F238E27FC236}">
+                <a16:creationId xmlns:a16="http://schemas.microsoft.com/office/drawing/2014/main" id="{3F828ADD-5514-B775-EC21-D853277FB29A}"/>
+              </a:ext>
+            </a:extLst>
+          </p:cNvPr>
+          <p:cNvCxnSpPr>
+            <a:cxnSpLocks/>
+          </p:cNvCxnSpPr>
+          <p:nvPr/>
+        </p:nvCxnSpPr>
+        <p:spPr>
+          <a:xfrm>
+            <a:off x="8533079" y="5236519"/>
+            <a:ext cx="0" cy="533660"/>
+          </a:xfrm>
+          <a:prstGeom prst="straightConnector1">
+            <a:avLst/>
+          </a:prstGeom>
+          <a:ln>
+            <a:tailEnd type="triangle"/>
+          </a:ln>
+        </p:spPr>
+        <p:style>
+          <a:lnRef idx="2">
+            <a:schemeClr val="dk1"/>
+          </a:lnRef>
+          <a:fillRef idx="0">
+            <a:schemeClr val="dk1"/>
+          </a:fillRef>
+          <a:effectRef idx="1">
+            <a:schemeClr val="dk1"/>
+          </a:effectRef>
+          <a:fontRef idx="minor">
+            <a:schemeClr val="tx1"/>
+          </a:fontRef>
+        </p:style>
+      </p:cxnSp>
+    </p:spTree>
+    <p:extLst>
+      <p:ext uri="{BB962C8B-B14F-4D97-AF65-F5344CB8AC3E}">
+        <p14:creationId xmlns:p14="http://schemas.microsoft.com/office/powerpoint/2010/main" val="2676072630"/>
+      </p:ext>
+    </p:extLst>
+  </p:cSld>
+  <p:clrMapOvr>
+    <a:masterClrMapping/>
+  </p:clrMapOvr>
+</p:sld>
+</file>
+
+<file path=ppt/slides/slide5.xml><?xml version="1.0" encoding="utf-8"?>
+<p:sld xmlns:a="http://schemas.openxmlformats.org/drawingml/2006/main" xmlns:r="http://schemas.openxmlformats.org/officeDocument/2006/relationships" xmlns:p="http://schemas.openxmlformats.org/presentationml/2006/main">
+  <p:cSld>
+    <p:spTree>
+      <p:nvGrpSpPr>
+        <p:cNvPr id="1" name="">
+          <a:extLst>
+            <a:ext uri="{FF2B5EF4-FFF2-40B4-BE49-F238E27FC236}">
+              <a16:creationId xmlns:a16="http://schemas.microsoft.com/office/drawing/2014/main" id="{2AABD9C4-8E95-1422-B024-CFAA7D00BFDD}"/>
+            </a:ext>
+          </a:extLst>
+        </p:cNvPr>
+        <p:cNvGrpSpPr/>
+        <p:nvPr/>
+      </p:nvGrpSpPr>
+      <p:grpSpPr>
+        <a:xfrm>
+          <a:off x="0" y="0"/>
+          <a:ext cx="0" cy="0"/>
+          <a:chOff x="0" y="0"/>
+          <a:chExt cx="0" cy="0"/>
+        </a:xfrm>
+      </p:grpSpPr>
+      <p:sp>
+        <p:nvSpPr>
+          <p:cNvPr id="7" name="TextBox 6">
+            <a:extLst>
+              <a:ext uri="{FF2B5EF4-FFF2-40B4-BE49-F238E27FC236}">
+                <a16:creationId xmlns:a16="http://schemas.microsoft.com/office/drawing/2014/main" id="{C777A62C-FDF0-5F3A-5E02-262C1F74BEDA}"/>
+              </a:ext>
+            </a:extLst>
+          </p:cNvPr>
+          <p:cNvSpPr txBox="1"/>
+          <p:nvPr/>
+        </p:nvSpPr>
+        <p:spPr>
+          <a:xfrm>
+            <a:off x="-190500" y="3338512"/>
+            <a:ext cx="3965548" cy="200055"/>
+          </a:xfrm>
+          <a:prstGeom prst="rect">
+            <a:avLst/>
+          </a:prstGeom>
+          <a:noFill/>
+        </p:spPr>
+        <p:txBody>
+          <a:bodyPr wrap="square">
+            <a:spAutoFit/>
+          </a:bodyPr>
+          <a:lstStyle/>
+          <a:p>
+            <a:pPr algn="r"/>
+            <a:r>
+              <a:rPr lang="en-NL" sz="700" b="1" dirty="0">
+                <a:solidFill>
+                  <a:schemeClr val="bg1"/>
+                </a:solidFill>
+              </a:rPr>
+              <a:t>https://images.marinespecies.org/thumbs/48541_cymodocea-nodosa.jpg</a:t>
+            </a:r>
+          </a:p>
+        </p:txBody>
+      </p:sp>
+      <p:sp>
+        <p:nvSpPr>
+          <p:cNvPr id="8" name="TextBox 7">
+            <a:extLst>
+              <a:ext uri="{FF2B5EF4-FFF2-40B4-BE49-F238E27FC236}">
+                <a16:creationId xmlns:a16="http://schemas.microsoft.com/office/drawing/2014/main" id="{C4D4FB0B-6D8B-C599-FF1F-DBEDB8AC9C11}"/>
+              </a:ext>
+            </a:extLst>
+          </p:cNvPr>
+          <p:cNvSpPr txBox="1"/>
+          <p:nvPr/>
+        </p:nvSpPr>
+        <p:spPr>
+          <a:xfrm>
+            <a:off x="279226" y="914401"/>
+            <a:ext cx="12409640" cy="430887"/>
+          </a:xfrm>
+          <a:prstGeom prst="rect">
+            <a:avLst/>
+          </a:prstGeom>
+          <a:noFill/>
+        </p:spPr>
+        <p:txBody>
+          <a:bodyPr wrap="square" rtlCol="0">
+            <a:spAutoFit/>
+          </a:bodyPr>
+          <a:lstStyle/>
+          <a:p>
+            <a:r>
+              <a:rPr lang="en-GB" sz="2200" dirty="0"/>
+              <a:t>Why we care:</a:t>
+            </a:r>
+            <a:endParaRPr lang="en-NL" sz="2200" dirty="0"/>
+          </a:p>
+        </p:txBody>
+      </p:sp>
+      <p:pic>
+        <p:nvPicPr>
+          <p:cNvPr id="5" name="Picture 4">
+            <a:extLst>
+              <a:ext uri="{FF2B5EF4-FFF2-40B4-BE49-F238E27FC236}">
+                <a16:creationId xmlns:a16="http://schemas.microsoft.com/office/drawing/2014/main" id="{0350FAA4-A6AF-3622-7A93-767EA86B8AD7}"/>
+              </a:ext>
+            </a:extLst>
+          </p:cNvPr>
+          <p:cNvPicPr>
+            <a:picLocks noChangeAspect="1"/>
+          </p:cNvPicPr>
+          <p:nvPr/>
+        </p:nvPicPr>
+        <p:blipFill>
+          <a:blip r:embed="rId3">
+            <a:extLst>
+              <a:ext uri="{28A0092B-C50C-407E-A947-70E740481C1C}">
+                <a14:useLocalDpi xmlns:a14="http://schemas.microsoft.com/office/drawing/2010/main" val="0"/>
+              </a:ext>
+            </a:extLst>
+          </a:blip>
+          <a:stretch>
+            <a:fillRect/>
+          </a:stretch>
+        </p:blipFill>
+        <p:spPr>
+          <a:xfrm>
+            <a:off x="417155" y="1517767"/>
+            <a:ext cx="6174062" cy="5207912"/>
+          </a:xfrm>
+          <a:prstGeom prst="rect">
+            <a:avLst/>
+          </a:prstGeom>
+        </p:spPr>
+      </p:pic>
+      <p:cxnSp>
+        <p:nvCxnSpPr>
+          <p:cNvPr id="9" name="Straight Arrow Connector 8">
+            <a:extLst>
+              <a:ext uri="{FF2B5EF4-FFF2-40B4-BE49-F238E27FC236}">
+                <a16:creationId xmlns:a16="http://schemas.microsoft.com/office/drawing/2014/main" id="{F23075D4-713B-BEDF-395B-F336B237E0CB}"/>
+              </a:ext>
+            </a:extLst>
+          </p:cNvPr>
+          <p:cNvCxnSpPr>
+            <a:cxnSpLocks/>
+          </p:cNvCxnSpPr>
+          <p:nvPr/>
+        </p:nvCxnSpPr>
+        <p:spPr>
+          <a:xfrm flipH="1" flipV="1">
+            <a:off x="5665076" y="4159301"/>
+            <a:ext cx="926141" cy="276508"/>
+          </a:xfrm>
+          <a:prstGeom prst="straightConnector1">
+            <a:avLst/>
+          </a:prstGeom>
+          <a:ln>
+            <a:tailEnd type="triangle"/>
+          </a:ln>
+        </p:spPr>
+        <p:style>
+          <a:lnRef idx="2">
+            <a:schemeClr val="dk1"/>
+          </a:lnRef>
+          <a:fillRef idx="0">
+            <a:schemeClr val="dk1"/>
+          </a:fillRef>
+          <a:effectRef idx="1">
+            <a:schemeClr val="dk1"/>
+          </a:effectRef>
+          <a:fontRef idx="minor">
+            <a:schemeClr val="tx1"/>
+          </a:fontRef>
+        </p:style>
+      </p:cxnSp>
+      <p:cxnSp>
+        <p:nvCxnSpPr>
+          <p:cNvPr id="13" name="Straight Arrow Connector 12">
+            <a:extLst>
+              <a:ext uri="{FF2B5EF4-FFF2-40B4-BE49-F238E27FC236}">
+                <a16:creationId xmlns:a16="http://schemas.microsoft.com/office/drawing/2014/main" id="{E255D351-81C2-699B-E54C-79BC1FA2D78E}"/>
+              </a:ext>
+            </a:extLst>
+          </p:cNvPr>
+          <p:cNvCxnSpPr>
+            <a:cxnSpLocks/>
+          </p:cNvCxnSpPr>
+          <p:nvPr/>
+        </p:nvCxnSpPr>
+        <p:spPr>
+          <a:xfrm flipH="1">
+            <a:off x="5749159" y="4761186"/>
+            <a:ext cx="734887" cy="493986"/>
+          </a:xfrm>
+          <a:prstGeom prst="straightConnector1">
+            <a:avLst/>
+          </a:prstGeom>
+          <a:ln>
+            <a:tailEnd type="triangle"/>
+          </a:ln>
+        </p:spPr>
+        <p:style>
+          <a:lnRef idx="2">
+            <a:schemeClr val="dk1"/>
+          </a:lnRef>
+          <a:fillRef idx="0">
+            <a:schemeClr val="dk1"/>
+          </a:fillRef>
+          <a:effectRef idx="1">
+            <a:schemeClr val="dk1"/>
+          </a:effectRef>
+          <a:fontRef idx="minor">
+            <a:schemeClr val="tx1"/>
+          </a:fontRef>
+        </p:style>
+      </p:cxnSp>
+      <p:sp>
+        <p:nvSpPr>
+          <p:cNvPr id="17" name="TextBox 16">
+            <a:extLst>
+              <a:ext uri="{FF2B5EF4-FFF2-40B4-BE49-F238E27FC236}">
+                <a16:creationId xmlns:a16="http://schemas.microsoft.com/office/drawing/2014/main" id="{1EEF017C-8B9C-F9B8-0601-F85CA7D5E4DB}"/>
+              </a:ext>
+            </a:extLst>
+          </p:cNvPr>
+          <p:cNvSpPr txBox="1"/>
+          <p:nvPr/>
+        </p:nvSpPr>
+        <p:spPr>
+          <a:xfrm>
+            <a:off x="6671900" y="4346185"/>
+            <a:ext cx="6438378" cy="1384995"/>
+          </a:xfrm>
+          <a:prstGeom prst="rect">
+            <a:avLst/>
+          </a:prstGeom>
+          <a:noFill/>
+        </p:spPr>
+        <p:txBody>
+          <a:bodyPr wrap="square">
+            <a:spAutoFit/>
+          </a:bodyPr>
+          <a:lstStyle/>
+          <a:p>
+            <a:r>
+              <a:rPr lang="en-GB" sz="1400" dirty="0"/>
+              <a:t>Yellow (+) and brown (-) overlap:</a:t>
+            </a:r>
+          </a:p>
+          <a:p>
+            <a:endParaRPr lang="en-GB" sz="1400" dirty="0"/>
+          </a:p>
+          <a:p>
+            <a:r>
+              <a:rPr lang="en-GB" sz="1400" dirty="0"/>
+              <a:t>A: We can’t tell whether a read belongs to yellow or brown</a:t>
+            </a:r>
+          </a:p>
+          <a:p>
+            <a:r>
+              <a:rPr lang="en-GB" sz="1400" dirty="0"/>
+              <a:t>B:  Only blue reads go to yellow</a:t>
+            </a:r>
+          </a:p>
+          <a:p>
+            <a:r>
+              <a:rPr lang="en-GB" sz="1400" dirty="0"/>
+              <a:t>      Only red reads go to brown</a:t>
+            </a:r>
+          </a:p>
+          <a:p>
+            <a:endParaRPr lang="en-NL" sz="1400" dirty="0"/>
+          </a:p>
+        </p:txBody>
+      </p:sp>
+      <p:sp>
+        <p:nvSpPr>
+          <p:cNvPr id="19" name="TextBox 18">
+            <a:extLst>
+              <a:ext uri="{FF2B5EF4-FFF2-40B4-BE49-F238E27FC236}">
+                <a16:creationId xmlns:a16="http://schemas.microsoft.com/office/drawing/2014/main" id="{65FD87E7-8E1E-D7A3-AC17-73A393158B61}"/>
+              </a:ext>
+            </a:extLst>
+          </p:cNvPr>
+          <p:cNvSpPr txBox="1"/>
+          <p:nvPr/>
+        </p:nvSpPr>
+        <p:spPr>
+          <a:xfrm>
+            <a:off x="555350" y="1443662"/>
+            <a:ext cx="3528135" cy="338554"/>
+          </a:xfrm>
+          <a:prstGeom prst="rect">
+            <a:avLst/>
+          </a:prstGeom>
+          <a:noFill/>
+        </p:spPr>
+        <p:txBody>
+          <a:bodyPr wrap="square" rtlCol="0">
+            <a:spAutoFit/>
+          </a:bodyPr>
+          <a:lstStyle/>
+          <a:p>
+            <a:r>
+              <a:rPr lang="en-GB" sz="1600" b="1" dirty="0" err="1"/>
+              <a:t>Unstranded</a:t>
+            </a:r>
+            <a:r>
+              <a:rPr lang="en-GB" sz="1600" b="1" dirty="0"/>
+              <a:t> sequencing protocol</a:t>
+            </a:r>
+            <a:endParaRPr lang="en-NL" sz="1600" b="1" dirty="0"/>
+          </a:p>
+        </p:txBody>
+      </p:sp>
+      <p:sp>
+        <p:nvSpPr>
+          <p:cNvPr id="21" name="TextBox 20">
+            <a:extLst>
+              <a:ext uri="{FF2B5EF4-FFF2-40B4-BE49-F238E27FC236}">
+                <a16:creationId xmlns:a16="http://schemas.microsoft.com/office/drawing/2014/main" id="{602490D6-6476-6424-0B42-FB988968AA63}"/>
+              </a:ext>
+            </a:extLst>
+          </p:cNvPr>
+          <p:cNvSpPr txBox="1"/>
+          <p:nvPr/>
+        </p:nvSpPr>
+        <p:spPr>
+          <a:xfrm>
+            <a:off x="555350" y="4159301"/>
+            <a:ext cx="3528135" cy="338554"/>
+          </a:xfrm>
+          <a:prstGeom prst="rect">
+            <a:avLst/>
+          </a:prstGeom>
+          <a:noFill/>
+        </p:spPr>
+        <p:txBody>
+          <a:bodyPr wrap="square" rtlCol="0">
+            <a:spAutoFit/>
+          </a:bodyPr>
+          <a:lstStyle/>
+          <a:p>
+            <a:r>
+              <a:rPr lang="en-GB" sz="1600" b="1" dirty="0"/>
+              <a:t>Stranded sequencing protocol</a:t>
+            </a:r>
+            <a:endParaRPr lang="en-NL" sz="1600" b="1" dirty="0"/>
+          </a:p>
+        </p:txBody>
+      </p:sp>
+      <p:sp>
+        <p:nvSpPr>
+          <p:cNvPr id="23" name="TextBox 22">
+            <a:extLst>
+              <a:ext uri="{FF2B5EF4-FFF2-40B4-BE49-F238E27FC236}">
+                <a16:creationId xmlns:a16="http://schemas.microsoft.com/office/drawing/2014/main" id="{F16D4887-5408-E4DE-04D7-5C3B6B8A2982}"/>
+              </a:ext>
+            </a:extLst>
+          </p:cNvPr>
+          <p:cNvSpPr txBox="1"/>
+          <p:nvPr/>
+        </p:nvSpPr>
+        <p:spPr>
+          <a:xfrm>
+            <a:off x="8305800" y="6599705"/>
+            <a:ext cx="3886200" cy="276999"/>
+          </a:xfrm>
+          <a:prstGeom prst="rect">
+            <a:avLst/>
+          </a:prstGeom>
+          <a:noFill/>
+        </p:spPr>
+        <p:txBody>
+          <a:bodyPr wrap="square">
+            <a:spAutoFit/>
+          </a:bodyPr>
+          <a:lstStyle/>
+          <a:p>
+            <a:pPr algn="r"/>
+            <a:r>
+              <a:rPr lang="en-NL" sz="1200" dirty="0"/>
+              <a:t>Griffith </a:t>
+            </a:r>
+            <a:r>
+              <a:rPr lang="en-GB" sz="1200" dirty="0"/>
+              <a:t>et al., 2015; </a:t>
+            </a:r>
+            <a:r>
+              <a:rPr lang="fr-FR" sz="1200" dirty="0"/>
+              <a:t>doi:10.1371/journal.pcbi.1004393</a:t>
+            </a:r>
+            <a:endParaRPr lang="en-NL" sz="1200" dirty="0"/>
+          </a:p>
+        </p:txBody>
+      </p:sp>
+      <p:sp>
+        <p:nvSpPr>
+          <p:cNvPr id="3" name="TextBox 2">
+            <a:extLst>
+              <a:ext uri="{FF2B5EF4-FFF2-40B4-BE49-F238E27FC236}">
+                <a16:creationId xmlns:a16="http://schemas.microsoft.com/office/drawing/2014/main" id="{2C569B5B-6541-2F9D-C941-BC93A5423051}"/>
+              </a:ext>
+            </a:extLst>
+          </p:cNvPr>
+          <p:cNvSpPr txBox="1"/>
+          <p:nvPr/>
+        </p:nvSpPr>
+        <p:spPr>
+          <a:xfrm>
+            <a:off x="6591217" y="1724041"/>
+            <a:ext cx="5600783" cy="1169551"/>
+          </a:xfrm>
+          <a:prstGeom prst="rect">
+            <a:avLst/>
+          </a:prstGeom>
+          <a:noFill/>
+        </p:spPr>
+        <p:txBody>
+          <a:bodyPr wrap="square" rtlCol="0">
+            <a:spAutoFit/>
+          </a:bodyPr>
+          <a:lstStyle/>
+          <a:p>
+            <a:r>
+              <a:rPr lang="en-NL" sz="1400" b="1" dirty="0"/>
+              <a:t>Colours</a:t>
+            </a:r>
+            <a:r>
+              <a:rPr lang="en-GB" sz="1400" b="1" dirty="0"/>
+              <a:t> =	 genome strand (+/-) a pair appears to come from</a:t>
+            </a:r>
+          </a:p>
+          <a:p>
+            <a:pPr lvl="2"/>
+            <a:r>
+              <a:rPr lang="en-NL" sz="1400" dirty="0"/>
+              <a:t>not cDNA strand as on the previous slide</a:t>
+            </a:r>
+            <a:br>
+              <a:rPr lang="en-NL" sz="1400" dirty="0"/>
+            </a:br>
+            <a:endParaRPr lang="en-GB" sz="1400" dirty="0"/>
+          </a:p>
+          <a:p>
+            <a:pPr lvl="2"/>
+            <a:r>
+              <a:rPr lang="en-GB" sz="1400" dirty="0">
+                <a:sym typeface="Wingdings" panose="05000000000000000000" pitchFamily="2" charset="2"/>
+              </a:rPr>
+              <a:t></a:t>
+            </a:r>
+            <a:r>
+              <a:rPr lang="en-GB" sz="1400" dirty="0"/>
+              <a:t> </a:t>
+            </a:r>
+            <a:r>
+              <a:rPr lang="en-NL" sz="1400" b="1" dirty="0"/>
+              <a:t>Blue</a:t>
+            </a:r>
+            <a:r>
+              <a:rPr lang="en-NL" sz="1400" dirty="0"/>
+              <a:t> = </a:t>
+            </a:r>
+            <a:r>
+              <a:rPr lang="en-NL" sz="1400" b="1" dirty="0"/>
+              <a:t>forward (+)</a:t>
+            </a:r>
+            <a:r>
+              <a:rPr lang="en-NL" sz="1400" dirty="0"/>
+              <a:t> strand </a:t>
+            </a:r>
+            <a:endParaRPr lang="en-GB" sz="1400" dirty="0"/>
+          </a:p>
+          <a:p>
+            <a:pPr lvl="2"/>
+            <a:r>
+              <a:rPr lang="en-GB" sz="1400" b="1" dirty="0">
+                <a:sym typeface="Wingdings" panose="05000000000000000000" pitchFamily="2" charset="2"/>
+              </a:rPr>
+              <a:t></a:t>
+            </a:r>
+            <a:r>
+              <a:rPr lang="en-GB" sz="1400" b="1" dirty="0"/>
+              <a:t> R</a:t>
+            </a:r>
+            <a:r>
+              <a:rPr lang="en-NL" sz="1400" b="1" dirty="0"/>
+              <a:t>ed</a:t>
+            </a:r>
+            <a:r>
+              <a:rPr lang="en-NL" sz="1400" dirty="0"/>
+              <a:t> = </a:t>
+            </a:r>
+            <a:r>
+              <a:rPr lang="en-GB" sz="1400" dirty="0"/>
+              <a:t>  </a:t>
+            </a:r>
+            <a:r>
+              <a:rPr lang="en-NL" sz="1400" b="1" dirty="0"/>
+              <a:t>reverse (–)</a:t>
+            </a:r>
+            <a:r>
+              <a:rPr lang="en-NL" sz="1400" dirty="0"/>
+              <a:t> strand</a:t>
+            </a:r>
+            <a:endParaRPr lang="en-GB" sz="1400" dirty="0"/>
+          </a:p>
+        </p:txBody>
+      </p:sp>
+    </p:spTree>
+    <p:extLst>
+      <p:ext uri="{BB962C8B-B14F-4D97-AF65-F5344CB8AC3E}">
+        <p14:creationId xmlns:p14="http://schemas.microsoft.com/office/powerpoint/2010/main" val="196827406"/>
       </p:ext>
     </p:extLst>
   </p:cSld>
@@ -5186,4 +10113,319 @@
     </a:ext>
   </a:extLst>
 </a:theme>
+</file>
+
+<file path=ppt/theme/theme2.xml><?xml version="1.0" encoding="utf-8"?>
+<a:theme xmlns:a="http://schemas.openxmlformats.org/drawingml/2006/main" name="Office Theme">
+  <a:themeElements>
+    <a:clrScheme name="Office">
+      <a:dk1>
+        <a:sysClr val="windowText" lastClr="000000"/>
+      </a:dk1>
+      <a:lt1>
+        <a:sysClr val="window" lastClr="FFFFFF"/>
+      </a:lt1>
+      <a:dk2>
+        <a:srgbClr val="0E2841"/>
+      </a:dk2>
+      <a:lt2>
+        <a:srgbClr val="E8E8E8"/>
+      </a:lt2>
+      <a:accent1>
+        <a:srgbClr val="156082"/>
+      </a:accent1>
+      <a:accent2>
+        <a:srgbClr val="E97132"/>
+      </a:accent2>
+      <a:accent3>
+        <a:srgbClr val="196B24"/>
+      </a:accent3>
+      <a:accent4>
+        <a:srgbClr val="0F9ED5"/>
+      </a:accent4>
+      <a:accent5>
+        <a:srgbClr val="A02B93"/>
+      </a:accent5>
+      <a:accent6>
+        <a:srgbClr val="4EA72E"/>
+      </a:accent6>
+      <a:hlink>
+        <a:srgbClr val="467886"/>
+      </a:hlink>
+      <a:folHlink>
+        <a:srgbClr val="96607D"/>
+      </a:folHlink>
+    </a:clrScheme>
+    <a:fontScheme name="Office">
+      <a:majorFont>
+        <a:latin typeface="Aptos Display" panose="02110004020202020204"/>
+        <a:ea typeface=""/>
+        <a:cs typeface=""/>
+        <a:font script="Jpan" typeface="游ゴシック Light"/>
+        <a:font script="Hang" typeface="맑은 고딕"/>
+        <a:font script="Hans" typeface="等线 Light"/>
+        <a:font script="Hant" typeface="新細明體"/>
+        <a:font script="Arab" typeface="Times New Roman"/>
+        <a:font script="Hebr" typeface="Times New Roman"/>
+        <a:font script="Thai" typeface="Angsana New"/>
+        <a:font script="Ethi" typeface="Nyala"/>
+        <a:font script="Beng" typeface="Vrinda"/>
+        <a:font script="Gujr" typeface="Shruti"/>
+        <a:font script="Khmr" typeface="MoolBoran"/>
+        <a:font script="Knda" typeface="Tunga"/>
+        <a:font script="Guru" typeface="Raavi"/>
+        <a:font script="Cans" typeface="Euphemia"/>
+        <a:font script="Cher" typeface="Plantagenet Cherokee"/>
+        <a:font script="Yiii" typeface="Microsoft Yi Baiti"/>
+        <a:font script="Tibt" typeface="Microsoft Himalaya"/>
+        <a:font script="Thaa" typeface="MV Boli"/>
+        <a:font script="Deva" typeface="Mangal"/>
+        <a:font script="Telu" typeface="Gautami"/>
+        <a:font script="Taml" typeface="Latha"/>
+        <a:font script="Syrc" typeface="Estrangelo Edessa"/>
+        <a:font script="Orya" typeface="Kalinga"/>
+        <a:font script="Mlym" typeface="Kartika"/>
+        <a:font script="Laoo" typeface="DokChampa"/>
+        <a:font script="Sinh" typeface="Iskoola Pota"/>
+        <a:font script="Mong" typeface="Mongolian Baiti"/>
+        <a:font script="Viet" typeface="Times New Roman"/>
+        <a:font script="Uigh" typeface="Microsoft Uighur"/>
+        <a:font script="Geor" typeface="Sylfaen"/>
+        <a:font script="Armn" typeface="Arial"/>
+        <a:font script="Bugi" typeface="Leelawadee UI"/>
+        <a:font script="Bopo" typeface="Microsoft JhengHei"/>
+        <a:font script="Java" typeface="Javanese Text"/>
+        <a:font script="Lisu" typeface="Segoe UI"/>
+        <a:font script="Mymr" typeface="Myanmar Text"/>
+        <a:font script="Nkoo" typeface="Ebrima"/>
+        <a:font script="Olck" typeface="Nirmala UI"/>
+        <a:font script="Osma" typeface="Ebrima"/>
+        <a:font script="Phag" typeface="Phagspa"/>
+        <a:font script="Syrn" typeface="Estrangelo Edessa"/>
+        <a:font script="Syrj" typeface="Estrangelo Edessa"/>
+        <a:font script="Syre" typeface="Estrangelo Edessa"/>
+        <a:font script="Sora" typeface="Nirmala UI"/>
+        <a:font script="Tale" typeface="Microsoft Tai Le"/>
+        <a:font script="Talu" typeface="Microsoft New Tai Lue"/>
+        <a:font script="Tfng" typeface="Ebrima"/>
+      </a:majorFont>
+      <a:minorFont>
+        <a:latin typeface="Aptos" panose="02110004020202020204"/>
+        <a:ea typeface=""/>
+        <a:cs typeface=""/>
+        <a:font script="Jpan" typeface="游ゴシック"/>
+        <a:font script="Hang" typeface="맑은 고딕"/>
+        <a:font script="Hans" typeface="等线"/>
+        <a:font script="Hant" typeface="新細明體"/>
+        <a:font script="Arab" typeface="Arial"/>
+        <a:font script="Hebr" typeface="Arial"/>
+        <a:font script="Thai" typeface="Cordia New"/>
+        <a:font script="Ethi" typeface="Nyala"/>
+        <a:font script="Beng" typeface="Vrinda"/>
+        <a:font script="Gujr" typeface="Shruti"/>
+        <a:font script="Khmr" typeface="DaunPenh"/>
+        <a:font script="Knda" typeface="Tunga"/>
+        <a:font script="Guru" typeface="Raavi"/>
+        <a:font script="Cans" typeface="Euphemia"/>
+        <a:font script="Cher" typeface="Plantagenet Cherokee"/>
+        <a:font script="Yiii" typeface="Microsoft Yi Baiti"/>
+        <a:font script="Tibt" typeface="Microsoft Himalaya"/>
+        <a:font script="Thaa" typeface="MV Boli"/>
+        <a:font script="Deva" typeface="Mangal"/>
+        <a:font script="Telu" typeface="Gautami"/>
+        <a:font script="Taml" typeface="Latha"/>
+        <a:font script="Syrc" typeface="Estrangelo Edessa"/>
+        <a:font script="Orya" typeface="Kalinga"/>
+        <a:font script="Mlym" typeface="Kartika"/>
+        <a:font script="Laoo" typeface="DokChampa"/>
+        <a:font script="Sinh" typeface="Iskoola Pota"/>
+        <a:font script="Mong" typeface="Mongolian Baiti"/>
+        <a:font script="Viet" typeface="Arial"/>
+        <a:font script="Uigh" typeface="Microsoft Uighur"/>
+        <a:font script="Geor" typeface="Sylfaen"/>
+        <a:font script="Armn" typeface="Arial"/>
+        <a:font script="Bugi" typeface="Leelawadee UI"/>
+        <a:font script="Bopo" typeface="Microsoft JhengHei"/>
+        <a:font script="Java" typeface="Javanese Text"/>
+        <a:font script="Lisu" typeface="Segoe UI"/>
+        <a:font script="Mymr" typeface="Myanmar Text"/>
+        <a:font script="Nkoo" typeface="Ebrima"/>
+        <a:font script="Olck" typeface="Nirmala UI"/>
+        <a:font script="Osma" typeface="Ebrima"/>
+        <a:font script="Phag" typeface="Phagspa"/>
+        <a:font script="Syrn" typeface="Estrangelo Edessa"/>
+        <a:font script="Syrj" typeface="Estrangelo Edessa"/>
+        <a:font script="Syre" typeface="Estrangelo Edessa"/>
+        <a:font script="Sora" typeface="Nirmala UI"/>
+        <a:font script="Tale" typeface="Microsoft Tai Le"/>
+        <a:font script="Talu" typeface="Microsoft New Tai Lue"/>
+        <a:font script="Tfng" typeface="Ebrima"/>
+      </a:minorFont>
+    </a:fontScheme>
+    <a:fmtScheme name="Office">
+      <a:fillStyleLst>
+        <a:solidFill>
+          <a:schemeClr val="phClr"/>
+        </a:solidFill>
+        <a:gradFill rotWithShape="1">
+          <a:gsLst>
+            <a:gs pos="0">
+              <a:schemeClr val="phClr">
+                <a:lumMod val="110000"/>
+                <a:satMod val="105000"/>
+                <a:tint val="67000"/>
+              </a:schemeClr>
+            </a:gs>
+            <a:gs pos="50000">
+              <a:schemeClr val="phClr">
+                <a:lumMod val="105000"/>
+                <a:satMod val="103000"/>
+                <a:tint val="73000"/>
+              </a:schemeClr>
+            </a:gs>
+            <a:gs pos="100000">
+              <a:schemeClr val="phClr">
+                <a:lumMod val="105000"/>
+                <a:satMod val="109000"/>
+                <a:tint val="81000"/>
+              </a:schemeClr>
+            </a:gs>
+          </a:gsLst>
+          <a:lin ang="5400000" scaled="0"/>
+        </a:gradFill>
+        <a:gradFill rotWithShape="1">
+          <a:gsLst>
+            <a:gs pos="0">
+              <a:schemeClr val="phClr">
+                <a:satMod val="103000"/>
+                <a:lumMod val="102000"/>
+                <a:tint val="94000"/>
+              </a:schemeClr>
+            </a:gs>
+            <a:gs pos="50000">
+              <a:schemeClr val="phClr">
+                <a:satMod val="110000"/>
+                <a:lumMod val="100000"/>
+                <a:shade val="100000"/>
+              </a:schemeClr>
+            </a:gs>
+            <a:gs pos="100000">
+              <a:schemeClr val="phClr">
+                <a:lumMod val="99000"/>
+                <a:satMod val="120000"/>
+                <a:shade val="78000"/>
+              </a:schemeClr>
+            </a:gs>
+          </a:gsLst>
+          <a:lin ang="5400000" scaled="0"/>
+        </a:gradFill>
+      </a:fillStyleLst>
+      <a:lnStyleLst>
+        <a:ln w="12700" cap="flat" cmpd="sng" algn="ctr">
+          <a:solidFill>
+            <a:schemeClr val="phClr"/>
+          </a:solidFill>
+          <a:prstDash val="solid"/>
+          <a:miter lim="800000"/>
+        </a:ln>
+        <a:ln w="19050" cap="flat" cmpd="sng" algn="ctr">
+          <a:solidFill>
+            <a:schemeClr val="phClr"/>
+          </a:solidFill>
+          <a:prstDash val="solid"/>
+          <a:miter lim="800000"/>
+        </a:ln>
+        <a:ln w="25400" cap="flat" cmpd="sng" algn="ctr">
+          <a:solidFill>
+            <a:schemeClr val="phClr"/>
+          </a:solidFill>
+          <a:prstDash val="solid"/>
+          <a:miter lim="800000"/>
+        </a:ln>
+      </a:lnStyleLst>
+      <a:effectStyleLst>
+        <a:effectStyle>
+          <a:effectLst/>
+        </a:effectStyle>
+        <a:effectStyle>
+          <a:effectLst/>
+        </a:effectStyle>
+        <a:effectStyle>
+          <a:effectLst>
+            <a:outerShdw blurRad="57150" dist="19050" dir="5400000" algn="ctr" rotWithShape="0">
+              <a:srgbClr val="000000">
+                <a:alpha val="63000"/>
+              </a:srgbClr>
+            </a:outerShdw>
+          </a:effectLst>
+        </a:effectStyle>
+      </a:effectStyleLst>
+      <a:bgFillStyleLst>
+        <a:solidFill>
+          <a:schemeClr val="phClr"/>
+        </a:solidFill>
+        <a:solidFill>
+          <a:schemeClr val="phClr">
+            <a:tint val="95000"/>
+            <a:satMod val="170000"/>
+          </a:schemeClr>
+        </a:solidFill>
+        <a:gradFill rotWithShape="1">
+          <a:gsLst>
+            <a:gs pos="0">
+              <a:schemeClr val="phClr">
+                <a:tint val="93000"/>
+                <a:satMod val="150000"/>
+                <a:shade val="98000"/>
+                <a:lumMod val="102000"/>
+              </a:schemeClr>
+            </a:gs>
+            <a:gs pos="50000">
+              <a:schemeClr val="phClr">
+                <a:tint val="98000"/>
+                <a:satMod val="130000"/>
+                <a:shade val="90000"/>
+                <a:lumMod val="103000"/>
+              </a:schemeClr>
+            </a:gs>
+            <a:gs pos="100000">
+              <a:schemeClr val="phClr">
+                <a:shade val="63000"/>
+                <a:satMod val="120000"/>
+              </a:schemeClr>
+            </a:gs>
+          </a:gsLst>
+          <a:lin ang="5400000" scaled="0"/>
+        </a:gradFill>
+      </a:bgFillStyleLst>
+    </a:fmtScheme>
+  </a:themeElements>
+  <a:objectDefaults>
+    <a:lnDef>
+      <a:spPr/>
+      <a:bodyPr/>
+      <a:lstStyle/>
+      <a:style>
+        <a:lnRef idx="2">
+          <a:schemeClr val="accent1"/>
+        </a:lnRef>
+        <a:fillRef idx="0">
+          <a:schemeClr val="accent1"/>
+        </a:fillRef>
+        <a:effectRef idx="1">
+          <a:schemeClr val="accent1"/>
+        </a:effectRef>
+        <a:fontRef idx="minor">
+          <a:schemeClr val="tx1"/>
+        </a:fontRef>
+      </a:style>
+    </a:lnDef>
+  </a:objectDefaults>
+  <a:extraClrSchemeLst/>
+  <a:extLst>
+    <a:ext uri="{05A4C25C-085E-4340-85A3-A5531E510DB2}">
+      <thm15:themeFamily xmlns:thm15="http://schemas.microsoft.com/office/thememl/2012/main" name="Office Theme" id="{2E142A2C-CD16-42D6-873A-C26D2A0506FA}" vid="{1BDDFF52-6CD6-40A5-AB3C-68EB2F1E4D0A}"/>
+    </a:ext>
+  </a:extLst>
+</a:theme>
 </file>